--- a/ppt/Grade06/G06_S30_Simple_Machines_1.pptx
+++ b/ppt/Grade06/G06_S30_Simple_Machines_1.pptx
@@ -5234,9 +5234,33 @@
           </a:p>
         </p:txBody>
       </p:sp>
-      <p:sp>
-        <p:nvSpPr>
-          <p:cNvPr id="9" name="TextBox 8"/>
+      <p:pic>
+        <p:nvPicPr>
+          <p:cNvPr id="9" name="Picture 8" descr="icon_gauge.png"/>
+          <p:cNvPicPr>
+            <a:picLocks noChangeAspect="1"/>
+          </p:cNvPicPr>
+          <p:nvPr/>
+        </p:nvPicPr>
+        <p:blipFill>
+          <a:blip r:embed="rId2"/>
+          <a:stretch>
+            <a:fillRect/>
+          </a:stretch>
+        </p:blipFill>
+        <p:spPr>
+          <a:xfrm>
+            <a:off x="1051560" y="2304288"/>
+            <a:ext cx="320040" cy="320040"/>
+          </a:xfrm>
+          <a:prstGeom prst="rect">
+            <a:avLst/>
+          </a:prstGeom>
+        </p:spPr>
+      </p:pic>
+      <p:sp>
+        <p:nvSpPr>
+          <p:cNvPr id="10" name="TextBox 9"/>
           <p:cNvSpPr txBox="1"/>
           <p:nvPr/>
         </p:nvSpPr>
@@ -5271,7 +5295,7 @@
       </p:sp>
       <p:sp>
         <p:nvSpPr>
-          <p:cNvPr id="10" name="TextBox 9"/>
+          <p:cNvPr id="11" name="TextBox 10"/>
           <p:cNvSpPr txBox="1"/>
           <p:nvPr/>
         </p:nvSpPr>
@@ -5306,7 +5330,7 @@
       </p:sp>
       <p:sp>
         <p:nvSpPr>
-          <p:cNvPr id="11" name="Rounded Rectangle 10"/>
+          <p:cNvPr id="12" name="Rounded Rectangle 11"/>
           <p:cNvSpPr/>
           <p:nvPr/>
         </p:nvSpPr>
@@ -5358,7 +5382,7 @@
       </p:sp>
       <p:sp>
         <p:nvSpPr>
-          <p:cNvPr id="12" name="Rounded Rectangle 11"/>
+          <p:cNvPr id="13" name="Rounded Rectangle 12"/>
           <p:cNvSpPr/>
           <p:nvPr/>
         </p:nvSpPr>
@@ -5402,9 +5426,33 @@
           </a:p>
         </p:txBody>
       </p:sp>
-      <p:sp>
-        <p:nvSpPr>
-          <p:cNvPr id="13" name="TextBox 12"/>
+      <p:pic>
+        <p:nvPicPr>
+          <p:cNvPr id="14" name="Picture 13" descr="icon_gauge.png"/>
+          <p:cNvPicPr>
+            <a:picLocks noChangeAspect="1"/>
+          </p:cNvPicPr>
+          <p:nvPr/>
+        </p:nvPicPr>
+        <p:blipFill>
+          <a:blip r:embed="rId2"/>
+          <a:stretch>
+            <a:fillRect/>
+          </a:stretch>
+        </p:blipFill>
+        <p:spPr>
+          <a:xfrm>
+            <a:off x="6629400" y="2304288"/>
+            <a:ext cx="320040" cy="320040"/>
+          </a:xfrm>
+          <a:prstGeom prst="rect">
+            <a:avLst/>
+          </a:prstGeom>
+        </p:spPr>
+      </p:pic>
+      <p:sp>
+        <p:nvSpPr>
+          <p:cNvPr id="15" name="TextBox 14"/>
           <p:cNvSpPr txBox="1"/>
           <p:nvPr/>
         </p:nvSpPr>
@@ -5439,7 +5487,7 @@
       </p:sp>
       <p:sp>
         <p:nvSpPr>
-          <p:cNvPr id="14" name="TextBox 13"/>
+          <p:cNvPr id="16" name="TextBox 15"/>
           <p:cNvSpPr txBox="1"/>
           <p:nvPr/>
         </p:nvSpPr>
@@ -5474,7 +5522,7 @@
       </p:sp>
       <p:sp>
         <p:nvSpPr>
-          <p:cNvPr id="15" name="Rounded Rectangle 14"/>
+          <p:cNvPr id="17" name="Rounded Rectangle 16"/>
           <p:cNvSpPr/>
           <p:nvPr/>
         </p:nvSpPr>
@@ -5526,7 +5574,7 @@
       </p:sp>
       <p:sp>
         <p:nvSpPr>
-          <p:cNvPr id="16" name="Rounded Rectangle 15"/>
+          <p:cNvPr id="18" name="Rounded Rectangle 17"/>
           <p:cNvSpPr/>
           <p:nvPr/>
         </p:nvSpPr>
@@ -5570,9 +5618,33 @@
           </a:p>
         </p:txBody>
       </p:sp>
-      <p:sp>
-        <p:nvSpPr>
-          <p:cNvPr id="17" name="TextBox 16"/>
+      <p:pic>
+        <p:nvPicPr>
+          <p:cNvPr id="19" name="Picture 18" descr="icon_gear.png"/>
+          <p:cNvPicPr>
+            <a:picLocks noChangeAspect="1"/>
+          </p:cNvPicPr>
+          <p:nvPr/>
+        </p:nvPicPr>
+        <p:blipFill>
+          <a:blip r:embed="rId3"/>
+          <a:stretch>
+            <a:fillRect/>
+          </a:stretch>
+        </p:blipFill>
+        <p:spPr>
+          <a:xfrm>
+            <a:off x="1051560" y="4133087"/>
+            <a:ext cx="320040" cy="320040"/>
+          </a:xfrm>
+          <a:prstGeom prst="rect">
+            <a:avLst/>
+          </a:prstGeom>
+        </p:spPr>
+      </p:pic>
+      <p:sp>
+        <p:nvSpPr>
+          <p:cNvPr id="20" name="TextBox 19"/>
           <p:cNvSpPr txBox="1"/>
           <p:nvPr/>
         </p:nvSpPr>
@@ -5607,7 +5679,7 @@
       </p:sp>
       <p:sp>
         <p:nvSpPr>
-          <p:cNvPr id="18" name="TextBox 17"/>
+          <p:cNvPr id="21" name="TextBox 20"/>
           <p:cNvSpPr txBox="1"/>
           <p:nvPr/>
         </p:nvSpPr>
@@ -5642,7 +5714,7 @@
       </p:sp>
       <p:sp>
         <p:nvSpPr>
-          <p:cNvPr id="19" name="Rounded Rectangle 18"/>
+          <p:cNvPr id="22" name="Rounded Rectangle 21"/>
           <p:cNvSpPr/>
           <p:nvPr/>
         </p:nvSpPr>
@@ -5694,7 +5766,7 @@
       </p:sp>
       <p:sp>
         <p:nvSpPr>
-          <p:cNvPr id="20" name="Rounded Rectangle 19"/>
+          <p:cNvPr id="23" name="Rounded Rectangle 22"/>
           <p:cNvSpPr/>
           <p:nvPr/>
         </p:nvSpPr>
@@ -5738,9 +5810,33 @@
           </a:p>
         </p:txBody>
       </p:sp>
-      <p:sp>
-        <p:nvSpPr>
-          <p:cNvPr id="21" name="TextBox 20"/>
+      <p:pic>
+        <p:nvPicPr>
+          <p:cNvPr id="24" name="Picture 23" descr="icon_gear.png"/>
+          <p:cNvPicPr>
+            <a:picLocks noChangeAspect="1"/>
+          </p:cNvPicPr>
+          <p:nvPr/>
+        </p:nvPicPr>
+        <p:blipFill>
+          <a:blip r:embed="rId3"/>
+          <a:stretch>
+            <a:fillRect/>
+          </a:stretch>
+        </p:blipFill>
+        <p:spPr>
+          <a:xfrm>
+            <a:off x="6629400" y="4133087"/>
+            <a:ext cx="320040" cy="320040"/>
+          </a:xfrm>
+          <a:prstGeom prst="rect">
+            <a:avLst/>
+          </a:prstGeom>
+        </p:spPr>
+      </p:pic>
+      <p:sp>
+        <p:nvSpPr>
+          <p:cNvPr id="25" name="TextBox 24"/>
           <p:cNvSpPr txBox="1"/>
           <p:nvPr/>
         </p:nvSpPr>
@@ -5775,7 +5871,7 @@
       </p:sp>
       <p:sp>
         <p:nvSpPr>
-          <p:cNvPr id="22" name="TextBox 21"/>
+          <p:cNvPr id="26" name="TextBox 25"/>
           <p:cNvSpPr txBox="1"/>
           <p:nvPr/>
         </p:nvSpPr>
@@ -6729,7 +6825,7 @@
                 </a:solidFill>
                 <a:latin typeface="Calibri"/>
               </a:rPr>
-              <a:t>Q1 — Work</a:t>
+              <a:t>Q1 - Work</a:t>
             </a:r>
           </a:p>
         </p:txBody>
@@ -7025,7 +7121,7 @@
         <p:spPr>
           <a:xfrm>
             <a:off x="1508760" y="3749039"/>
-            <a:ext cx="4297680" cy="868680"/>
+            <a:ext cx="3840480" cy="868680"/>
           </a:xfrm>
           <a:prstGeom prst="rect">
             <a:avLst/>
@@ -7185,7 +7281,7 @@
         <p:spPr>
           <a:xfrm>
             <a:off x="7040880" y="3749039"/>
-            <a:ext cx="4297680" cy="868680"/>
+            <a:ext cx="3840480" cy="868680"/>
           </a:xfrm>
           <a:prstGeom prst="rect">
             <a:avLst/>
@@ -7345,7 +7441,7 @@
         <p:spPr>
           <a:xfrm>
             <a:off x="1508760" y="4782312"/>
-            <a:ext cx="4297680" cy="868680"/>
+            <a:ext cx="3840480" cy="868680"/>
           </a:xfrm>
           <a:prstGeom prst="rect">
             <a:avLst/>
@@ -7505,7 +7601,7 @@
         <p:spPr>
           <a:xfrm>
             <a:off x="7040880" y="4782312"/>
-            <a:ext cx="4297680" cy="868680"/>
+            <a:ext cx="3840480" cy="868680"/>
           </a:xfrm>
           <a:prstGeom prst="rect">
             <a:avLst/>
@@ -7572,7 +7668,7 @@
             <a:avLst/>
           </a:prstGeom>
           <a:solidFill>
-            <a:srgbClr val="2A9D8F"/>
+            <a:srgbClr val="0A9396"/>
           </a:solidFill>
           <a:ln>
             <a:noFill/>
@@ -7627,11 +7723,11 @@
             <a:r>
               <a:rPr sz="1300" b="1" i="0">
                 <a:solidFill>
-                  <a:srgbClr val="2A9D8F"/>
+                  <a:srgbClr val="0A9396"/>
                 </a:solidFill>
                 <a:latin typeface="Arial"/>
               </a:rPr>
-              <a:t>ANSWER REVEAL</a:t>
+              <a:t>QUIZ QUESTION</a:t>
             </a:r>
           </a:p>
         </p:txBody>
@@ -7666,7 +7762,7 @@
                 </a:solidFill>
                 <a:latin typeface="Calibri"/>
               </a:rPr>
-              <a:t>Q1 — Answer</a:t>
+              <a:t>Q1 - Work</a:t>
             </a:r>
           </a:p>
         </p:txBody>
@@ -7755,166 +7851,6 @@
           <a:prstGeom prst="roundRect">
             <a:avLst>
               <a:gd name="adj" fmla="val 4000"/>
-            </a:avLst>
-          </a:prstGeom>
-          <a:solidFill>
-            <a:srgbClr val="E9F5F0"/>
-          </a:solidFill>
-          <a:ln>
-            <a:noFill/>
-          </a:ln>
-          <a:effectLst/>
-        </p:spPr>
-        <p:style>
-          <a:lnRef idx="1">
-            <a:schemeClr val="accent1"/>
-          </a:lnRef>
-          <a:fillRef idx="3">
-            <a:schemeClr val="accent1"/>
-          </a:fillRef>
-          <a:effectRef idx="2">
-            <a:schemeClr val="accent1"/>
-          </a:effectRef>
-          <a:fontRef idx="minor">
-            <a:schemeClr val="lt1"/>
-          </a:fontRef>
-        </p:style>
-        <p:txBody>
-          <a:bodyPr rtlCol="0" anchor="ctr"/>
-          <a:lstStyle/>
-          <a:p>
-            <a:pPr algn="ctr"/>
-          </a:p>
-        </p:txBody>
-      </p:sp>
-      <p:sp>
-        <p:nvSpPr>
-          <p:cNvPr id="8" name="Oval 7"/>
-          <p:cNvSpPr/>
-          <p:nvPr/>
-        </p:nvSpPr>
-        <p:spPr>
-          <a:xfrm>
-            <a:off x="1005840" y="2240280"/>
-            <a:ext cx="731520" cy="731520"/>
-          </a:xfrm>
-          <a:prstGeom prst="ellipse">
-            <a:avLst/>
-          </a:prstGeom>
-          <a:solidFill>
-            <a:srgbClr val="2A9D8F"/>
-          </a:solidFill>
-          <a:ln>
-            <a:noFill/>
-          </a:ln>
-          <a:effectLst/>
-        </p:spPr>
-        <p:style>
-          <a:lnRef idx="1">
-            <a:schemeClr val="accent1"/>
-          </a:lnRef>
-          <a:fillRef idx="3">
-            <a:schemeClr val="accent1"/>
-          </a:fillRef>
-          <a:effectRef idx="2">
-            <a:schemeClr val="accent1"/>
-          </a:effectRef>
-          <a:fontRef idx="minor">
-            <a:schemeClr val="lt1"/>
-          </a:fontRef>
-        </p:style>
-        <p:txBody>
-          <a:bodyPr rtlCol="0" anchor="ctr"/>
-          <a:lstStyle/>
-          <a:p>
-            <a:pPr algn="ctr"/>
-          </a:p>
-        </p:txBody>
-      </p:sp>
-      <p:sp>
-        <p:nvSpPr>
-          <p:cNvPr id="9" name="TextBox 8"/>
-          <p:cNvSpPr txBox="1"/>
-          <p:nvPr/>
-        </p:nvSpPr>
-        <p:spPr>
-          <a:xfrm>
-            <a:off x="1005840" y="2240280"/>
-            <a:ext cx="731520" cy="731520"/>
-          </a:xfrm>
-          <a:prstGeom prst="rect">
-            <a:avLst/>
-          </a:prstGeom>
-          <a:noFill/>
-        </p:spPr>
-        <p:txBody>
-          <a:bodyPr wrap="square" anchor="ctr" lIns="0" rIns="0" tIns="0" bIns="0">
-            <a:spAutoFit/>
-          </a:bodyPr>
-          <a:lstStyle/>
-          <a:p>
-            <a:pPr algn="ctr"/>
-            <a:r>
-              <a:rPr sz="3000" b="1" i="0">
-                <a:solidFill>
-                  <a:srgbClr val="FFFFFF"/>
-                </a:solidFill>
-                <a:latin typeface="Calibri"/>
-              </a:rPr>
-              <a:t>✓</a:t>
-            </a:r>
-          </a:p>
-        </p:txBody>
-      </p:sp>
-      <p:sp>
-        <p:nvSpPr>
-          <p:cNvPr id="10" name="TextBox 9"/>
-          <p:cNvSpPr txBox="1"/>
-          <p:nvPr/>
-        </p:nvSpPr>
-        <p:spPr>
-          <a:xfrm>
-            <a:off x="1920240" y="1828800"/>
-            <a:ext cx="9326880" cy="1554480"/>
-          </a:xfrm>
-          <a:prstGeom prst="rect">
-            <a:avLst/>
-          </a:prstGeom>
-          <a:noFill/>
-        </p:spPr>
-        <p:txBody>
-          <a:bodyPr wrap="square" anchor="ctr" lIns="0" rIns="0" tIns="0" bIns="0">
-            <a:spAutoFit/>
-          </a:bodyPr>
-          <a:lstStyle/>
-          <a:p>
-            <a:pPr algn="l"/>
-            <a:r>
-              <a:rPr sz="2200" b="1" i="0">
-                <a:solidFill>
-                  <a:srgbClr val="1D2433"/>
-                </a:solidFill>
-                <a:latin typeface="Calibri"/>
-              </a:rPr>
-              <a:t>B. A body moves in the direction of the force</a:t>
-            </a:r>
-          </a:p>
-        </p:txBody>
-      </p:sp>
-      <p:sp>
-        <p:nvSpPr>
-          <p:cNvPr id="11" name="Rounded Rectangle 10"/>
-          <p:cNvSpPr/>
-          <p:nvPr/>
-        </p:nvSpPr>
-        <p:spPr>
-          <a:xfrm>
-            <a:off x="640080" y="3657600"/>
-            <a:ext cx="10881360" cy="2011680"/>
-          </a:xfrm>
-          <a:prstGeom prst="roundRect">
-            <a:avLst>
-              <a:gd name="adj" fmla="val 3000"/>
             </a:avLst>
           </a:prstGeom>
           <a:solidFill>
@@ -7955,68 +7891,840 @@
       </p:sp>
       <p:sp>
         <p:nvSpPr>
+          <p:cNvPr id="8" name="TextBox 7"/>
+          <p:cNvSpPr txBox="1"/>
+          <p:nvPr/>
+        </p:nvSpPr>
+        <p:spPr>
+          <a:xfrm>
+            <a:off x="1005840" y="1828800"/>
+            <a:ext cx="10149840" cy="1554480"/>
+          </a:xfrm>
+          <a:prstGeom prst="rect">
+            <a:avLst/>
+          </a:prstGeom>
+          <a:noFill/>
+        </p:spPr>
+        <p:txBody>
+          <a:bodyPr wrap="square" anchor="ctr" lIns="0" rIns="0" tIns="0" bIns="0">
+            <a:spAutoFit/>
+          </a:bodyPr>
+          <a:lstStyle/>
+          <a:p>
+            <a:pPr algn="l"/>
+            <a:r>
+              <a:rPr sz="1900" b="1" i="0">
+                <a:solidFill>
+                  <a:srgbClr val="1D2433"/>
+                </a:solidFill>
+                <a:latin typeface="Calibri"/>
+              </a:rPr>
+              <a:t>Work is said to be done only when:</a:t>
+            </a:r>
+          </a:p>
+        </p:txBody>
+      </p:sp>
+      <p:sp>
+        <p:nvSpPr>
+          <p:cNvPr id="9" name="Rounded Rectangle 8"/>
+          <p:cNvSpPr/>
+          <p:nvPr/>
+        </p:nvSpPr>
+        <p:spPr>
+          <a:xfrm>
+            <a:off x="640080" y="3749039"/>
+            <a:ext cx="5349240" cy="868680"/>
+          </a:xfrm>
+          <a:prstGeom prst="roundRect">
+            <a:avLst>
+              <a:gd name="adj" fmla="val 12000"/>
+            </a:avLst>
+          </a:prstGeom>
+          <a:solidFill>
+            <a:srgbClr val="EAF1F4"/>
+          </a:solidFill>
+          <a:ln>
+            <a:noFill/>
+          </a:ln>
+          <a:effectLst/>
+        </p:spPr>
+        <p:style>
+          <a:lnRef idx="1">
+            <a:schemeClr val="accent1"/>
+          </a:lnRef>
+          <a:fillRef idx="3">
+            <a:schemeClr val="accent1"/>
+          </a:fillRef>
+          <a:effectRef idx="2">
+            <a:schemeClr val="accent1"/>
+          </a:effectRef>
+          <a:fontRef idx="minor">
+            <a:schemeClr val="lt1"/>
+          </a:fontRef>
+        </p:style>
+        <p:txBody>
+          <a:bodyPr rtlCol="0" anchor="ctr"/>
+          <a:lstStyle/>
+          <a:p>
+            <a:pPr algn="ctr"/>
+          </a:p>
+        </p:txBody>
+      </p:sp>
+      <p:sp>
+        <p:nvSpPr>
+          <p:cNvPr id="10" name="Oval 9"/>
+          <p:cNvSpPr/>
+          <p:nvPr/>
+        </p:nvSpPr>
+        <p:spPr>
+          <a:xfrm>
+            <a:off x="914400" y="3977639"/>
+            <a:ext cx="411480" cy="411480"/>
+          </a:xfrm>
+          <a:prstGeom prst="ellipse">
+            <a:avLst/>
+          </a:prstGeom>
+          <a:solidFill>
+            <a:srgbClr val="0A9396"/>
+          </a:solidFill>
+          <a:ln>
+            <a:noFill/>
+          </a:ln>
+          <a:effectLst/>
+        </p:spPr>
+        <p:style>
+          <a:lnRef idx="1">
+            <a:schemeClr val="accent1"/>
+          </a:lnRef>
+          <a:fillRef idx="3">
+            <a:schemeClr val="accent1"/>
+          </a:fillRef>
+          <a:effectRef idx="2">
+            <a:schemeClr val="accent1"/>
+          </a:effectRef>
+          <a:fontRef idx="minor">
+            <a:schemeClr val="lt1"/>
+          </a:fontRef>
+        </p:style>
+        <p:txBody>
+          <a:bodyPr rtlCol="0" anchor="ctr"/>
+          <a:lstStyle/>
+          <a:p>
+            <a:pPr algn="ctr"/>
+          </a:p>
+        </p:txBody>
+      </p:sp>
+      <p:sp>
+        <p:nvSpPr>
+          <p:cNvPr id="11" name="TextBox 10"/>
+          <p:cNvSpPr txBox="1"/>
+          <p:nvPr/>
+        </p:nvSpPr>
+        <p:spPr>
+          <a:xfrm>
+            <a:off x="914400" y="3977639"/>
+            <a:ext cx="411480" cy="411480"/>
+          </a:xfrm>
+          <a:prstGeom prst="rect">
+            <a:avLst/>
+          </a:prstGeom>
+          <a:noFill/>
+        </p:spPr>
+        <p:txBody>
+          <a:bodyPr wrap="square" anchor="ctr" lIns="0" rIns="0" tIns="0" bIns="0">
+            <a:spAutoFit/>
+          </a:bodyPr>
+          <a:lstStyle/>
+          <a:p>
+            <a:pPr algn="ctr"/>
+            <a:r>
+              <a:rPr sz="1400" b="1" i="0">
+                <a:solidFill>
+                  <a:srgbClr val="FFFFFF"/>
+                </a:solidFill>
+                <a:latin typeface="Calibri"/>
+              </a:rPr>
+              <a:t>A</a:t>
+            </a:r>
+          </a:p>
+        </p:txBody>
+      </p:sp>
+      <p:sp>
+        <p:nvSpPr>
           <p:cNvPr id="12" name="TextBox 11"/>
           <p:cNvSpPr txBox="1"/>
           <p:nvPr/>
         </p:nvSpPr>
         <p:spPr>
           <a:xfrm>
-            <a:off x="1005840" y="3886200"/>
-            <a:ext cx="4572000" cy="365760"/>
-          </a:xfrm>
-          <a:prstGeom prst="rect">
-            <a:avLst/>
-          </a:prstGeom>
-          <a:noFill/>
-        </p:spPr>
-        <p:txBody>
-          <a:bodyPr wrap="square" anchor="t" lIns="0" rIns="0" tIns="0" bIns="0">
+            <a:off x="1508760" y="3749039"/>
+            <a:ext cx="3840480" cy="868680"/>
+          </a:xfrm>
+          <a:prstGeom prst="rect">
+            <a:avLst/>
+          </a:prstGeom>
+          <a:noFill/>
+        </p:spPr>
+        <p:txBody>
+          <a:bodyPr wrap="square" anchor="ctr" lIns="0" rIns="0" tIns="0" bIns="0">
             <a:spAutoFit/>
           </a:bodyPr>
           <a:lstStyle/>
           <a:p>
             <a:pPr algn="l"/>
             <a:r>
+              <a:rPr sz="1450" b="0" i="0">
+                <a:solidFill>
+                  <a:srgbClr val="1D2433"/>
+                </a:solidFill>
+                <a:latin typeface="Calibri"/>
+              </a:rPr>
+              <a:t>A force is applied</a:t>
+            </a:r>
+          </a:p>
+        </p:txBody>
+      </p:sp>
+      <p:sp>
+        <p:nvSpPr>
+          <p:cNvPr id="13" name="Rounded Rectangle 12"/>
+          <p:cNvSpPr/>
+          <p:nvPr/>
+        </p:nvSpPr>
+        <p:spPr>
+          <a:xfrm>
+            <a:off x="6172200" y="3749039"/>
+            <a:ext cx="5349240" cy="868680"/>
+          </a:xfrm>
+          <a:prstGeom prst="roundRect">
+            <a:avLst>
+              <a:gd name="adj" fmla="val 12000"/>
+            </a:avLst>
+          </a:prstGeom>
+          <a:solidFill>
+            <a:srgbClr val="E9F5F0"/>
+          </a:solidFill>
+          <a:ln w="31750">
+            <a:solidFill>
+              <a:srgbClr val="2A9D8F"/>
+            </a:solidFill>
+          </a:ln>
+          <a:effectLst/>
+        </p:spPr>
+        <p:style>
+          <a:lnRef idx="1">
+            <a:schemeClr val="accent1"/>
+          </a:lnRef>
+          <a:fillRef idx="3">
+            <a:schemeClr val="accent1"/>
+          </a:fillRef>
+          <a:effectRef idx="2">
+            <a:schemeClr val="accent1"/>
+          </a:effectRef>
+          <a:fontRef idx="minor">
+            <a:schemeClr val="lt1"/>
+          </a:fontRef>
+        </p:style>
+        <p:txBody>
+          <a:bodyPr rtlCol="0" anchor="ctr"/>
+          <a:lstStyle/>
+          <a:p>
+            <a:pPr algn="ctr"/>
+          </a:p>
+        </p:txBody>
+      </p:sp>
+      <p:sp>
+        <p:nvSpPr>
+          <p:cNvPr id="14" name="Oval 13"/>
+          <p:cNvSpPr/>
+          <p:nvPr/>
+        </p:nvSpPr>
+        <p:spPr>
+          <a:xfrm>
+            <a:off x="6446520" y="3977639"/>
+            <a:ext cx="411480" cy="411480"/>
+          </a:xfrm>
+          <a:prstGeom prst="ellipse">
+            <a:avLst/>
+          </a:prstGeom>
+          <a:solidFill>
+            <a:srgbClr val="2A9D8F"/>
+          </a:solidFill>
+          <a:ln>
+            <a:noFill/>
+          </a:ln>
+          <a:effectLst/>
+        </p:spPr>
+        <p:style>
+          <a:lnRef idx="1">
+            <a:schemeClr val="accent1"/>
+          </a:lnRef>
+          <a:fillRef idx="3">
+            <a:schemeClr val="accent1"/>
+          </a:fillRef>
+          <a:effectRef idx="2">
+            <a:schemeClr val="accent1"/>
+          </a:effectRef>
+          <a:fontRef idx="minor">
+            <a:schemeClr val="lt1"/>
+          </a:fontRef>
+        </p:style>
+        <p:txBody>
+          <a:bodyPr rtlCol="0" anchor="ctr"/>
+          <a:lstStyle/>
+          <a:p>
+            <a:pPr algn="ctr"/>
+          </a:p>
+        </p:txBody>
+      </p:sp>
+      <p:sp>
+        <p:nvSpPr>
+          <p:cNvPr id="15" name="TextBox 14"/>
+          <p:cNvSpPr txBox="1"/>
+          <p:nvPr/>
+        </p:nvSpPr>
+        <p:spPr>
+          <a:xfrm>
+            <a:off x="6446520" y="3977639"/>
+            <a:ext cx="411480" cy="411480"/>
+          </a:xfrm>
+          <a:prstGeom prst="rect">
+            <a:avLst/>
+          </a:prstGeom>
+          <a:noFill/>
+        </p:spPr>
+        <p:txBody>
+          <a:bodyPr wrap="square" anchor="ctr" lIns="0" rIns="0" tIns="0" bIns="0">
+            <a:spAutoFit/>
+          </a:bodyPr>
+          <a:lstStyle/>
+          <a:p>
+            <a:pPr algn="ctr"/>
+            <a:r>
               <a:rPr sz="1400" b="1" i="0">
                 <a:solidFill>
+                  <a:srgbClr val="FFFFFF"/>
+                </a:solidFill>
+                <a:latin typeface="Calibri"/>
+              </a:rPr>
+              <a:t>B</a:t>
+            </a:r>
+          </a:p>
+        </p:txBody>
+      </p:sp>
+      <p:sp>
+        <p:nvSpPr>
+          <p:cNvPr id="16" name="TextBox 15"/>
+          <p:cNvSpPr txBox="1"/>
+          <p:nvPr/>
+        </p:nvSpPr>
+        <p:spPr>
+          <a:xfrm>
+            <a:off x="7040880" y="3749039"/>
+            <a:ext cx="3840480" cy="868680"/>
+          </a:xfrm>
+          <a:prstGeom prst="rect">
+            <a:avLst/>
+          </a:prstGeom>
+          <a:noFill/>
+        </p:spPr>
+        <p:txBody>
+          <a:bodyPr wrap="square" anchor="ctr" lIns="0" rIns="0" tIns="0" bIns="0">
+            <a:spAutoFit/>
+          </a:bodyPr>
+          <a:lstStyle/>
+          <a:p>
+            <a:pPr algn="l"/>
+            <a:r>
+              <a:rPr sz="1450" b="1" i="0">
+                <a:solidFill>
+                  <a:srgbClr val="1D2433"/>
+                </a:solidFill>
+                <a:latin typeface="Calibri"/>
+              </a:rPr>
+              <a:t>A body moves in the direction of the force</a:t>
+            </a:r>
+          </a:p>
+        </p:txBody>
+      </p:sp>
+      <p:sp>
+        <p:nvSpPr>
+          <p:cNvPr id="17" name="Oval 16"/>
+          <p:cNvSpPr/>
+          <p:nvPr/>
+        </p:nvSpPr>
+        <p:spPr>
+          <a:xfrm>
+            <a:off x="10972800" y="3995927"/>
+            <a:ext cx="365760" cy="365760"/>
+          </a:xfrm>
+          <a:prstGeom prst="ellipse">
+            <a:avLst/>
+          </a:prstGeom>
+          <a:solidFill>
+            <a:srgbClr val="2A9D8F"/>
+          </a:solidFill>
+          <a:ln>
+            <a:noFill/>
+          </a:ln>
+          <a:effectLst/>
+        </p:spPr>
+        <p:style>
+          <a:lnRef idx="1">
+            <a:schemeClr val="accent1"/>
+          </a:lnRef>
+          <a:fillRef idx="3">
+            <a:schemeClr val="accent1"/>
+          </a:fillRef>
+          <a:effectRef idx="2">
+            <a:schemeClr val="accent1"/>
+          </a:effectRef>
+          <a:fontRef idx="minor">
+            <a:schemeClr val="lt1"/>
+          </a:fontRef>
+        </p:style>
+        <p:txBody>
+          <a:bodyPr rtlCol="0" anchor="ctr"/>
+          <a:lstStyle/>
+          <a:p>
+            <a:pPr algn="ctr"/>
+          </a:p>
+        </p:txBody>
+      </p:sp>
+      <p:sp>
+        <p:nvSpPr>
+          <p:cNvPr id="18" name="TextBox 17"/>
+          <p:cNvSpPr txBox="1"/>
+          <p:nvPr/>
+        </p:nvSpPr>
+        <p:spPr>
+          <a:xfrm>
+            <a:off x="10972800" y="3950207"/>
+            <a:ext cx="365760" cy="365760"/>
+          </a:xfrm>
+          <a:prstGeom prst="rect">
+            <a:avLst/>
+          </a:prstGeom>
+          <a:noFill/>
+        </p:spPr>
+        <p:txBody>
+          <a:bodyPr wrap="square" anchor="ctr" lIns="0" rIns="0" tIns="0" bIns="0">
+            <a:spAutoFit/>
+          </a:bodyPr>
+          <a:lstStyle/>
+          <a:p>
+            <a:pPr algn="ctr"/>
+            <a:r>
+              <a:rPr sz="1600" b="1" i="0">
+                <a:solidFill>
+                  <a:srgbClr val="FFFFFF"/>
+                </a:solidFill>
+                <a:latin typeface="Calibri"/>
+              </a:rPr>
+              <a:t>✓</a:t>
+            </a:r>
+          </a:p>
+        </p:txBody>
+      </p:sp>
+      <p:sp>
+        <p:nvSpPr>
+          <p:cNvPr id="19" name="Rounded Rectangle 18"/>
+          <p:cNvSpPr/>
+          <p:nvPr/>
+        </p:nvSpPr>
+        <p:spPr>
+          <a:xfrm>
+            <a:off x="640080" y="4782312"/>
+            <a:ext cx="5349240" cy="868680"/>
+          </a:xfrm>
+          <a:prstGeom prst="roundRect">
+            <a:avLst>
+              <a:gd name="adj" fmla="val 12000"/>
+            </a:avLst>
+          </a:prstGeom>
+          <a:solidFill>
+            <a:srgbClr val="EAF1F4"/>
+          </a:solidFill>
+          <a:ln>
+            <a:noFill/>
+          </a:ln>
+          <a:effectLst/>
+        </p:spPr>
+        <p:style>
+          <a:lnRef idx="1">
+            <a:schemeClr val="accent1"/>
+          </a:lnRef>
+          <a:fillRef idx="3">
+            <a:schemeClr val="accent1"/>
+          </a:fillRef>
+          <a:effectRef idx="2">
+            <a:schemeClr val="accent1"/>
+          </a:effectRef>
+          <a:fontRef idx="minor">
+            <a:schemeClr val="lt1"/>
+          </a:fontRef>
+        </p:style>
+        <p:txBody>
+          <a:bodyPr rtlCol="0" anchor="ctr"/>
+          <a:lstStyle/>
+          <a:p>
+            <a:pPr algn="ctr"/>
+          </a:p>
+        </p:txBody>
+      </p:sp>
+      <p:sp>
+        <p:nvSpPr>
+          <p:cNvPr id="20" name="Oval 19"/>
+          <p:cNvSpPr/>
+          <p:nvPr/>
+        </p:nvSpPr>
+        <p:spPr>
+          <a:xfrm>
+            <a:off x="914400" y="5010912"/>
+            <a:ext cx="411480" cy="411480"/>
+          </a:xfrm>
+          <a:prstGeom prst="ellipse">
+            <a:avLst/>
+          </a:prstGeom>
+          <a:solidFill>
+            <a:srgbClr val="0A9396"/>
+          </a:solidFill>
+          <a:ln>
+            <a:noFill/>
+          </a:ln>
+          <a:effectLst/>
+        </p:spPr>
+        <p:style>
+          <a:lnRef idx="1">
+            <a:schemeClr val="accent1"/>
+          </a:lnRef>
+          <a:fillRef idx="3">
+            <a:schemeClr val="accent1"/>
+          </a:fillRef>
+          <a:effectRef idx="2">
+            <a:schemeClr val="accent1"/>
+          </a:effectRef>
+          <a:fontRef idx="minor">
+            <a:schemeClr val="lt1"/>
+          </a:fontRef>
+        </p:style>
+        <p:txBody>
+          <a:bodyPr rtlCol="0" anchor="ctr"/>
+          <a:lstStyle/>
+          <a:p>
+            <a:pPr algn="ctr"/>
+          </a:p>
+        </p:txBody>
+      </p:sp>
+      <p:sp>
+        <p:nvSpPr>
+          <p:cNvPr id="21" name="TextBox 20"/>
+          <p:cNvSpPr txBox="1"/>
+          <p:nvPr/>
+        </p:nvSpPr>
+        <p:spPr>
+          <a:xfrm>
+            <a:off x="914400" y="5010912"/>
+            <a:ext cx="411480" cy="411480"/>
+          </a:xfrm>
+          <a:prstGeom prst="rect">
+            <a:avLst/>
+          </a:prstGeom>
+          <a:noFill/>
+        </p:spPr>
+        <p:txBody>
+          <a:bodyPr wrap="square" anchor="ctr" lIns="0" rIns="0" tIns="0" bIns="0">
+            <a:spAutoFit/>
+          </a:bodyPr>
+          <a:lstStyle/>
+          <a:p>
+            <a:pPr algn="ctr"/>
+            <a:r>
+              <a:rPr sz="1400" b="1" i="0">
+                <a:solidFill>
+                  <a:srgbClr val="FFFFFF"/>
+                </a:solidFill>
+                <a:latin typeface="Calibri"/>
+              </a:rPr>
+              <a:t>C</a:t>
+            </a:r>
+          </a:p>
+        </p:txBody>
+      </p:sp>
+      <p:sp>
+        <p:nvSpPr>
+          <p:cNvPr id="22" name="TextBox 21"/>
+          <p:cNvSpPr txBox="1"/>
+          <p:nvPr/>
+        </p:nvSpPr>
+        <p:spPr>
+          <a:xfrm>
+            <a:off x="1508760" y="4782312"/>
+            <a:ext cx="3840480" cy="868680"/>
+          </a:xfrm>
+          <a:prstGeom prst="rect">
+            <a:avLst/>
+          </a:prstGeom>
+          <a:noFill/>
+        </p:spPr>
+        <p:txBody>
+          <a:bodyPr wrap="square" anchor="ctr" lIns="0" rIns="0" tIns="0" bIns="0">
+            <a:spAutoFit/>
+          </a:bodyPr>
+          <a:lstStyle/>
+          <a:p>
+            <a:pPr algn="l"/>
+            <a:r>
+              <a:rPr sz="1450" b="0" i="0">
+                <a:solidFill>
+                  <a:srgbClr val="1D2433"/>
+                </a:solidFill>
+                <a:latin typeface="Calibri"/>
+              </a:rPr>
+              <a:t>A body is at rest</a:t>
+            </a:r>
+          </a:p>
+        </p:txBody>
+      </p:sp>
+      <p:sp>
+        <p:nvSpPr>
+          <p:cNvPr id="23" name="Rounded Rectangle 22"/>
+          <p:cNvSpPr/>
+          <p:nvPr/>
+        </p:nvSpPr>
+        <p:spPr>
+          <a:xfrm>
+            <a:off x="6172200" y="4782312"/>
+            <a:ext cx="5349240" cy="868680"/>
+          </a:xfrm>
+          <a:prstGeom prst="roundRect">
+            <a:avLst>
+              <a:gd name="adj" fmla="val 12000"/>
+            </a:avLst>
+          </a:prstGeom>
+          <a:solidFill>
+            <a:srgbClr val="EAF1F4"/>
+          </a:solidFill>
+          <a:ln>
+            <a:noFill/>
+          </a:ln>
+          <a:effectLst/>
+        </p:spPr>
+        <p:style>
+          <a:lnRef idx="1">
+            <a:schemeClr val="accent1"/>
+          </a:lnRef>
+          <a:fillRef idx="3">
+            <a:schemeClr val="accent1"/>
+          </a:fillRef>
+          <a:effectRef idx="2">
+            <a:schemeClr val="accent1"/>
+          </a:effectRef>
+          <a:fontRef idx="minor">
+            <a:schemeClr val="lt1"/>
+          </a:fontRef>
+        </p:style>
+        <p:txBody>
+          <a:bodyPr rtlCol="0" anchor="ctr"/>
+          <a:lstStyle/>
+          <a:p>
+            <a:pPr algn="ctr"/>
+          </a:p>
+        </p:txBody>
+      </p:sp>
+      <p:sp>
+        <p:nvSpPr>
+          <p:cNvPr id="24" name="Oval 23"/>
+          <p:cNvSpPr/>
+          <p:nvPr/>
+        </p:nvSpPr>
+        <p:spPr>
+          <a:xfrm>
+            <a:off x="6446520" y="5010912"/>
+            <a:ext cx="411480" cy="411480"/>
+          </a:xfrm>
+          <a:prstGeom prst="ellipse">
+            <a:avLst/>
+          </a:prstGeom>
+          <a:solidFill>
+            <a:srgbClr val="0A9396"/>
+          </a:solidFill>
+          <a:ln>
+            <a:noFill/>
+          </a:ln>
+          <a:effectLst/>
+        </p:spPr>
+        <p:style>
+          <a:lnRef idx="1">
+            <a:schemeClr val="accent1"/>
+          </a:lnRef>
+          <a:fillRef idx="3">
+            <a:schemeClr val="accent1"/>
+          </a:fillRef>
+          <a:effectRef idx="2">
+            <a:schemeClr val="accent1"/>
+          </a:effectRef>
+          <a:fontRef idx="minor">
+            <a:schemeClr val="lt1"/>
+          </a:fontRef>
+        </p:style>
+        <p:txBody>
+          <a:bodyPr rtlCol="0" anchor="ctr"/>
+          <a:lstStyle/>
+          <a:p>
+            <a:pPr algn="ctr"/>
+          </a:p>
+        </p:txBody>
+      </p:sp>
+      <p:sp>
+        <p:nvSpPr>
+          <p:cNvPr id="25" name="TextBox 24"/>
+          <p:cNvSpPr txBox="1"/>
+          <p:nvPr/>
+        </p:nvSpPr>
+        <p:spPr>
+          <a:xfrm>
+            <a:off x="6446520" y="5010912"/>
+            <a:ext cx="411480" cy="411480"/>
+          </a:xfrm>
+          <a:prstGeom prst="rect">
+            <a:avLst/>
+          </a:prstGeom>
+          <a:noFill/>
+        </p:spPr>
+        <p:txBody>
+          <a:bodyPr wrap="square" anchor="ctr" lIns="0" rIns="0" tIns="0" bIns="0">
+            <a:spAutoFit/>
+          </a:bodyPr>
+          <a:lstStyle/>
+          <a:p>
+            <a:pPr algn="ctr"/>
+            <a:r>
+              <a:rPr sz="1400" b="1" i="0">
+                <a:solidFill>
+                  <a:srgbClr val="FFFFFF"/>
+                </a:solidFill>
+                <a:latin typeface="Calibri"/>
+              </a:rPr>
+              <a:t>D</a:t>
+            </a:r>
+          </a:p>
+        </p:txBody>
+      </p:sp>
+      <p:sp>
+        <p:nvSpPr>
+          <p:cNvPr id="26" name="TextBox 25"/>
+          <p:cNvSpPr txBox="1"/>
+          <p:nvPr/>
+        </p:nvSpPr>
+        <p:spPr>
+          <a:xfrm>
+            <a:off x="7040880" y="4782312"/>
+            <a:ext cx="3840480" cy="868680"/>
+          </a:xfrm>
+          <a:prstGeom prst="rect">
+            <a:avLst/>
+          </a:prstGeom>
+          <a:noFill/>
+        </p:spPr>
+        <p:txBody>
+          <a:bodyPr wrap="square" anchor="ctr" lIns="0" rIns="0" tIns="0" bIns="0">
+            <a:spAutoFit/>
+          </a:bodyPr>
+          <a:lstStyle/>
+          <a:p>
+            <a:pPr algn="l"/>
+            <a:r>
+              <a:rPr sz="1450" b="0" i="0">
+                <a:solidFill>
+                  <a:srgbClr val="1D2433"/>
+                </a:solidFill>
+                <a:latin typeface="Calibri"/>
+              </a:rPr>
+              <a:t>Energy is stored</a:t>
+            </a:r>
+          </a:p>
+        </p:txBody>
+      </p:sp>
+      <p:sp>
+        <p:nvSpPr>
+          <p:cNvPr id="27" name="Rounded Rectangle 26"/>
+          <p:cNvSpPr/>
+          <p:nvPr/>
+        </p:nvSpPr>
+        <p:spPr>
+          <a:xfrm>
+            <a:off x="640080" y="5779008"/>
+            <a:ext cx="10881360" cy="566928"/>
+          </a:xfrm>
+          <a:prstGeom prst="roundRect">
+            <a:avLst>
+              <a:gd name="adj" fmla="val 10000"/>
+            </a:avLst>
+          </a:prstGeom>
+          <a:solidFill>
+            <a:srgbClr val="EEF2F7"/>
+          </a:solidFill>
+          <a:ln>
+            <a:noFill/>
+          </a:ln>
+          <a:effectLst/>
+        </p:spPr>
+        <p:style>
+          <a:lnRef idx="1">
+            <a:schemeClr val="accent1"/>
+          </a:lnRef>
+          <a:fillRef idx="3">
+            <a:schemeClr val="accent1"/>
+          </a:fillRef>
+          <a:effectRef idx="2">
+            <a:schemeClr val="accent1"/>
+          </a:effectRef>
+          <a:fontRef idx="minor">
+            <a:schemeClr val="lt1"/>
+          </a:fontRef>
+        </p:style>
+        <p:txBody>
+          <a:bodyPr rtlCol="0" anchor="ctr"/>
+          <a:lstStyle/>
+          <a:p>
+            <a:pPr algn="ctr"/>
+          </a:p>
+        </p:txBody>
+      </p:sp>
+      <p:sp>
+        <p:nvSpPr>
+          <p:cNvPr id="28" name="TextBox 27"/>
+          <p:cNvSpPr txBox="1"/>
+          <p:nvPr/>
+        </p:nvSpPr>
+        <p:spPr>
+          <a:xfrm>
+            <a:off x="914400" y="5779008"/>
+            <a:ext cx="10332720" cy="566928"/>
+          </a:xfrm>
+          <a:prstGeom prst="rect">
+            <a:avLst/>
+          </a:prstGeom>
+          <a:noFill/>
+        </p:spPr>
+        <p:txBody>
+          <a:bodyPr wrap="square" anchor="ctr" lIns="0" rIns="0" tIns="0" bIns="0">
+            <a:spAutoFit/>
+          </a:bodyPr>
+          <a:lstStyle/>
+          <a:p>
+            <a:pPr algn="l"/>
+            <a:r>
+              <a:rPr sz="1250" b="1" i="0">
+                <a:solidFill>
                   <a:srgbClr val="2A9D8F"/>
                 </a:solidFill>
                 <a:latin typeface="Arial"/>
               </a:rPr>
-              <a:t>WHY</a:t>
-            </a:r>
-          </a:p>
-        </p:txBody>
-      </p:sp>
-      <p:sp>
-        <p:nvSpPr>
-          <p:cNvPr id="13" name="TextBox 12"/>
-          <p:cNvSpPr txBox="1"/>
-          <p:nvPr/>
-        </p:nvSpPr>
-        <p:spPr>
-          <a:xfrm>
-            <a:off x="1005840" y="4297680"/>
-            <a:ext cx="10149840" cy="1280160"/>
-          </a:xfrm>
-          <a:prstGeom prst="rect">
-            <a:avLst/>
-          </a:prstGeom>
-          <a:noFill/>
-        </p:spPr>
-        <p:txBody>
-          <a:bodyPr wrap="square" anchor="t" lIns="0" rIns="0" tIns="0" bIns="0">
-            <a:spAutoFit/>
-          </a:bodyPr>
-          <a:lstStyle/>
-          <a:p>
-            <a:pPr algn="l">
-              <a:lnSpc>
-                <a:spcPct val="110000"/>
-              </a:lnSpc>
-            </a:pPr>
-            <a:r>
-              <a:rPr sz="1600" b="0" i="0">
+              <a:t>Why  </a:t>
+            </a:r>
+            <a:r>
+              <a:rPr sz="1200" b="0" i="0">
                 <a:solidFill>
                   <a:srgbClr val="1D2433"/>
                 </a:solidFill>
@@ -8162,7 +8870,7 @@
                 </a:solidFill>
                 <a:latin typeface="Calibri"/>
               </a:rPr>
-              <a:t>Q2 — Units</a:t>
+              <a:t>Q2 - Units</a:t>
             </a:r>
           </a:p>
         </p:txBody>
@@ -8458,7 +9166,7 @@
         <p:spPr>
           <a:xfrm>
             <a:off x="1508760" y="3749039"/>
-            <a:ext cx="4297680" cy="868680"/>
+            <a:ext cx="3840480" cy="868680"/>
           </a:xfrm>
           <a:prstGeom prst="rect">
             <a:avLst/>
@@ -8618,7 +9326,7 @@
         <p:spPr>
           <a:xfrm>
             <a:off x="7040880" y="3749039"/>
-            <a:ext cx="4297680" cy="868680"/>
+            <a:ext cx="3840480" cy="868680"/>
           </a:xfrm>
           <a:prstGeom prst="rect">
             <a:avLst/>
@@ -8778,7 +9486,7 @@
         <p:spPr>
           <a:xfrm>
             <a:off x="1508760" y="4782312"/>
-            <a:ext cx="4297680" cy="868680"/>
+            <a:ext cx="3840480" cy="868680"/>
           </a:xfrm>
           <a:prstGeom prst="rect">
             <a:avLst/>
@@ -8938,7 +9646,7 @@
         <p:spPr>
           <a:xfrm>
             <a:off x="7040880" y="4782312"/>
-            <a:ext cx="4297680" cy="868680"/>
+            <a:ext cx="3840480" cy="868680"/>
           </a:xfrm>
           <a:prstGeom prst="rect">
             <a:avLst/>
@@ -9005,7 +9713,7 @@
             <a:avLst/>
           </a:prstGeom>
           <a:solidFill>
-            <a:srgbClr val="2A9D8F"/>
+            <a:srgbClr val="0A9396"/>
           </a:solidFill>
           <a:ln>
             <a:noFill/>
@@ -9060,11 +9768,11 @@
             <a:r>
               <a:rPr sz="1300" b="1" i="0">
                 <a:solidFill>
-                  <a:srgbClr val="2A9D8F"/>
+                  <a:srgbClr val="0A9396"/>
                 </a:solidFill>
                 <a:latin typeface="Arial"/>
               </a:rPr>
-              <a:t>ANSWER REVEAL</a:t>
+              <a:t>QUIZ QUESTION</a:t>
             </a:r>
           </a:p>
         </p:txBody>
@@ -9099,7 +9807,7 @@
                 </a:solidFill>
                 <a:latin typeface="Calibri"/>
               </a:rPr>
-              <a:t>Q2 — Answer</a:t>
+              <a:t>Q2 - Units</a:t>
             </a:r>
           </a:p>
         </p:txBody>
@@ -9188,166 +9896,6 @@
           <a:prstGeom prst="roundRect">
             <a:avLst>
               <a:gd name="adj" fmla="val 4000"/>
-            </a:avLst>
-          </a:prstGeom>
-          <a:solidFill>
-            <a:srgbClr val="E9F5F0"/>
-          </a:solidFill>
-          <a:ln>
-            <a:noFill/>
-          </a:ln>
-          <a:effectLst/>
-        </p:spPr>
-        <p:style>
-          <a:lnRef idx="1">
-            <a:schemeClr val="accent1"/>
-          </a:lnRef>
-          <a:fillRef idx="3">
-            <a:schemeClr val="accent1"/>
-          </a:fillRef>
-          <a:effectRef idx="2">
-            <a:schemeClr val="accent1"/>
-          </a:effectRef>
-          <a:fontRef idx="minor">
-            <a:schemeClr val="lt1"/>
-          </a:fontRef>
-        </p:style>
-        <p:txBody>
-          <a:bodyPr rtlCol="0" anchor="ctr"/>
-          <a:lstStyle/>
-          <a:p>
-            <a:pPr algn="ctr"/>
-          </a:p>
-        </p:txBody>
-      </p:sp>
-      <p:sp>
-        <p:nvSpPr>
-          <p:cNvPr id="8" name="Oval 7"/>
-          <p:cNvSpPr/>
-          <p:nvPr/>
-        </p:nvSpPr>
-        <p:spPr>
-          <a:xfrm>
-            <a:off x="1005840" y="2240280"/>
-            <a:ext cx="731520" cy="731520"/>
-          </a:xfrm>
-          <a:prstGeom prst="ellipse">
-            <a:avLst/>
-          </a:prstGeom>
-          <a:solidFill>
-            <a:srgbClr val="2A9D8F"/>
-          </a:solidFill>
-          <a:ln>
-            <a:noFill/>
-          </a:ln>
-          <a:effectLst/>
-        </p:spPr>
-        <p:style>
-          <a:lnRef idx="1">
-            <a:schemeClr val="accent1"/>
-          </a:lnRef>
-          <a:fillRef idx="3">
-            <a:schemeClr val="accent1"/>
-          </a:fillRef>
-          <a:effectRef idx="2">
-            <a:schemeClr val="accent1"/>
-          </a:effectRef>
-          <a:fontRef idx="minor">
-            <a:schemeClr val="lt1"/>
-          </a:fontRef>
-        </p:style>
-        <p:txBody>
-          <a:bodyPr rtlCol="0" anchor="ctr"/>
-          <a:lstStyle/>
-          <a:p>
-            <a:pPr algn="ctr"/>
-          </a:p>
-        </p:txBody>
-      </p:sp>
-      <p:sp>
-        <p:nvSpPr>
-          <p:cNvPr id="9" name="TextBox 8"/>
-          <p:cNvSpPr txBox="1"/>
-          <p:nvPr/>
-        </p:nvSpPr>
-        <p:spPr>
-          <a:xfrm>
-            <a:off x="1005840" y="2240280"/>
-            <a:ext cx="731520" cy="731520"/>
-          </a:xfrm>
-          <a:prstGeom prst="rect">
-            <a:avLst/>
-          </a:prstGeom>
-          <a:noFill/>
-        </p:spPr>
-        <p:txBody>
-          <a:bodyPr wrap="square" anchor="ctr" lIns="0" rIns="0" tIns="0" bIns="0">
-            <a:spAutoFit/>
-          </a:bodyPr>
-          <a:lstStyle/>
-          <a:p>
-            <a:pPr algn="ctr"/>
-            <a:r>
-              <a:rPr sz="3000" b="1" i="0">
-                <a:solidFill>
-                  <a:srgbClr val="FFFFFF"/>
-                </a:solidFill>
-                <a:latin typeface="Calibri"/>
-              </a:rPr>
-              <a:t>✓</a:t>
-            </a:r>
-          </a:p>
-        </p:txBody>
-      </p:sp>
-      <p:sp>
-        <p:nvSpPr>
-          <p:cNvPr id="10" name="TextBox 9"/>
-          <p:cNvSpPr txBox="1"/>
-          <p:nvPr/>
-        </p:nvSpPr>
-        <p:spPr>
-          <a:xfrm>
-            <a:off x="1920240" y="1828800"/>
-            <a:ext cx="9326880" cy="1554480"/>
-          </a:xfrm>
-          <a:prstGeom prst="rect">
-            <a:avLst/>
-          </a:prstGeom>
-          <a:noFill/>
-        </p:spPr>
-        <p:txBody>
-          <a:bodyPr wrap="square" anchor="ctr" lIns="0" rIns="0" tIns="0" bIns="0">
-            <a:spAutoFit/>
-          </a:bodyPr>
-          <a:lstStyle/>
-          <a:p>
-            <a:pPr algn="l"/>
-            <a:r>
-              <a:rPr sz="2200" b="1" i="0">
-                <a:solidFill>
-                  <a:srgbClr val="1D2433"/>
-                </a:solidFill>
-                <a:latin typeface="Calibri"/>
-              </a:rPr>
-              <a:t>B. Joule</a:t>
-            </a:r>
-          </a:p>
-        </p:txBody>
-      </p:sp>
-      <p:sp>
-        <p:nvSpPr>
-          <p:cNvPr id="11" name="Rounded Rectangle 10"/>
-          <p:cNvSpPr/>
-          <p:nvPr/>
-        </p:nvSpPr>
-        <p:spPr>
-          <a:xfrm>
-            <a:off x="640080" y="3657600"/>
-            <a:ext cx="10881360" cy="2011680"/>
-          </a:xfrm>
-          <a:prstGeom prst="roundRect">
-            <a:avLst>
-              <a:gd name="adj" fmla="val 3000"/>
             </a:avLst>
           </a:prstGeom>
           <a:solidFill>
@@ -9388,68 +9936,840 @@
       </p:sp>
       <p:sp>
         <p:nvSpPr>
+          <p:cNvPr id="8" name="TextBox 7"/>
+          <p:cNvSpPr txBox="1"/>
+          <p:nvPr/>
+        </p:nvSpPr>
+        <p:spPr>
+          <a:xfrm>
+            <a:off x="1005840" y="1828800"/>
+            <a:ext cx="10149840" cy="1554480"/>
+          </a:xfrm>
+          <a:prstGeom prst="rect">
+            <a:avLst/>
+          </a:prstGeom>
+          <a:noFill/>
+        </p:spPr>
+        <p:txBody>
+          <a:bodyPr wrap="square" anchor="ctr" lIns="0" rIns="0" tIns="0" bIns="0">
+            <a:spAutoFit/>
+          </a:bodyPr>
+          <a:lstStyle/>
+          <a:p>
+            <a:pPr algn="l"/>
+            <a:r>
+              <a:rPr sz="1900" b="1" i="0">
+                <a:solidFill>
+                  <a:srgbClr val="1D2433"/>
+                </a:solidFill>
+                <a:latin typeface="Calibri"/>
+              </a:rPr>
+              <a:t>The SI unit of work and energy is the:</a:t>
+            </a:r>
+          </a:p>
+        </p:txBody>
+      </p:sp>
+      <p:sp>
+        <p:nvSpPr>
+          <p:cNvPr id="9" name="Rounded Rectangle 8"/>
+          <p:cNvSpPr/>
+          <p:nvPr/>
+        </p:nvSpPr>
+        <p:spPr>
+          <a:xfrm>
+            <a:off x="640080" y="3749039"/>
+            <a:ext cx="5349240" cy="868680"/>
+          </a:xfrm>
+          <a:prstGeom prst="roundRect">
+            <a:avLst>
+              <a:gd name="adj" fmla="val 12000"/>
+            </a:avLst>
+          </a:prstGeom>
+          <a:solidFill>
+            <a:srgbClr val="EAF1F4"/>
+          </a:solidFill>
+          <a:ln>
+            <a:noFill/>
+          </a:ln>
+          <a:effectLst/>
+        </p:spPr>
+        <p:style>
+          <a:lnRef idx="1">
+            <a:schemeClr val="accent1"/>
+          </a:lnRef>
+          <a:fillRef idx="3">
+            <a:schemeClr val="accent1"/>
+          </a:fillRef>
+          <a:effectRef idx="2">
+            <a:schemeClr val="accent1"/>
+          </a:effectRef>
+          <a:fontRef idx="minor">
+            <a:schemeClr val="lt1"/>
+          </a:fontRef>
+        </p:style>
+        <p:txBody>
+          <a:bodyPr rtlCol="0" anchor="ctr"/>
+          <a:lstStyle/>
+          <a:p>
+            <a:pPr algn="ctr"/>
+          </a:p>
+        </p:txBody>
+      </p:sp>
+      <p:sp>
+        <p:nvSpPr>
+          <p:cNvPr id="10" name="Oval 9"/>
+          <p:cNvSpPr/>
+          <p:nvPr/>
+        </p:nvSpPr>
+        <p:spPr>
+          <a:xfrm>
+            <a:off x="914400" y="3977639"/>
+            <a:ext cx="411480" cy="411480"/>
+          </a:xfrm>
+          <a:prstGeom prst="ellipse">
+            <a:avLst/>
+          </a:prstGeom>
+          <a:solidFill>
+            <a:srgbClr val="0A9396"/>
+          </a:solidFill>
+          <a:ln>
+            <a:noFill/>
+          </a:ln>
+          <a:effectLst/>
+        </p:spPr>
+        <p:style>
+          <a:lnRef idx="1">
+            <a:schemeClr val="accent1"/>
+          </a:lnRef>
+          <a:fillRef idx="3">
+            <a:schemeClr val="accent1"/>
+          </a:fillRef>
+          <a:effectRef idx="2">
+            <a:schemeClr val="accent1"/>
+          </a:effectRef>
+          <a:fontRef idx="minor">
+            <a:schemeClr val="lt1"/>
+          </a:fontRef>
+        </p:style>
+        <p:txBody>
+          <a:bodyPr rtlCol="0" anchor="ctr"/>
+          <a:lstStyle/>
+          <a:p>
+            <a:pPr algn="ctr"/>
+          </a:p>
+        </p:txBody>
+      </p:sp>
+      <p:sp>
+        <p:nvSpPr>
+          <p:cNvPr id="11" name="TextBox 10"/>
+          <p:cNvSpPr txBox="1"/>
+          <p:nvPr/>
+        </p:nvSpPr>
+        <p:spPr>
+          <a:xfrm>
+            <a:off x="914400" y="3977639"/>
+            <a:ext cx="411480" cy="411480"/>
+          </a:xfrm>
+          <a:prstGeom prst="rect">
+            <a:avLst/>
+          </a:prstGeom>
+          <a:noFill/>
+        </p:spPr>
+        <p:txBody>
+          <a:bodyPr wrap="square" anchor="ctr" lIns="0" rIns="0" tIns="0" bIns="0">
+            <a:spAutoFit/>
+          </a:bodyPr>
+          <a:lstStyle/>
+          <a:p>
+            <a:pPr algn="ctr"/>
+            <a:r>
+              <a:rPr sz="1400" b="1" i="0">
+                <a:solidFill>
+                  <a:srgbClr val="FFFFFF"/>
+                </a:solidFill>
+                <a:latin typeface="Calibri"/>
+              </a:rPr>
+              <a:t>A</a:t>
+            </a:r>
+          </a:p>
+        </p:txBody>
+      </p:sp>
+      <p:sp>
+        <p:nvSpPr>
           <p:cNvPr id="12" name="TextBox 11"/>
           <p:cNvSpPr txBox="1"/>
           <p:nvPr/>
         </p:nvSpPr>
         <p:spPr>
           <a:xfrm>
-            <a:off x="1005840" y="3886200"/>
-            <a:ext cx="4572000" cy="365760"/>
-          </a:xfrm>
-          <a:prstGeom prst="rect">
-            <a:avLst/>
-          </a:prstGeom>
-          <a:noFill/>
-        </p:spPr>
-        <p:txBody>
-          <a:bodyPr wrap="square" anchor="t" lIns="0" rIns="0" tIns="0" bIns="0">
+            <a:off x="1508760" y="3749039"/>
+            <a:ext cx="3840480" cy="868680"/>
+          </a:xfrm>
+          <a:prstGeom prst="rect">
+            <a:avLst/>
+          </a:prstGeom>
+          <a:noFill/>
+        </p:spPr>
+        <p:txBody>
+          <a:bodyPr wrap="square" anchor="ctr" lIns="0" rIns="0" tIns="0" bIns="0">
             <a:spAutoFit/>
           </a:bodyPr>
           <a:lstStyle/>
           <a:p>
             <a:pPr algn="l"/>
             <a:r>
+              <a:rPr sz="1450" b="0" i="0">
+                <a:solidFill>
+                  <a:srgbClr val="1D2433"/>
+                </a:solidFill>
+                <a:latin typeface="Calibri"/>
+              </a:rPr>
+              <a:t>Newton</a:t>
+            </a:r>
+          </a:p>
+        </p:txBody>
+      </p:sp>
+      <p:sp>
+        <p:nvSpPr>
+          <p:cNvPr id="13" name="Rounded Rectangle 12"/>
+          <p:cNvSpPr/>
+          <p:nvPr/>
+        </p:nvSpPr>
+        <p:spPr>
+          <a:xfrm>
+            <a:off x="6172200" y="3749039"/>
+            <a:ext cx="5349240" cy="868680"/>
+          </a:xfrm>
+          <a:prstGeom prst="roundRect">
+            <a:avLst>
+              <a:gd name="adj" fmla="val 12000"/>
+            </a:avLst>
+          </a:prstGeom>
+          <a:solidFill>
+            <a:srgbClr val="E9F5F0"/>
+          </a:solidFill>
+          <a:ln w="31750">
+            <a:solidFill>
+              <a:srgbClr val="2A9D8F"/>
+            </a:solidFill>
+          </a:ln>
+          <a:effectLst/>
+        </p:spPr>
+        <p:style>
+          <a:lnRef idx="1">
+            <a:schemeClr val="accent1"/>
+          </a:lnRef>
+          <a:fillRef idx="3">
+            <a:schemeClr val="accent1"/>
+          </a:fillRef>
+          <a:effectRef idx="2">
+            <a:schemeClr val="accent1"/>
+          </a:effectRef>
+          <a:fontRef idx="minor">
+            <a:schemeClr val="lt1"/>
+          </a:fontRef>
+        </p:style>
+        <p:txBody>
+          <a:bodyPr rtlCol="0" anchor="ctr"/>
+          <a:lstStyle/>
+          <a:p>
+            <a:pPr algn="ctr"/>
+          </a:p>
+        </p:txBody>
+      </p:sp>
+      <p:sp>
+        <p:nvSpPr>
+          <p:cNvPr id="14" name="Oval 13"/>
+          <p:cNvSpPr/>
+          <p:nvPr/>
+        </p:nvSpPr>
+        <p:spPr>
+          <a:xfrm>
+            <a:off x="6446520" y="3977639"/>
+            <a:ext cx="411480" cy="411480"/>
+          </a:xfrm>
+          <a:prstGeom prst="ellipse">
+            <a:avLst/>
+          </a:prstGeom>
+          <a:solidFill>
+            <a:srgbClr val="2A9D8F"/>
+          </a:solidFill>
+          <a:ln>
+            <a:noFill/>
+          </a:ln>
+          <a:effectLst/>
+        </p:spPr>
+        <p:style>
+          <a:lnRef idx="1">
+            <a:schemeClr val="accent1"/>
+          </a:lnRef>
+          <a:fillRef idx="3">
+            <a:schemeClr val="accent1"/>
+          </a:fillRef>
+          <a:effectRef idx="2">
+            <a:schemeClr val="accent1"/>
+          </a:effectRef>
+          <a:fontRef idx="minor">
+            <a:schemeClr val="lt1"/>
+          </a:fontRef>
+        </p:style>
+        <p:txBody>
+          <a:bodyPr rtlCol="0" anchor="ctr"/>
+          <a:lstStyle/>
+          <a:p>
+            <a:pPr algn="ctr"/>
+          </a:p>
+        </p:txBody>
+      </p:sp>
+      <p:sp>
+        <p:nvSpPr>
+          <p:cNvPr id="15" name="TextBox 14"/>
+          <p:cNvSpPr txBox="1"/>
+          <p:nvPr/>
+        </p:nvSpPr>
+        <p:spPr>
+          <a:xfrm>
+            <a:off x="6446520" y="3977639"/>
+            <a:ext cx="411480" cy="411480"/>
+          </a:xfrm>
+          <a:prstGeom prst="rect">
+            <a:avLst/>
+          </a:prstGeom>
+          <a:noFill/>
+        </p:spPr>
+        <p:txBody>
+          <a:bodyPr wrap="square" anchor="ctr" lIns="0" rIns="0" tIns="0" bIns="0">
+            <a:spAutoFit/>
+          </a:bodyPr>
+          <a:lstStyle/>
+          <a:p>
+            <a:pPr algn="ctr"/>
+            <a:r>
               <a:rPr sz="1400" b="1" i="0">
                 <a:solidFill>
+                  <a:srgbClr val="FFFFFF"/>
+                </a:solidFill>
+                <a:latin typeface="Calibri"/>
+              </a:rPr>
+              <a:t>B</a:t>
+            </a:r>
+          </a:p>
+        </p:txBody>
+      </p:sp>
+      <p:sp>
+        <p:nvSpPr>
+          <p:cNvPr id="16" name="TextBox 15"/>
+          <p:cNvSpPr txBox="1"/>
+          <p:nvPr/>
+        </p:nvSpPr>
+        <p:spPr>
+          <a:xfrm>
+            <a:off x="7040880" y="3749039"/>
+            <a:ext cx="3840480" cy="868680"/>
+          </a:xfrm>
+          <a:prstGeom prst="rect">
+            <a:avLst/>
+          </a:prstGeom>
+          <a:noFill/>
+        </p:spPr>
+        <p:txBody>
+          <a:bodyPr wrap="square" anchor="ctr" lIns="0" rIns="0" tIns="0" bIns="0">
+            <a:spAutoFit/>
+          </a:bodyPr>
+          <a:lstStyle/>
+          <a:p>
+            <a:pPr algn="l"/>
+            <a:r>
+              <a:rPr sz="1450" b="1" i="0">
+                <a:solidFill>
+                  <a:srgbClr val="1D2433"/>
+                </a:solidFill>
+                <a:latin typeface="Calibri"/>
+              </a:rPr>
+              <a:t>Joule</a:t>
+            </a:r>
+          </a:p>
+        </p:txBody>
+      </p:sp>
+      <p:sp>
+        <p:nvSpPr>
+          <p:cNvPr id="17" name="Oval 16"/>
+          <p:cNvSpPr/>
+          <p:nvPr/>
+        </p:nvSpPr>
+        <p:spPr>
+          <a:xfrm>
+            <a:off x="10972800" y="3995927"/>
+            <a:ext cx="365760" cy="365760"/>
+          </a:xfrm>
+          <a:prstGeom prst="ellipse">
+            <a:avLst/>
+          </a:prstGeom>
+          <a:solidFill>
+            <a:srgbClr val="2A9D8F"/>
+          </a:solidFill>
+          <a:ln>
+            <a:noFill/>
+          </a:ln>
+          <a:effectLst/>
+        </p:spPr>
+        <p:style>
+          <a:lnRef idx="1">
+            <a:schemeClr val="accent1"/>
+          </a:lnRef>
+          <a:fillRef idx="3">
+            <a:schemeClr val="accent1"/>
+          </a:fillRef>
+          <a:effectRef idx="2">
+            <a:schemeClr val="accent1"/>
+          </a:effectRef>
+          <a:fontRef idx="minor">
+            <a:schemeClr val="lt1"/>
+          </a:fontRef>
+        </p:style>
+        <p:txBody>
+          <a:bodyPr rtlCol="0" anchor="ctr"/>
+          <a:lstStyle/>
+          <a:p>
+            <a:pPr algn="ctr"/>
+          </a:p>
+        </p:txBody>
+      </p:sp>
+      <p:sp>
+        <p:nvSpPr>
+          <p:cNvPr id="18" name="TextBox 17"/>
+          <p:cNvSpPr txBox="1"/>
+          <p:nvPr/>
+        </p:nvSpPr>
+        <p:spPr>
+          <a:xfrm>
+            <a:off x="10972800" y="3950207"/>
+            <a:ext cx="365760" cy="365760"/>
+          </a:xfrm>
+          <a:prstGeom prst="rect">
+            <a:avLst/>
+          </a:prstGeom>
+          <a:noFill/>
+        </p:spPr>
+        <p:txBody>
+          <a:bodyPr wrap="square" anchor="ctr" lIns="0" rIns="0" tIns="0" bIns="0">
+            <a:spAutoFit/>
+          </a:bodyPr>
+          <a:lstStyle/>
+          <a:p>
+            <a:pPr algn="ctr"/>
+            <a:r>
+              <a:rPr sz="1600" b="1" i="0">
+                <a:solidFill>
+                  <a:srgbClr val="FFFFFF"/>
+                </a:solidFill>
+                <a:latin typeface="Calibri"/>
+              </a:rPr>
+              <a:t>✓</a:t>
+            </a:r>
+          </a:p>
+        </p:txBody>
+      </p:sp>
+      <p:sp>
+        <p:nvSpPr>
+          <p:cNvPr id="19" name="Rounded Rectangle 18"/>
+          <p:cNvSpPr/>
+          <p:nvPr/>
+        </p:nvSpPr>
+        <p:spPr>
+          <a:xfrm>
+            <a:off x="640080" y="4782312"/>
+            <a:ext cx="5349240" cy="868680"/>
+          </a:xfrm>
+          <a:prstGeom prst="roundRect">
+            <a:avLst>
+              <a:gd name="adj" fmla="val 12000"/>
+            </a:avLst>
+          </a:prstGeom>
+          <a:solidFill>
+            <a:srgbClr val="EAF1F4"/>
+          </a:solidFill>
+          <a:ln>
+            <a:noFill/>
+          </a:ln>
+          <a:effectLst/>
+        </p:spPr>
+        <p:style>
+          <a:lnRef idx="1">
+            <a:schemeClr val="accent1"/>
+          </a:lnRef>
+          <a:fillRef idx="3">
+            <a:schemeClr val="accent1"/>
+          </a:fillRef>
+          <a:effectRef idx="2">
+            <a:schemeClr val="accent1"/>
+          </a:effectRef>
+          <a:fontRef idx="minor">
+            <a:schemeClr val="lt1"/>
+          </a:fontRef>
+        </p:style>
+        <p:txBody>
+          <a:bodyPr rtlCol="0" anchor="ctr"/>
+          <a:lstStyle/>
+          <a:p>
+            <a:pPr algn="ctr"/>
+          </a:p>
+        </p:txBody>
+      </p:sp>
+      <p:sp>
+        <p:nvSpPr>
+          <p:cNvPr id="20" name="Oval 19"/>
+          <p:cNvSpPr/>
+          <p:nvPr/>
+        </p:nvSpPr>
+        <p:spPr>
+          <a:xfrm>
+            <a:off x="914400" y="5010912"/>
+            <a:ext cx="411480" cy="411480"/>
+          </a:xfrm>
+          <a:prstGeom prst="ellipse">
+            <a:avLst/>
+          </a:prstGeom>
+          <a:solidFill>
+            <a:srgbClr val="0A9396"/>
+          </a:solidFill>
+          <a:ln>
+            <a:noFill/>
+          </a:ln>
+          <a:effectLst/>
+        </p:spPr>
+        <p:style>
+          <a:lnRef idx="1">
+            <a:schemeClr val="accent1"/>
+          </a:lnRef>
+          <a:fillRef idx="3">
+            <a:schemeClr val="accent1"/>
+          </a:fillRef>
+          <a:effectRef idx="2">
+            <a:schemeClr val="accent1"/>
+          </a:effectRef>
+          <a:fontRef idx="minor">
+            <a:schemeClr val="lt1"/>
+          </a:fontRef>
+        </p:style>
+        <p:txBody>
+          <a:bodyPr rtlCol="0" anchor="ctr"/>
+          <a:lstStyle/>
+          <a:p>
+            <a:pPr algn="ctr"/>
+          </a:p>
+        </p:txBody>
+      </p:sp>
+      <p:sp>
+        <p:nvSpPr>
+          <p:cNvPr id="21" name="TextBox 20"/>
+          <p:cNvSpPr txBox="1"/>
+          <p:nvPr/>
+        </p:nvSpPr>
+        <p:spPr>
+          <a:xfrm>
+            <a:off x="914400" y="5010912"/>
+            <a:ext cx="411480" cy="411480"/>
+          </a:xfrm>
+          <a:prstGeom prst="rect">
+            <a:avLst/>
+          </a:prstGeom>
+          <a:noFill/>
+        </p:spPr>
+        <p:txBody>
+          <a:bodyPr wrap="square" anchor="ctr" lIns="0" rIns="0" tIns="0" bIns="0">
+            <a:spAutoFit/>
+          </a:bodyPr>
+          <a:lstStyle/>
+          <a:p>
+            <a:pPr algn="ctr"/>
+            <a:r>
+              <a:rPr sz="1400" b="1" i="0">
+                <a:solidFill>
+                  <a:srgbClr val="FFFFFF"/>
+                </a:solidFill>
+                <a:latin typeface="Calibri"/>
+              </a:rPr>
+              <a:t>C</a:t>
+            </a:r>
+          </a:p>
+        </p:txBody>
+      </p:sp>
+      <p:sp>
+        <p:nvSpPr>
+          <p:cNvPr id="22" name="TextBox 21"/>
+          <p:cNvSpPr txBox="1"/>
+          <p:nvPr/>
+        </p:nvSpPr>
+        <p:spPr>
+          <a:xfrm>
+            <a:off x="1508760" y="4782312"/>
+            <a:ext cx="3840480" cy="868680"/>
+          </a:xfrm>
+          <a:prstGeom prst="rect">
+            <a:avLst/>
+          </a:prstGeom>
+          <a:noFill/>
+        </p:spPr>
+        <p:txBody>
+          <a:bodyPr wrap="square" anchor="ctr" lIns="0" rIns="0" tIns="0" bIns="0">
+            <a:spAutoFit/>
+          </a:bodyPr>
+          <a:lstStyle/>
+          <a:p>
+            <a:pPr algn="l"/>
+            <a:r>
+              <a:rPr sz="1450" b="0" i="0">
+                <a:solidFill>
+                  <a:srgbClr val="1D2433"/>
+                </a:solidFill>
+                <a:latin typeface="Calibri"/>
+              </a:rPr>
+              <a:t>Watt</a:t>
+            </a:r>
+          </a:p>
+        </p:txBody>
+      </p:sp>
+      <p:sp>
+        <p:nvSpPr>
+          <p:cNvPr id="23" name="Rounded Rectangle 22"/>
+          <p:cNvSpPr/>
+          <p:nvPr/>
+        </p:nvSpPr>
+        <p:spPr>
+          <a:xfrm>
+            <a:off x="6172200" y="4782312"/>
+            <a:ext cx="5349240" cy="868680"/>
+          </a:xfrm>
+          <a:prstGeom prst="roundRect">
+            <a:avLst>
+              <a:gd name="adj" fmla="val 12000"/>
+            </a:avLst>
+          </a:prstGeom>
+          <a:solidFill>
+            <a:srgbClr val="EAF1F4"/>
+          </a:solidFill>
+          <a:ln>
+            <a:noFill/>
+          </a:ln>
+          <a:effectLst/>
+        </p:spPr>
+        <p:style>
+          <a:lnRef idx="1">
+            <a:schemeClr val="accent1"/>
+          </a:lnRef>
+          <a:fillRef idx="3">
+            <a:schemeClr val="accent1"/>
+          </a:fillRef>
+          <a:effectRef idx="2">
+            <a:schemeClr val="accent1"/>
+          </a:effectRef>
+          <a:fontRef idx="minor">
+            <a:schemeClr val="lt1"/>
+          </a:fontRef>
+        </p:style>
+        <p:txBody>
+          <a:bodyPr rtlCol="0" anchor="ctr"/>
+          <a:lstStyle/>
+          <a:p>
+            <a:pPr algn="ctr"/>
+          </a:p>
+        </p:txBody>
+      </p:sp>
+      <p:sp>
+        <p:nvSpPr>
+          <p:cNvPr id="24" name="Oval 23"/>
+          <p:cNvSpPr/>
+          <p:nvPr/>
+        </p:nvSpPr>
+        <p:spPr>
+          <a:xfrm>
+            <a:off x="6446520" y="5010912"/>
+            <a:ext cx="411480" cy="411480"/>
+          </a:xfrm>
+          <a:prstGeom prst="ellipse">
+            <a:avLst/>
+          </a:prstGeom>
+          <a:solidFill>
+            <a:srgbClr val="0A9396"/>
+          </a:solidFill>
+          <a:ln>
+            <a:noFill/>
+          </a:ln>
+          <a:effectLst/>
+        </p:spPr>
+        <p:style>
+          <a:lnRef idx="1">
+            <a:schemeClr val="accent1"/>
+          </a:lnRef>
+          <a:fillRef idx="3">
+            <a:schemeClr val="accent1"/>
+          </a:fillRef>
+          <a:effectRef idx="2">
+            <a:schemeClr val="accent1"/>
+          </a:effectRef>
+          <a:fontRef idx="minor">
+            <a:schemeClr val="lt1"/>
+          </a:fontRef>
+        </p:style>
+        <p:txBody>
+          <a:bodyPr rtlCol="0" anchor="ctr"/>
+          <a:lstStyle/>
+          <a:p>
+            <a:pPr algn="ctr"/>
+          </a:p>
+        </p:txBody>
+      </p:sp>
+      <p:sp>
+        <p:nvSpPr>
+          <p:cNvPr id="25" name="TextBox 24"/>
+          <p:cNvSpPr txBox="1"/>
+          <p:nvPr/>
+        </p:nvSpPr>
+        <p:spPr>
+          <a:xfrm>
+            <a:off x="6446520" y="5010912"/>
+            <a:ext cx="411480" cy="411480"/>
+          </a:xfrm>
+          <a:prstGeom prst="rect">
+            <a:avLst/>
+          </a:prstGeom>
+          <a:noFill/>
+        </p:spPr>
+        <p:txBody>
+          <a:bodyPr wrap="square" anchor="ctr" lIns="0" rIns="0" tIns="0" bIns="0">
+            <a:spAutoFit/>
+          </a:bodyPr>
+          <a:lstStyle/>
+          <a:p>
+            <a:pPr algn="ctr"/>
+            <a:r>
+              <a:rPr sz="1400" b="1" i="0">
+                <a:solidFill>
+                  <a:srgbClr val="FFFFFF"/>
+                </a:solidFill>
+                <a:latin typeface="Calibri"/>
+              </a:rPr>
+              <a:t>D</a:t>
+            </a:r>
+          </a:p>
+        </p:txBody>
+      </p:sp>
+      <p:sp>
+        <p:nvSpPr>
+          <p:cNvPr id="26" name="TextBox 25"/>
+          <p:cNvSpPr txBox="1"/>
+          <p:nvPr/>
+        </p:nvSpPr>
+        <p:spPr>
+          <a:xfrm>
+            <a:off x="7040880" y="4782312"/>
+            <a:ext cx="3840480" cy="868680"/>
+          </a:xfrm>
+          <a:prstGeom prst="rect">
+            <a:avLst/>
+          </a:prstGeom>
+          <a:noFill/>
+        </p:spPr>
+        <p:txBody>
+          <a:bodyPr wrap="square" anchor="ctr" lIns="0" rIns="0" tIns="0" bIns="0">
+            <a:spAutoFit/>
+          </a:bodyPr>
+          <a:lstStyle/>
+          <a:p>
+            <a:pPr algn="l"/>
+            <a:r>
+              <a:rPr sz="1450" b="0" i="0">
+                <a:solidFill>
+                  <a:srgbClr val="1D2433"/>
+                </a:solidFill>
+                <a:latin typeface="Calibri"/>
+              </a:rPr>
+              <a:t>Metre</a:t>
+            </a:r>
+          </a:p>
+        </p:txBody>
+      </p:sp>
+      <p:sp>
+        <p:nvSpPr>
+          <p:cNvPr id="27" name="Rounded Rectangle 26"/>
+          <p:cNvSpPr/>
+          <p:nvPr/>
+        </p:nvSpPr>
+        <p:spPr>
+          <a:xfrm>
+            <a:off x="640080" y="5779008"/>
+            <a:ext cx="10881360" cy="566928"/>
+          </a:xfrm>
+          <a:prstGeom prst="roundRect">
+            <a:avLst>
+              <a:gd name="adj" fmla="val 10000"/>
+            </a:avLst>
+          </a:prstGeom>
+          <a:solidFill>
+            <a:srgbClr val="EEF2F7"/>
+          </a:solidFill>
+          <a:ln>
+            <a:noFill/>
+          </a:ln>
+          <a:effectLst/>
+        </p:spPr>
+        <p:style>
+          <a:lnRef idx="1">
+            <a:schemeClr val="accent1"/>
+          </a:lnRef>
+          <a:fillRef idx="3">
+            <a:schemeClr val="accent1"/>
+          </a:fillRef>
+          <a:effectRef idx="2">
+            <a:schemeClr val="accent1"/>
+          </a:effectRef>
+          <a:fontRef idx="minor">
+            <a:schemeClr val="lt1"/>
+          </a:fontRef>
+        </p:style>
+        <p:txBody>
+          <a:bodyPr rtlCol="0" anchor="ctr"/>
+          <a:lstStyle/>
+          <a:p>
+            <a:pPr algn="ctr"/>
+          </a:p>
+        </p:txBody>
+      </p:sp>
+      <p:sp>
+        <p:nvSpPr>
+          <p:cNvPr id="28" name="TextBox 27"/>
+          <p:cNvSpPr txBox="1"/>
+          <p:nvPr/>
+        </p:nvSpPr>
+        <p:spPr>
+          <a:xfrm>
+            <a:off x="914400" y="5779008"/>
+            <a:ext cx="10332720" cy="566928"/>
+          </a:xfrm>
+          <a:prstGeom prst="rect">
+            <a:avLst/>
+          </a:prstGeom>
+          <a:noFill/>
+        </p:spPr>
+        <p:txBody>
+          <a:bodyPr wrap="square" anchor="ctr" lIns="0" rIns="0" tIns="0" bIns="0">
+            <a:spAutoFit/>
+          </a:bodyPr>
+          <a:lstStyle/>
+          <a:p>
+            <a:pPr algn="l"/>
+            <a:r>
+              <a:rPr sz="1250" b="1" i="0">
+                <a:solidFill>
                   <a:srgbClr val="2A9D8F"/>
                 </a:solidFill>
                 <a:latin typeface="Arial"/>
               </a:rPr>
-              <a:t>WHY</a:t>
-            </a:r>
-          </a:p>
-        </p:txBody>
-      </p:sp>
-      <p:sp>
-        <p:nvSpPr>
-          <p:cNvPr id="13" name="TextBox 12"/>
-          <p:cNvSpPr txBox="1"/>
-          <p:nvPr/>
-        </p:nvSpPr>
-        <p:spPr>
-          <a:xfrm>
-            <a:off x="1005840" y="4297680"/>
-            <a:ext cx="10149840" cy="1280160"/>
-          </a:xfrm>
-          <a:prstGeom prst="rect">
-            <a:avLst/>
-          </a:prstGeom>
-          <a:noFill/>
-        </p:spPr>
-        <p:txBody>
-          <a:bodyPr wrap="square" anchor="t" lIns="0" rIns="0" tIns="0" bIns="0">
-            <a:spAutoFit/>
-          </a:bodyPr>
-          <a:lstStyle/>
-          <a:p>
-            <a:pPr algn="l">
-              <a:lnSpc>
-                <a:spcPct val="110000"/>
-              </a:lnSpc>
-            </a:pPr>
-            <a:r>
-              <a:rPr sz="1600" b="0" i="0">
+              <a:t>Why  </a:t>
+            </a:r>
+            <a:r>
+              <a:rPr sz="1200" b="0" i="0">
                 <a:solidFill>
                   <a:srgbClr val="1D2433"/>
                 </a:solidFill>
@@ -9595,7 +10915,7 @@
                 </a:solidFill>
                 <a:latin typeface="Calibri"/>
               </a:rPr>
-              <a:t>Q3 — Mechanical Advantage</a:t>
+              <a:t>Q3 - Mechanical Advantage</a:t>
             </a:r>
           </a:p>
         </p:txBody>
@@ -9891,7 +11211,7 @@
         <p:spPr>
           <a:xfrm>
             <a:off x="1508760" y="3749039"/>
-            <a:ext cx="4297680" cy="868680"/>
+            <a:ext cx="3840480" cy="868680"/>
           </a:xfrm>
           <a:prstGeom prst="rect">
             <a:avLst/>
@@ -10051,7 +11371,7 @@
         <p:spPr>
           <a:xfrm>
             <a:off x="7040880" y="3749039"/>
-            <a:ext cx="4297680" cy="868680"/>
+            <a:ext cx="3840480" cy="868680"/>
           </a:xfrm>
           <a:prstGeom prst="rect">
             <a:avLst/>
@@ -10211,7 +11531,7 @@
         <p:spPr>
           <a:xfrm>
             <a:off x="1508760" y="4782312"/>
-            <a:ext cx="4297680" cy="868680"/>
+            <a:ext cx="3840480" cy="868680"/>
           </a:xfrm>
           <a:prstGeom prst="rect">
             <a:avLst/>
@@ -10371,7 +11691,7 @@
         <p:spPr>
           <a:xfrm>
             <a:off x="7040880" y="4782312"/>
-            <a:ext cx="4297680" cy="868680"/>
+            <a:ext cx="3840480" cy="868680"/>
           </a:xfrm>
           <a:prstGeom prst="rect">
             <a:avLst/>
@@ -10438,7 +11758,7 @@
             <a:avLst/>
           </a:prstGeom>
           <a:solidFill>
-            <a:srgbClr val="2A9D8F"/>
+            <a:srgbClr val="0A9396"/>
           </a:solidFill>
           <a:ln>
             <a:noFill/>
@@ -10493,11 +11813,11 @@
             <a:r>
               <a:rPr sz="1300" b="1" i="0">
                 <a:solidFill>
-                  <a:srgbClr val="2A9D8F"/>
+                  <a:srgbClr val="0A9396"/>
                 </a:solidFill>
                 <a:latin typeface="Arial"/>
               </a:rPr>
-              <a:t>ANSWER REVEAL</a:t>
+              <a:t>QUIZ QUESTION</a:t>
             </a:r>
           </a:p>
         </p:txBody>
@@ -10532,7 +11852,7 @@
                 </a:solidFill>
                 <a:latin typeface="Calibri"/>
               </a:rPr>
-              <a:t>Q3 — Answer</a:t>
+              <a:t>Q3 - Mechanical Advantage</a:t>
             </a:r>
           </a:p>
         </p:txBody>
@@ -10621,166 +11941,6 @@
           <a:prstGeom prst="roundRect">
             <a:avLst>
               <a:gd name="adj" fmla="val 4000"/>
-            </a:avLst>
-          </a:prstGeom>
-          <a:solidFill>
-            <a:srgbClr val="E9F5F0"/>
-          </a:solidFill>
-          <a:ln>
-            <a:noFill/>
-          </a:ln>
-          <a:effectLst/>
-        </p:spPr>
-        <p:style>
-          <a:lnRef idx="1">
-            <a:schemeClr val="accent1"/>
-          </a:lnRef>
-          <a:fillRef idx="3">
-            <a:schemeClr val="accent1"/>
-          </a:fillRef>
-          <a:effectRef idx="2">
-            <a:schemeClr val="accent1"/>
-          </a:effectRef>
-          <a:fontRef idx="minor">
-            <a:schemeClr val="lt1"/>
-          </a:fontRef>
-        </p:style>
-        <p:txBody>
-          <a:bodyPr rtlCol="0" anchor="ctr"/>
-          <a:lstStyle/>
-          <a:p>
-            <a:pPr algn="ctr"/>
-          </a:p>
-        </p:txBody>
-      </p:sp>
-      <p:sp>
-        <p:nvSpPr>
-          <p:cNvPr id="8" name="Oval 7"/>
-          <p:cNvSpPr/>
-          <p:nvPr/>
-        </p:nvSpPr>
-        <p:spPr>
-          <a:xfrm>
-            <a:off x="1005840" y="2240280"/>
-            <a:ext cx="731520" cy="731520"/>
-          </a:xfrm>
-          <a:prstGeom prst="ellipse">
-            <a:avLst/>
-          </a:prstGeom>
-          <a:solidFill>
-            <a:srgbClr val="2A9D8F"/>
-          </a:solidFill>
-          <a:ln>
-            <a:noFill/>
-          </a:ln>
-          <a:effectLst/>
-        </p:spPr>
-        <p:style>
-          <a:lnRef idx="1">
-            <a:schemeClr val="accent1"/>
-          </a:lnRef>
-          <a:fillRef idx="3">
-            <a:schemeClr val="accent1"/>
-          </a:fillRef>
-          <a:effectRef idx="2">
-            <a:schemeClr val="accent1"/>
-          </a:effectRef>
-          <a:fontRef idx="minor">
-            <a:schemeClr val="lt1"/>
-          </a:fontRef>
-        </p:style>
-        <p:txBody>
-          <a:bodyPr rtlCol="0" anchor="ctr"/>
-          <a:lstStyle/>
-          <a:p>
-            <a:pPr algn="ctr"/>
-          </a:p>
-        </p:txBody>
-      </p:sp>
-      <p:sp>
-        <p:nvSpPr>
-          <p:cNvPr id="9" name="TextBox 8"/>
-          <p:cNvSpPr txBox="1"/>
-          <p:nvPr/>
-        </p:nvSpPr>
-        <p:spPr>
-          <a:xfrm>
-            <a:off x="1005840" y="2240280"/>
-            <a:ext cx="731520" cy="731520"/>
-          </a:xfrm>
-          <a:prstGeom prst="rect">
-            <a:avLst/>
-          </a:prstGeom>
-          <a:noFill/>
-        </p:spPr>
-        <p:txBody>
-          <a:bodyPr wrap="square" anchor="ctr" lIns="0" rIns="0" tIns="0" bIns="0">
-            <a:spAutoFit/>
-          </a:bodyPr>
-          <a:lstStyle/>
-          <a:p>
-            <a:pPr algn="ctr"/>
-            <a:r>
-              <a:rPr sz="3000" b="1" i="0">
-                <a:solidFill>
-                  <a:srgbClr val="FFFFFF"/>
-                </a:solidFill>
-                <a:latin typeface="Calibri"/>
-              </a:rPr>
-              <a:t>✓</a:t>
-            </a:r>
-          </a:p>
-        </p:txBody>
-      </p:sp>
-      <p:sp>
-        <p:nvSpPr>
-          <p:cNvPr id="10" name="TextBox 9"/>
-          <p:cNvSpPr txBox="1"/>
-          <p:nvPr/>
-        </p:nvSpPr>
-        <p:spPr>
-          <a:xfrm>
-            <a:off x="1920240" y="1828800"/>
-            <a:ext cx="9326880" cy="1554480"/>
-          </a:xfrm>
-          <a:prstGeom prst="rect">
-            <a:avLst/>
-          </a:prstGeom>
-          <a:noFill/>
-        </p:spPr>
-        <p:txBody>
-          <a:bodyPr wrap="square" anchor="ctr" lIns="0" rIns="0" tIns="0" bIns="0">
-            <a:spAutoFit/>
-          </a:bodyPr>
-          <a:lstStyle/>
-          <a:p>
-            <a:pPr algn="l"/>
-            <a:r>
-              <a:rPr sz="2200" b="1" i="0">
-                <a:solidFill>
-                  <a:srgbClr val="1D2433"/>
-                </a:solidFill>
-                <a:latin typeface="Calibri"/>
-              </a:rPr>
-              <a:t>B. Load / Effort</a:t>
-            </a:r>
-          </a:p>
-        </p:txBody>
-      </p:sp>
-      <p:sp>
-        <p:nvSpPr>
-          <p:cNvPr id="11" name="Rounded Rectangle 10"/>
-          <p:cNvSpPr/>
-          <p:nvPr/>
-        </p:nvSpPr>
-        <p:spPr>
-          <a:xfrm>
-            <a:off x="640080" y="3657600"/>
-            <a:ext cx="10881360" cy="2011680"/>
-          </a:xfrm>
-          <a:prstGeom prst="roundRect">
-            <a:avLst>
-              <a:gd name="adj" fmla="val 3000"/>
             </a:avLst>
           </a:prstGeom>
           <a:solidFill>
@@ -10821,68 +11981,840 @@
       </p:sp>
       <p:sp>
         <p:nvSpPr>
+          <p:cNvPr id="8" name="TextBox 7"/>
+          <p:cNvSpPr txBox="1"/>
+          <p:nvPr/>
+        </p:nvSpPr>
+        <p:spPr>
+          <a:xfrm>
+            <a:off x="1005840" y="1828800"/>
+            <a:ext cx="10149840" cy="1554480"/>
+          </a:xfrm>
+          <a:prstGeom prst="rect">
+            <a:avLst/>
+          </a:prstGeom>
+          <a:noFill/>
+        </p:spPr>
+        <p:txBody>
+          <a:bodyPr wrap="square" anchor="ctr" lIns="0" rIns="0" tIns="0" bIns="0">
+            <a:spAutoFit/>
+          </a:bodyPr>
+          <a:lstStyle/>
+          <a:p>
+            <a:pPr algn="l"/>
+            <a:r>
+              <a:rPr sz="1900" b="1" i="0">
+                <a:solidFill>
+                  <a:srgbClr val="1D2433"/>
+                </a:solidFill>
+                <a:latin typeface="Calibri"/>
+              </a:rPr>
+              <a:t>Mechanical advantage is the ratio:</a:t>
+            </a:r>
+          </a:p>
+        </p:txBody>
+      </p:sp>
+      <p:sp>
+        <p:nvSpPr>
+          <p:cNvPr id="9" name="Rounded Rectangle 8"/>
+          <p:cNvSpPr/>
+          <p:nvPr/>
+        </p:nvSpPr>
+        <p:spPr>
+          <a:xfrm>
+            <a:off x="640080" y="3749039"/>
+            <a:ext cx="5349240" cy="868680"/>
+          </a:xfrm>
+          <a:prstGeom prst="roundRect">
+            <a:avLst>
+              <a:gd name="adj" fmla="val 12000"/>
+            </a:avLst>
+          </a:prstGeom>
+          <a:solidFill>
+            <a:srgbClr val="EAF1F4"/>
+          </a:solidFill>
+          <a:ln>
+            <a:noFill/>
+          </a:ln>
+          <a:effectLst/>
+        </p:spPr>
+        <p:style>
+          <a:lnRef idx="1">
+            <a:schemeClr val="accent1"/>
+          </a:lnRef>
+          <a:fillRef idx="3">
+            <a:schemeClr val="accent1"/>
+          </a:fillRef>
+          <a:effectRef idx="2">
+            <a:schemeClr val="accent1"/>
+          </a:effectRef>
+          <a:fontRef idx="minor">
+            <a:schemeClr val="lt1"/>
+          </a:fontRef>
+        </p:style>
+        <p:txBody>
+          <a:bodyPr rtlCol="0" anchor="ctr"/>
+          <a:lstStyle/>
+          <a:p>
+            <a:pPr algn="ctr"/>
+          </a:p>
+        </p:txBody>
+      </p:sp>
+      <p:sp>
+        <p:nvSpPr>
+          <p:cNvPr id="10" name="Oval 9"/>
+          <p:cNvSpPr/>
+          <p:nvPr/>
+        </p:nvSpPr>
+        <p:spPr>
+          <a:xfrm>
+            <a:off x="914400" y="3977639"/>
+            <a:ext cx="411480" cy="411480"/>
+          </a:xfrm>
+          <a:prstGeom prst="ellipse">
+            <a:avLst/>
+          </a:prstGeom>
+          <a:solidFill>
+            <a:srgbClr val="0A9396"/>
+          </a:solidFill>
+          <a:ln>
+            <a:noFill/>
+          </a:ln>
+          <a:effectLst/>
+        </p:spPr>
+        <p:style>
+          <a:lnRef idx="1">
+            <a:schemeClr val="accent1"/>
+          </a:lnRef>
+          <a:fillRef idx="3">
+            <a:schemeClr val="accent1"/>
+          </a:fillRef>
+          <a:effectRef idx="2">
+            <a:schemeClr val="accent1"/>
+          </a:effectRef>
+          <a:fontRef idx="minor">
+            <a:schemeClr val="lt1"/>
+          </a:fontRef>
+        </p:style>
+        <p:txBody>
+          <a:bodyPr rtlCol="0" anchor="ctr"/>
+          <a:lstStyle/>
+          <a:p>
+            <a:pPr algn="ctr"/>
+          </a:p>
+        </p:txBody>
+      </p:sp>
+      <p:sp>
+        <p:nvSpPr>
+          <p:cNvPr id="11" name="TextBox 10"/>
+          <p:cNvSpPr txBox="1"/>
+          <p:nvPr/>
+        </p:nvSpPr>
+        <p:spPr>
+          <a:xfrm>
+            <a:off x="914400" y="3977639"/>
+            <a:ext cx="411480" cy="411480"/>
+          </a:xfrm>
+          <a:prstGeom prst="rect">
+            <a:avLst/>
+          </a:prstGeom>
+          <a:noFill/>
+        </p:spPr>
+        <p:txBody>
+          <a:bodyPr wrap="square" anchor="ctr" lIns="0" rIns="0" tIns="0" bIns="0">
+            <a:spAutoFit/>
+          </a:bodyPr>
+          <a:lstStyle/>
+          <a:p>
+            <a:pPr algn="ctr"/>
+            <a:r>
+              <a:rPr sz="1400" b="1" i="0">
+                <a:solidFill>
+                  <a:srgbClr val="FFFFFF"/>
+                </a:solidFill>
+                <a:latin typeface="Calibri"/>
+              </a:rPr>
+              <a:t>A</a:t>
+            </a:r>
+          </a:p>
+        </p:txBody>
+      </p:sp>
+      <p:sp>
+        <p:nvSpPr>
           <p:cNvPr id="12" name="TextBox 11"/>
           <p:cNvSpPr txBox="1"/>
           <p:nvPr/>
         </p:nvSpPr>
         <p:spPr>
           <a:xfrm>
-            <a:off x="1005840" y="3886200"/>
-            <a:ext cx="4572000" cy="365760"/>
-          </a:xfrm>
-          <a:prstGeom prst="rect">
-            <a:avLst/>
-          </a:prstGeom>
-          <a:noFill/>
-        </p:spPr>
-        <p:txBody>
-          <a:bodyPr wrap="square" anchor="t" lIns="0" rIns="0" tIns="0" bIns="0">
+            <a:off x="1508760" y="3749039"/>
+            <a:ext cx="3840480" cy="868680"/>
+          </a:xfrm>
+          <a:prstGeom prst="rect">
+            <a:avLst/>
+          </a:prstGeom>
+          <a:noFill/>
+        </p:spPr>
+        <p:txBody>
+          <a:bodyPr wrap="square" anchor="ctr" lIns="0" rIns="0" tIns="0" bIns="0">
             <a:spAutoFit/>
           </a:bodyPr>
           <a:lstStyle/>
           <a:p>
             <a:pPr algn="l"/>
             <a:r>
+              <a:rPr sz="1450" b="0" i="0">
+                <a:solidFill>
+                  <a:srgbClr val="1D2433"/>
+                </a:solidFill>
+                <a:latin typeface="Calibri"/>
+              </a:rPr>
+              <a:t>Effort / Load</a:t>
+            </a:r>
+          </a:p>
+        </p:txBody>
+      </p:sp>
+      <p:sp>
+        <p:nvSpPr>
+          <p:cNvPr id="13" name="Rounded Rectangle 12"/>
+          <p:cNvSpPr/>
+          <p:nvPr/>
+        </p:nvSpPr>
+        <p:spPr>
+          <a:xfrm>
+            <a:off x="6172200" y="3749039"/>
+            <a:ext cx="5349240" cy="868680"/>
+          </a:xfrm>
+          <a:prstGeom prst="roundRect">
+            <a:avLst>
+              <a:gd name="adj" fmla="val 12000"/>
+            </a:avLst>
+          </a:prstGeom>
+          <a:solidFill>
+            <a:srgbClr val="E9F5F0"/>
+          </a:solidFill>
+          <a:ln w="31750">
+            <a:solidFill>
+              <a:srgbClr val="2A9D8F"/>
+            </a:solidFill>
+          </a:ln>
+          <a:effectLst/>
+        </p:spPr>
+        <p:style>
+          <a:lnRef idx="1">
+            <a:schemeClr val="accent1"/>
+          </a:lnRef>
+          <a:fillRef idx="3">
+            <a:schemeClr val="accent1"/>
+          </a:fillRef>
+          <a:effectRef idx="2">
+            <a:schemeClr val="accent1"/>
+          </a:effectRef>
+          <a:fontRef idx="minor">
+            <a:schemeClr val="lt1"/>
+          </a:fontRef>
+        </p:style>
+        <p:txBody>
+          <a:bodyPr rtlCol="0" anchor="ctr"/>
+          <a:lstStyle/>
+          <a:p>
+            <a:pPr algn="ctr"/>
+          </a:p>
+        </p:txBody>
+      </p:sp>
+      <p:sp>
+        <p:nvSpPr>
+          <p:cNvPr id="14" name="Oval 13"/>
+          <p:cNvSpPr/>
+          <p:nvPr/>
+        </p:nvSpPr>
+        <p:spPr>
+          <a:xfrm>
+            <a:off x="6446520" y="3977639"/>
+            <a:ext cx="411480" cy="411480"/>
+          </a:xfrm>
+          <a:prstGeom prst="ellipse">
+            <a:avLst/>
+          </a:prstGeom>
+          <a:solidFill>
+            <a:srgbClr val="2A9D8F"/>
+          </a:solidFill>
+          <a:ln>
+            <a:noFill/>
+          </a:ln>
+          <a:effectLst/>
+        </p:spPr>
+        <p:style>
+          <a:lnRef idx="1">
+            <a:schemeClr val="accent1"/>
+          </a:lnRef>
+          <a:fillRef idx="3">
+            <a:schemeClr val="accent1"/>
+          </a:fillRef>
+          <a:effectRef idx="2">
+            <a:schemeClr val="accent1"/>
+          </a:effectRef>
+          <a:fontRef idx="minor">
+            <a:schemeClr val="lt1"/>
+          </a:fontRef>
+        </p:style>
+        <p:txBody>
+          <a:bodyPr rtlCol="0" anchor="ctr"/>
+          <a:lstStyle/>
+          <a:p>
+            <a:pPr algn="ctr"/>
+          </a:p>
+        </p:txBody>
+      </p:sp>
+      <p:sp>
+        <p:nvSpPr>
+          <p:cNvPr id="15" name="TextBox 14"/>
+          <p:cNvSpPr txBox="1"/>
+          <p:nvPr/>
+        </p:nvSpPr>
+        <p:spPr>
+          <a:xfrm>
+            <a:off x="6446520" y="3977639"/>
+            <a:ext cx="411480" cy="411480"/>
+          </a:xfrm>
+          <a:prstGeom prst="rect">
+            <a:avLst/>
+          </a:prstGeom>
+          <a:noFill/>
+        </p:spPr>
+        <p:txBody>
+          <a:bodyPr wrap="square" anchor="ctr" lIns="0" rIns="0" tIns="0" bIns="0">
+            <a:spAutoFit/>
+          </a:bodyPr>
+          <a:lstStyle/>
+          <a:p>
+            <a:pPr algn="ctr"/>
+            <a:r>
               <a:rPr sz="1400" b="1" i="0">
                 <a:solidFill>
+                  <a:srgbClr val="FFFFFF"/>
+                </a:solidFill>
+                <a:latin typeface="Calibri"/>
+              </a:rPr>
+              <a:t>B</a:t>
+            </a:r>
+          </a:p>
+        </p:txBody>
+      </p:sp>
+      <p:sp>
+        <p:nvSpPr>
+          <p:cNvPr id="16" name="TextBox 15"/>
+          <p:cNvSpPr txBox="1"/>
+          <p:nvPr/>
+        </p:nvSpPr>
+        <p:spPr>
+          <a:xfrm>
+            <a:off x="7040880" y="3749039"/>
+            <a:ext cx="3840480" cy="868680"/>
+          </a:xfrm>
+          <a:prstGeom prst="rect">
+            <a:avLst/>
+          </a:prstGeom>
+          <a:noFill/>
+        </p:spPr>
+        <p:txBody>
+          <a:bodyPr wrap="square" anchor="ctr" lIns="0" rIns="0" tIns="0" bIns="0">
+            <a:spAutoFit/>
+          </a:bodyPr>
+          <a:lstStyle/>
+          <a:p>
+            <a:pPr algn="l"/>
+            <a:r>
+              <a:rPr sz="1450" b="1" i="0">
+                <a:solidFill>
+                  <a:srgbClr val="1D2433"/>
+                </a:solidFill>
+                <a:latin typeface="Calibri"/>
+              </a:rPr>
+              <a:t>Load / Effort</a:t>
+            </a:r>
+          </a:p>
+        </p:txBody>
+      </p:sp>
+      <p:sp>
+        <p:nvSpPr>
+          <p:cNvPr id="17" name="Oval 16"/>
+          <p:cNvSpPr/>
+          <p:nvPr/>
+        </p:nvSpPr>
+        <p:spPr>
+          <a:xfrm>
+            <a:off x="10972800" y="3995927"/>
+            <a:ext cx="365760" cy="365760"/>
+          </a:xfrm>
+          <a:prstGeom prst="ellipse">
+            <a:avLst/>
+          </a:prstGeom>
+          <a:solidFill>
+            <a:srgbClr val="2A9D8F"/>
+          </a:solidFill>
+          <a:ln>
+            <a:noFill/>
+          </a:ln>
+          <a:effectLst/>
+        </p:spPr>
+        <p:style>
+          <a:lnRef idx="1">
+            <a:schemeClr val="accent1"/>
+          </a:lnRef>
+          <a:fillRef idx="3">
+            <a:schemeClr val="accent1"/>
+          </a:fillRef>
+          <a:effectRef idx="2">
+            <a:schemeClr val="accent1"/>
+          </a:effectRef>
+          <a:fontRef idx="minor">
+            <a:schemeClr val="lt1"/>
+          </a:fontRef>
+        </p:style>
+        <p:txBody>
+          <a:bodyPr rtlCol="0" anchor="ctr"/>
+          <a:lstStyle/>
+          <a:p>
+            <a:pPr algn="ctr"/>
+          </a:p>
+        </p:txBody>
+      </p:sp>
+      <p:sp>
+        <p:nvSpPr>
+          <p:cNvPr id="18" name="TextBox 17"/>
+          <p:cNvSpPr txBox="1"/>
+          <p:nvPr/>
+        </p:nvSpPr>
+        <p:spPr>
+          <a:xfrm>
+            <a:off x="10972800" y="3950207"/>
+            <a:ext cx="365760" cy="365760"/>
+          </a:xfrm>
+          <a:prstGeom prst="rect">
+            <a:avLst/>
+          </a:prstGeom>
+          <a:noFill/>
+        </p:spPr>
+        <p:txBody>
+          <a:bodyPr wrap="square" anchor="ctr" lIns="0" rIns="0" tIns="0" bIns="0">
+            <a:spAutoFit/>
+          </a:bodyPr>
+          <a:lstStyle/>
+          <a:p>
+            <a:pPr algn="ctr"/>
+            <a:r>
+              <a:rPr sz="1600" b="1" i="0">
+                <a:solidFill>
+                  <a:srgbClr val="FFFFFF"/>
+                </a:solidFill>
+                <a:latin typeface="Calibri"/>
+              </a:rPr>
+              <a:t>✓</a:t>
+            </a:r>
+          </a:p>
+        </p:txBody>
+      </p:sp>
+      <p:sp>
+        <p:nvSpPr>
+          <p:cNvPr id="19" name="Rounded Rectangle 18"/>
+          <p:cNvSpPr/>
+          <p:nvPr/>
+        </p:nvSpPr>
+        <p:spPr>
+          <a:xfrm>
+            <a:off x="640080" y="4782312"/>
+            <a:ext cx="5349240" cy="868680"/>
+          </a:xfrm>
+          <a:prstGeom prst="roundRect">
+            <a:avLst>
+              <a:gd name="adj" fmla="val 12000"/>
+            </a:avLst>
+          </a:prstGeom>
+          <a:solidFill>
+            <a:srgbClr val="EAF1F4"/>
+          </a:solidFill>
+          <a:ln>
+            <a:noFill/>
+          </a:ln>
+          <a:effectLst/>
+        </p:spPr>
+        <p:style>
+          <a:lnRef idx="1">
+            <a:schemeClr val="accent1"/>
+          </a:lnRef>
+          <a:fillRef idx="3">
+            <a:schemeClr val="accent1"/>
+          </a:fillRef>
+          <a:effectRef idx="2">
+            <a:schemeClr val="accent1"/>
+          </a:effectRef>
+          <a:fontRef idx="minor">
+            <a:schemeClr val="lt1"/>
+          </a:fontRef>
+        </p:style>
+        <p:txBody>
+          <a:bodyPr rtlCol="0" anchor="ctr"/>
+          <a:lstStyle/>
+          <a:p>
+            <a:pPr algn="ctr"/>
+          </a:p>
+        </p:txBody>
+      </p:sp>
+      <p:sp>
+        <p:nvSpPr>
+          <p:cNvPr id="20" name="Oval 19"/>
+          <p:cNvSpPr/>
+          <p:nvPr/>
+        </p:nvSpPr>
+        <p:spPr>
+          <a:xfrm>
+            <a:off x="914400" y="5010912"/>
+            <a:ext cx="411480" cy="411480"/>
+          </a:xfrm>
+          <a:prstGeom prst="ellipse">
+            <a:avLst/>
+          </a:prstGeom>
+          <a:solidFill>
+            <a:srgbClr val="0A9396"/>
+          </a:solidFill>
+          <a:ln>
+            <a:noFill/>
+          </a:ln>
+          <a:effectLst/>
+        </p:spPr>
+        <p:style>
+          <a:lnRef idx="1">
+            <a:schemeClr val="accent1"/>
+          </a:lnRef>
+          <a:fillRef idx="3">
+            <a:schemeClr val="accent1"/>
+          </a:fillRef>
+          <a:effectRef idx="2">
+            <a:schemeClr val="accent1"/>
+          </a:effectRef>
+          <a:fontRef idx="minor">
+            <a:schemeClr val="lt1"/>
+          </a:fontRef>
+        </p:style>
+        <p:txBody>
+          <a:bodyPr rtlCol="0" anchor="ctr"/>
+          <a:lstStyle/>
+          <a:p>
+            <a:pPr algn="ctr"/>
+          </a:p>
+        </p:txBody>
+      </p:sp>
+      <p:sp>
+        <p:nvSpPr>
+          <p:cNvPr id="21" name="TextBox 20"/>
+          <p:cNvSpPr txBox="1"/>
+          <p:nvPr/>
+        </p:nvSpPr>
+        <p:spPr>
+          <a:xfrm>
+            <a:off x="914400" y="5010912"/>
+            <a:ext cx="411480" cy="411480"/>
+          </a:xfrm>
+          <a:prstGeom prst="rect">
+            <a:avLst/>
+          </a:prstGeom>
+          <a:noFill/>
+        </p:spPr>
+        <p:txBody>
+          <a:bodyPr wrap="square" anchor="ctr" lIns="0" rIns="0" tIns="0" bIns="0">
+            <a:spAutoFit/>
+          </a:bodyPr>
+          <a:lstStyle/>
+          <a:p>
+            <a:pPr algn="ctr"/>
+            <a:r>
+              <a:rPr sz="1400" b="1" i="0">
+                <a:solidFill>
+                  <a:srgbClr val="FFFFFF"/>
+                </a:solidFill>
+                <a:latin typeface="Calibri"/>
+              </a:rPr>
+              <a:t>C</a:t>
+            </a:r>
+          </a:p>
+        </p:txBody>
+      </p:sp>
+      <p:sp>
+        <p:nvSpPr>
+          <p:cNvPr id="22" name="TextBox 21"/>
+          <p:cNvSpPr txBox="1"/>
+          <p:nvPr/>
+        </p:nvSpPr>
+        <p:spPr>
+          <a:xfrm>
+            <a:off x="1508760" y="4782312"/>
+            <a:ext cx="3840480" cy="868680"/>
+          </a:xfrm>
+          <a:prstGeom prst="rect">
+            <a:avLst/>
+          </a:prstGeom>
+          <a:noFill/>
+        </p:spPr>
+        <p:txBody>
+          <a:bodyPr wrap="square" anchor="ctr" lIns="0" rIns="0" tIns="0" bIns="0">
+            <a:spAutoFit/>
+          </a:bodyPr>
+          <a:lstStyle/>
+          <a:p>
+            <a:pPr algn="l"/>
+            <a:r>
+              <a:rPr sz="1450" b="0" i="0">
+                <a:solidFill>
+                  <a:srgbClr val="1D2433"/>
+                </a:solidFill>
+                <a:latin typeface="Calibri"/>
+              </a:rPr>
+              <a:t>Work out / Work in</a:t>
+            </a:r>
+          </a:p>
+        </p:txBody>
+      </p:sp>
+      <p:sp>
+        <p:nvSpPr>
+          <p:cNvPr id="23" name="Rounded Rectangle 22"/>
+          <p:cNvSpPr/>
+          <p:nvPr/>
+        </p:nvSpPr>
+        <p:spPr>
+          <a:xfrm>
+            <a:off x="6172200" y="4782312"/>
+            <a:ext cx="5349240" cy="868680"/>
+          </a:xfrm>
+          <a:prstGeom prst="roundRect">
+            <a:avLst>
+              <a:gd name="adj" fmla="val 12000"/>
+            </a:avLst>
+          </a:prstGeom>
+          <a:solidFill>
+            <a:srgbClr val="EAF1F4"/>
+          </a:solidFill>
+          <a:ln>
+            <a:noFill/>
+          </a:ln>
+          <a:effectLst/>
+        </p:spPr>
+        <p:style>
+          <a:lnRef idx="1">
+            <a:schemeClr val="accent1"/>
+          </a:lnRef>
+          <a:fillRef idx="3">
+            <a:schemeClr val="accent1"/>
+          </a:fillRef>
+          <a:effectRef idx="2">
+            <a:schemeClr val="accent1"/>
+          </a:effectRef>
+          <a:fontRef idx="minor">
+            <a:schemeClr val="lt1"/>
+          </a:fontRef>
+        </p:style>
+        <p:txBody>
+          <a:bodyPr rtlCol="0" anchor="ctr"/>
+          <a:lstStyle/>
+          <a:p>
+            <a:pPr algn="ctr"/>
+          </a:p>
+        </p:txBody>
+      </p:sp>
+      <p:sp>
+        <p:nvSpPr>
+          <p:cNvPr id="24" name="Oval 23"/>
+          <p:cNvSpPr/>
+          <p:nvPr/>
+        </p:nvSpPr>
+        <p:spPr>
+          <a:xfrm>
+            <a:off x="6446520" y="5010912"/>
+            <a:ext cx="411480" cy="411480"/>
+          </a:xfrm>
+          <a:prstGeom prst="ellipse">
+            <a:avLst/>
+          </a:prstGeom>
+          <a:solidFill>
+            <a:srgbClr val="0A9396"/>
+          </a:solidFill>
+          <a:ln>
+            <a:noFill/>
+          </a:ln>
+          <a:effectLst/>
+        </p:spPr>
+        <p:style>
+          <a:lnRef idx="1">
+            <a:schemeClr val="accent1"/>
+          </a:lnRef>
+          <a:fillRef idx="3">
+            <a:schemeClr val="accent1"/>
+          </a:fillRef>
+          <a:effectRef idx="2">
+            <a:schemeClr val="accent1"/>
+          </a:effectRef>
+          <a:fontRef idx="minor">
+            <a:schemeClr val="lt1"/>
+          </a:fontRef>
+        </p:style>
+        <p:txBody>
+          <a:bodyPr rtlCol="0" anchor="ctr"/>
+          <a:lstStyle/>
+          <a:p>
+            <a:pPr algn="ctr"/>
+          </a:p>
+        </p:txBody>
+      </p:sp>
+      <p:sp>
+        <p:nvSpPr>
+          <p:cNvPr id="25" name="TextBox 24"/>
+          <p:cNvSpPr txBox="1"/>
+          <p:nvPr/>
+        </p:nvSpPr>
+        <p:spPr>
+          <a:xfrm>
+            <a:off x="6446520" y="5010912"/>
+            <a:ext cx="411480" cy="411480"/>
+          </a:xfrm>
+          <a:prstGeom prst="rect">
+            <a:avLst/>
+          </a:prstGeom>
+          <a:noFill/>
+        </p:spPr>
+        <p:txBody>
+          <a:bodyPr wrap="square" anchor="ctr" lIns="0" rIns="0" tIns="0" bIns="0">
+            <a:spAutoFit/>
+          </a:bodyPr>
+          <a:lstStyle/>
+          <a:p>
+            <a:pPr algn="ctr"/>
+            <a:r>
+              <a:rPr sz="1400" b="1" i="0">
+                <a:solidFill>
+                  <a:srgbClr val="FFFFFF"/>
+                </a:solidFill>
+                <a:latin typeface="Calibri"/>
+              </a:rPr>
+              <a:t>D</a:t>
+            </a:r>
+          </a:p>
+        </p:txBody>
+      </p:sp>
+      <p:sp>
+        <p:nvSpPr>
+          <p:cNvPr id="26" name="TextBox 25"/>
+          <p:cNvSpPr txBox="1"/>
+          <p:nvPr/>
+        </p:nvSpPr>
+        <p:spPr>
+          <a:xfrm>
+            <a:off x="7040880" y="4782312"/>
+            <a:ext cx="3840480" cy="868680"/>
+          </a:xfrm>
+          <a:prstGeom prst="rect">
+            <a:avLst/>
+          </a:prstGeom>
+          <a:noFill/>
+        </p:spPr>
+        <p:txBody>
+          <a:bodyPr wrap="square" anchor="ctr" lIns="0" rIns="0" tIns="0" bIns="0">
+            <a:spAutoFit/>
+          </a:bodyPr>
+          <a:lstStyle/>
+          <a:p>
+            <a:pPr algn="l"/>
+            <a:r>
+              <a:rPr sz="1450" b="0" i="0">
+                <a:solidFill>
+                  <a:srgbClr val="1D2433"/>
+                </a:solidFill>
+                <a:latin typeface="Calibri"/>
+              </a:rPr>
+              <a:t>Speed / Force</a:t>
+            </a:r>
+          </a:p>
+        </p:txBody>
+      </p:sp>
+      <p:sp>
+        <p:nvSpPr>
+          <p:cNvPr id="27" name="Rounded Rectangle 26"/>
+          <p:cNvSpPr/>
+          <p:nvPr/>
+        </p:nvSpPr>
+        <p:spPr>
+          <a:xfrm>
+            <a:off x="640080" y="5779008"/>
+            <a:ext cx="10881360" cy="566928"/>
+          </a:xfrm>
+          <a:prstGeom prst="roundRect">
+            <a:avLst>
+              <a:gd name="adj" fmla="val 10000"/>
+            </a:avLst>
+          </a:prstGeom>
+          <a:solidFill>
+            <a:srgbClr val="EEF2F7"/>
+          </a:solidFill>
+          <a:ln>
+            <a:noFill/>
+          </a:ln>
+          <a:effectLst/>
+        </p:spPr>
+        <p:style>
+          <a:lnRef idx="1">
+            <a:schemeClr val="accent1"/>
+          </a:lnRef>
+          <a:fillRef idx="3">
+            <a:schemeClr val="accent1"/>
+          </a:fillRef>
+          <a:effectRef idx="2">
+            <a:schemeClr val="accent1"/>
+          </a:effectRef>
+          <a:fontRef idx="minor">
+            <a:schemeClr val="lt1"/>
+          </a:fontRef>
+        </p:style>
+        <p:txBody>
+          <a:bodyPr rtlCol="0" anchor="ctr"/>
+          <a:lstStyle/>
+          <a:p>
+            <a:pPr algn="ctr"/>
+          </a:p>
+        </p:txBody>
+      </p:sp>
+      <p:sp>
+        <p:nvSpPr>
+          <p:cNvPr id="28" name="TextBox 27"/>
+          <p:cNvSpPr txBox="1"/>
+          <p:nvPr/>
+        </p:nvSpPr>
+        <p:spPr>
+          <a:xfrm>
+            <a:off x="914400" y="5779008"/>
+            <a:ext cx="10332720" cy="566928"/>
+          </a:xfrm>
+          <a:prstGeom prst="rect">
+            <a:avLst/>
+          </a:prstGeom>
+          <a:noFill/>
+        </p:spPr>
+        <p:txBody>
+          <a:bodyPr wrap="square" anchor="ctr" lIns="0" rIns="0" tIns="0" bIns="0">
+            <a:spAutoFit/>
+          </a:bodyPr>
+          <a:lstStyle/>
+          <a:p>
+            <a:pPr algn="l"/>
+            <a:r>
+              <a:rPr sz="1250" b="1" i="0">
+                <a:solidFill>
                   <a:srgbClr val="2A9D8F"/>
                 </a:solidFill>
                 <a:latin typeface="Arial"/>
               </a:rPr>
-              <a:t>WHY</a:t>
-            </a:r>
-          </a:p>
-        </p:txBody>
-      </p:sp>
-      <p:sp>
-        <p:nvSpPr>
-          <p:cNvPr id="13" name="TextBox 12"/>
-          <p:cNvSpPr txBox="1"/>
-          <p:nvPr/>
-        </p:nvSpPr>
-        <p:spPr>
-          <a:xfrm>
-            <a:off x="1005840" y="4297680"/>
-            <a:ext cx="10149840" cy="1280160"/>
-          </a:xfrm>
-          <a:prstGeom prst="rect">
-            <a:avLst/>
-          </a:prstGeom>
-          <a:noFill/>
-        </p:spPr>
-        <p:txBody>
-          <a:bodyPr wrap="square" anchor="t" lIns="0" rIns="0" tIns="0" bIns="0">
-            <a:spAutoFit/>
-          </a:bodyPr>
-          <a:lstStyle/>
-          <a:p>
-            <a:pPr algn="l">
-              <a:lnSpc>
-                <a:spcPct val="110000"/>
-              </a:lnSpc>
-            </a:pPr>
-            <a:r>
-              <a:rPr sz="1600" b="0" i="0">
+              <a:t>Why  </a:t>
+            </a:r>
+            <a:r>
+              <a:rPr sz="1200" b="0" i="0">
                 <a:solidFill>
                   <a:srgbClr val="1D2433"/>
                 </a:solidFill>
@@ -11028,7 +12960,7 @@
                 </a:solidFill>
                 <a:latin typeface="Calibri"/>
               </a:rPr>
-              <a:t>Q4 — Efficiency</a:t>
+              <a:t>Q4 - Efficiency</a:t>
             </a:r>
           </a:p>
         </p:txBody>
@@ -11324,7 +13256,7 @@
         <p:spPr>
           <a:xfrm>
             <a:off x="1508760" y="3749039"/>
-            <a:ext cx="4297680" cy="868680"/>
+            <a:ext cx="3840480" cy="868680"/>
           </a:xfrm>
           <a:prstGeom prst="rect">
             <a:avLst/>
@@ -11484,7 +13416,7 @@
         <p:spPr>
           <a:xfrm>
             <a:off x="7040880" y="3749039"/>
-            <a:ext cx="4297680" cy="868680"/>
+            <a:ext cx="3840480" cy="868680"/>
           </a:xfrm>
           <a:prstGeom prst="rect">
             <a:avLst/>
@@ -11644,7 +13576,7 @@
         <p:spPr>
           <a:xfrm>
             <a:off x="1508760" y="4782312"/>
-            <a:ext cx="4297680" cy="868680"/>
+            <a:ext cx="3840480" cy="868680"/>
           </a:xfrm>
           <a:prstGeom prst="rect">
             <a:avLst/>
@@ -11804,7 +13736,7 @@
         <p:spPr>
           <a:xfrm>
             <a:off x="7040880" y="4782312"/>
-            <a:ext cx="4297680" cy="868680"/>
+            <a:ext cx="3840480" cy="868680"/>
           </a:xfrm>
           <a:prstGeom prst="rect">
             <a:avLst/>
@@ -13077,7 +15009,7 @@
             <a:avLst/>
           </a:prstGeom>
           <a:solidFill>
-            <a:srgbClr val="2A9D8F"/>
+            <a:srgbClr val="0A9396"/>
           </a:solidFill>
           <a:ln>
             <a:noFill/>
@@ -13132,11 +15064,11 @@
             <a:r>
               <a:rPr sz="1300" b="1" i="0">
                 <a:solidFill>
-                  <a:srgbClr val="2A9D8F"/>
+                  <a:srgbClr val="0A9396"/>
                 </a:solidFill>
                 <a:latin typeface="Arial"/>
               </a:rPr>
-              <a:t>ANSWER REVEAL</a:t>
+              <a:t>QUIZ QUESTION</a:t>
             </a:r>
           </a:p>
         </p:txBody>
@@ -13171,7 +15103,7 @@
                 </a:solidFill>
                 <a:latin typeface="Calibri"/>
               </a:rPr>
-              <a:t>Q4 — Answer</a:t>
+              <a:t>Q4 - Efficiency</a:t>
             </a:r>
           </a:p>
         </p:txBody>
@@ -13260,166 +15192,6 @@
           <a:prstGeom prst="roundRect">
             <a:avLst>
               <a:gd name="adj" fmla="val 4000"/>
-            </a:avLst>
-          </a:prstGeom>
-          <a:solidFill>
-            <a:srgbClr val="E9F5F0"/>
-          </a:solidFill>
-          <a:ln>
-            <a:noFill/>
-          </a:ln>
-          <a:effectLst/>
-        </p:spPr>
-        <p:style>
-          <a:lnRef idx="1">
-            <a:schemeClr val="accent1"/>
-          </a:lnRef>
-          <a:fillRef idx="3">
-            <a:schemeClr val="accent1"/>
-          </a:fillRef>
-          <a:effectRef idx="2">
-            <a:schemeClr val="accent1"/>
-          </a:effectRef>
-          <a:fontRef idx="minor">
-            <a:schemeClr val="lt1"/>
-          </a:fontRef>
-        </p:style>
-        <p:txBody>
-          <a:bodyPr rtlCol="0" anchor="ctr"/>
-          <a:lstStyle/>
-          <a:p>
-            <a:pPr algn="ctr"/>
-          </a:p>
-        </p:txBody>
-      </p:sp>
-      <p:sp>
-        <p:nvSpPr>
-          <p:cNvPr id="8" name="Oval 7"/>
-          <p:cNvSpPr/>
-          <p:nvPr/>
-        </p:nvSpPr>
-        <p:spPr>
-          <a:xfrm>
-            <a:off x="1005840" y="2240280"/>
-            <a:ext cx="731520" cy="731520"/>
-          </a:xfrm>
-          <a:prstGeom prst="ellipse">
-            <a:avLst/>
-          </a:prstGeom>
-          <a:solidFill>
-            <a:srgbClr val="2A9D8F"/>
-          </a:solidFill>
-          <a:ln>
-            <a:noFill/>
-          </a:ln>
-          <a:effectLst/>
-        </p:spPr>
-        <p:style>
-          <a:lnRef idx="1">
-            <a:schemeClr val="accent1"/>
-          </a:lnRef>
-          <a:fillRef idx="3">
-            <a:schemeClr val="accent1"/>
-          </a:fillRef>
-          <a:effectRef idx="2">
-            <a:schemeClr val="accent1"/>
-          </a:effectRef>
-          <a:fontRef idx="minor">
-            <a:schemeClr val="lt1"/>
-          </a:fontRef>
-        </p:style>
-        <p:txBody>
-          <a:bodyPr rtlCol="0" anchor="ctr"/>
-          <a:lstStyle/>
-          <a:p>
-            <a:pPr algn="ctr"/>
-          </a:p>
-        </p:txBody>
-      </p:sp>
-      <p:sp>
-        <p:nvSpPr>
-          <p:cNvPr id="9" name="TextBox 8"/>
-          <p:cNvSpPr txBox="1"/>
-          <p:nvPr/>
-        </p:nvSpPr>
-        <p:spPr>
-          <a:xfrm>
-            <a:off x="1005840" y="2240280"/>
-            <a:ext cx="731520" cy="731520"/>
-          </a:xfrm>
-          <a:prstGeom prst="rect">
-            <a:avLst/>
-          </a:prstGeom>
-          <a:noFill/>
-        </p:spPr>
-        <p:txBody>
-          <a:bodyPr wrap="square" anchor="ctr" lIns="0" rIns="0" tIns="0" bIns="0">
-            <a:spAutoFit/>
-          </a:bodyPr>
-          <a:lstStyle/>
-          <a:p>
-            <a:pPr algn="ctr"/>
-            <a:r>
-              <a:rPr sz="3000" b="1" i="0">
-                <a:solidFill>
-                  <a:srgbClr val="FFFFFF"/>
-                </a:solidFill>
-                <a:latin typeface="Calibri"/>
-              </a:rPr>
-              <a:t>✓</a:t>
-            </a:r>
-          </a:p>
-        </p:txBody>
-      </p:sp>
-      <p:sp>
-        <p:nvSpPr>
-          <p:cNvPr id="10" name="TextBox 9"/>
-          <p:cNvSpPr txBox="1"/>
-          <p:nvPr/>
-        </p:nvSpPr>
-        <p:spPr>
-          <a:xfrm>
-            <a:off x="1920240" y="1828800"/>
-            <a:ext cx="9326880" cy="1554480"/>
-          </a:xfrm>
-          <a:prstGeom prst="rect">
-            <a:avLst/>
-          </a:prstGeom>
-          <a:noFill/>
-        </p:spPr>
-        <p:txBody>
-          <a:bodyPr wrap="square" anchor="ctr" lIns="0" rIns="0" tIns="0" bIns="0">
-            <a:spAutoFit/>
-          </a:bodyPr>
-          <a:lstStyle/>
-          <a:p>
-            <a:pPr algn="l"/>
-            <a:r>
-              <a:rPr sz="2200" b="1" i="0">
-                <a:solidFill>
-                  <a:srgbClr val="1D2433"/>
-                </a:solidFill>
-                <a:latin typeface="Calibri"/>
-              </a:rPr>
-              <a:t>C. Less than 100%</a:t>
-            </a:r>
-          </a:p>
-        </p:txBody>
-      </p:sp>
-      <p:sp>
-        <p:nvSpPr>
-          <p:cNvPr id="11" name="Rounded Rectangle 10"/>
-          <p:cNvSpPr/>
-          <p:nvPr/>
-        </p:nvSpPr>
-        <p:spPr>
-          <a:xfrm>
-            <a:off x="640080" y="3657600"/>
-            <a:ext cx="10881360" cy="2011680"/>
-          </a:xfrm>
-          <a:prstGeom prst="roundRect">
-            <a:avLst>
-              <a:gd name="adj" fmla="val 3000"/>
             </a:avLst>
           </a:prstGeom>
           <a:solidFill>
@@ -13460,68 +15232,840 @@
       </p:sp>
       <p:sp>
         <p:nvSpPr>
+          <p:cNvPr id="8" name="TextBox 7"/>
+          <p:cNvSpPr txBox="1"/>
+          <p:nvPr/>
+        </p:nvSpPr>
+        <p:spPr>
+          <a:xfrm>
+            <a:off x="1005840" y="1828800"/>
+            <a:ext cx="10149840" cy="1554480"/>
+          </a:xfrm>
+          <a:prstGeom prst="rect">
+            <a:avLst/>
+          </a:prstGeom>
+          <a:noFill/>
+        </p:spPr>
+        <p:txBody>
+          <a:bodyPr wrap="square" anchor="ctr" lIns="0" rIns="0" tIns="0" bIns="0">
+            <a:spAutoFit/>
+          </a:bodyPr>
+          <a:lstStyle/>
+          <a:p>
+            <a:pPr algn="l"/>
+            <a:r>
+              <a:rPr sz="1900" b="1" i="0">
+                <a:solidFill>
+                  <a:srgbClr val="1D2433"/>
+                </a:solidFill>
+                <a:latin typeface="Calibri"/>
+              </a:rPr>
+              <a:t>The efficiency of a real machine is always:</a:t>
+            </a:r>
+          </a:p>
+        </p:txBody>
+      </p:sp>
+      <p:sp>
+        <p:nvSpPr>
+          <p:cNvPr id="9" name="Rounded Rectangle 8"/>
+          <p:cNvSpPr/>
+          <p:nvPr/>
+        </p:nvSpPr>
+        <p:spPr>
+          <a:xfrm>
+            <a:off x="640080" y="3749039"/>
+            <a:ext cx="5349240" cy="868680"/>
+          </a:xfrm>
+          <a:prstGeom prst="roundRect">
+            <a:avLst>
+              <a:gd name="adj" fmla="val 12000"/>
+            </a:avLst>
+          </a:prstGeom>
+          <a:solidFill>
+            <a:srgbClr val="EAF1F4"/>
+          </a:solidFill>
+          <a:ln>
+            <a:noFill/>
+          </a:ln>
+          <a:effectLst/>
+        </p:spPr>
+        <p:style>
+          <a:lnRef idx="1">
+            <a:schemeClr val="accent1"/>
+          </a:lnRef>
+          <a:fillRef idx="3">
+            <a:schemeClr val="accent1"/>
+          </a:fillRef>
+          <a:effectRef idx="2">
+            <a:schemeClr val="accent1"/>
+          </a:effectRef>
+          <a:fontRef idx="minor">
+            <a:schemeClr val="lt1"/>
+          </a:fontRef>
+        </p:style>
+        <p:txBody>
+          <a:bodyPr rtlCol="0" anchor="ctr"/>
+          <a:lstStyle/>
+          <a:p>
+            <a:pPr algn="ctr"/>
+          </a:p>
+        </p:txBody>
+      </p:sp>
+      <p:sp>
+        <p:nvSpPr>
+          <p:cNvPr id="10" name="Oval 9"/>
+          <p:cNvSpPr/>
+          <p:nvPr/>
+        </p:nvSpPr>
+        <p:spPr>
+          <a:xfrm>
+            <a:off x="914400" y="3977639"/>
+            <a:ext cx="411480" cy="411480"/>
+          </a:xfrm>
+          <a:prstGeom prst="ellipse">
+            <a:avLst/>
+          </a:prstGeom>
+          <a:solidFill>
+            <a:srgbClr val="0A9396"/>
+          </a:solidFill>
+          <a:ln>
+            <a:noFill/>
+          </a:ln>
+          <a:effectLst/>
+        </p:spPr>
+        <p:style>
+          <a:lnRef idx="1">
+            <a:schemeClr val="accent1"/>
+          </a:lnRef>
+          <a:fillRef idx="3">
+            <a:schemeClr val="accent1"/>
+          </a:fillRef>
+          <a:effectRef idx="2">
+            <a:schemeClr val="accent1"/>
+          </a:effectRef>
+          <a:fontRef idx="minor">
+            <a:schemeClr val="lt1"/>
+          </a:fontRef>
+        </p:style>
+        <p:txBody>
+          <a:bodyPr rtlCol="0" anchor="ctr"/>
+          <a:lstStyle/>
+          <a:p>
+            <a:pPr algn="ctr"/>
+          </a:p>
+        </p:txBody>
+      </p:sp>
+      <p:sp>
+        <p:nvSpPr>
+          <p:cNvPr id="11" name="TextBox 10"/>
+          <p:cNvSpPr txBox="1"/>
+          <p:nvPr/>
+        </p:nvSpPr>
+        <p:spPr>
+          <a:xfrm>
+            <a:off x="914400" y="3977639"/>
+            <a:ext cx="411480" cy="411480"/>
+          </a:xfrm>
+          <a:prstGeom prst="rect">
+            <a:avLst/>
+          </a:prstGeom>
+          <a:noFill/>
+        </p:spPr>
+        <p:txBody>
+          <a:bodyPr wrap="square" anchor="ctr" lIns="0" rIns="0" tIns="0" bIns="0">
+            <a:spAutoFit/>
+          </a:bodyPr>
+          <a:lstStyle/>
+          <a:p>
+            <a:pPr algn="ctr"/>
+            <a:r>
+              <a:rPr sz="1400" b="1" i="0">
+                <a:solidFill>
+                  <a:srgbClr val="FFFFFF"/>
+                </a:solidFill>
+                <a:latin typeface="Calibri"/>
+              </a:rPr>
+              <a:t>A</a:t>
+            </a:r>
+          </a:p>
+        </p:txBody>
+      </p:sp>
+      <p:sp>
+        <p:nvSpPr>
           <p:cNvPr id="12" name="TextBox 11"/>
           <p:cNvSpPr txBox="1"/>
           <p:nvPr/>
         </p:nvSpPr>
         <p:spPr>
           <a:xfrm>
-            <a:off x="1005840" y="3886200"/>
-            <a:ext cx="4572000" cy="365760"/>
-          </a:xfrm>
-          <a:prstGeom prst="rect">
-            <a:avLst/>
-          </a:prstGeom>
-          <a:noFill/>
-        </p:spPr>
-        <p:txBody>
-          <a:bodyPr wrap="square" anchor="t" lIns="0" rIns="0" tIns="0" bIns="0">
+            <a:off x="1508760" y="3749039"/>
+            <a:ext cx="3840480" cy="868680"/>
+          </a:xfrm>
+          <a:prstGeom prst="rect">
+            <a:avLst/>
+          </a:prstGeom>
+          <a:noFill/>
+        </p:spPr>
+        <p:txBody>
+          <a:bodyPr wrap="square" anchor="ctr" lIns="0" rIns="0" tIns="0" bIns="0">
             <a:spAutoFit/>
           </a:bodyPr>
           <a:lstStyle/>
           <a:p>
             <a:pPr algn="l"/>
             <a:r>
+              <a:rPr sz="1450" b="0" i="0">
+                <a:solidFill>
+                  <a:srgbClr val="1D2433"/>
+                </a:solidFill>
+                <a:latin typeface="Calibri"/>
+              </a:rPr>
+              <a:t>Equal to 100%</a:t>
+            </a:r>
+          </a:p>
+        </p:txBody>
+      </p:sp>
+      <p:sp>
+        <p:nvSpPr>
+          <p:cNvPr id="13" name="Rounded Rectangle 12"/>
+          <p:cNvSpPr/>
+          <p:nvPr/>
+        </p:nvSpPr>
+        <p:spPr>
+          <a:xfrm>
+            <a:off x="6172200" y="3749039"/>
+            <a:ext cx="5349240" cy="868680"/>
+          </a:xfrm>
+          <a:prstGeom prst="roundRect">
+            <a:avLst>
+              <a:gd name="adj" fmla="val 12000"/>
+            </a:avLst>
+          </a:prstGeom>
+          <a:solidFill>
+            <a:srgbClr val="EAF1F4"/>
+          </a:solidFill>
+          <a:ln>
+            <a:noFill/>
+          </a:ln>
+          <a:effectLst/>
+        </p:spPr>
+        <p:style>
+          <a:lnRef idx="1">
+            <a:schemeClr val="accent1"/>
+          </a:lnRef>
+          <a:fillRef idx="3">
+            <a:schemeClr val="accent1"/>
+          </a:fillRef>
+          <a:effectRef idx="2">
+            <a:schemeClr val="accent1"/>
+          </a:effectRef>
+          <a:fontRef idx="minor">
+            <a:schemeClr val="lt1"/>
+          </a:fontRef>
+        </p:style>
+        <p:txBody>
+          <a:bodyPr rtlCol="0" anchor="ctr"/>
+          <a:lstStyle/>
+          <a:p>
+            <a:pPr algn="ctr"/>
+          </a:p>
+        </p:txBody>
+      </p:sp>
+      <p:sp>
+        <p:nvSpPr>
+          <p:cNvPr id="14" name="Oval 13"/>
+          <p:cNvSpPr/>
+          <p:nvPr/>
+        </p:nvSpPr>
+        <p:spPr>
+          <a:xfrm>
+            <a:off x="6446520" y="3977639"/>
+            <a:ext cx="411480" cy="411480"/>
+          </a:xfrm>
+          <a:prstGeom prst="ellipse">
+            <a:avLst/>
+          </a:prstGeom>
+          <a:solidFill>
+            <a:srgbClr val="0A9396"/>
+          </a:solidFill>
+          <a:ln>
+            <a:noFill/>
+          </a:ln>
+          <a:effectLst/>
+        </p:spPr>
+        <p:style>
+          <a:lnRef idx="1">
+            <a:schemeClr val="accent1"/>
+          </a:lnRef>
+          <a:fillRef idx="3">
+            <a:schemeClr val="accent1"/>
+          </a:fillRef>
+          <a:effectRef idx="2">
+            <a:schemeClr val="accent1"/>
+          </a:effectRef>
+          <a:fontRef idx="minor">
+            <a:schemeClr val="lt1"/>
+          </a:fontRef>
+        </p:style>
+        <p:txBody>
+          <a:bodyPr rtlCol="0" anchor="ctr"/>
+          <a:lstStyle/>
+          <a:p>
+            <a:pPr algn="ctr"/>
+          </a:p>
+        </p:txBody>
+      </p:sp>
+      <p:sp>
+        <p:nvSpPr>
+          <p:cNvPr id="15" name="TextBox 14"/>
+          <p:cNvSpPr txBox="1"/>
+          <p:nvPr/>
+        </p:nvSpPr>
+        <p:spPr>
+          <a:xfrm>
+            <a:off x="6446520" y="3977639"/>
+            <a:ext cx="411480" cy="411480"/>
+          </a:xfrm>
+          <a:prstGeom prst="rect">
+            <a:avLst/>
+          </a:prstGeom>
+          <a:noFill/>
+        </p:spPr>
+        <p:txBody>
+          <a:bodyPr wrap="square" anchor="ctr" lIns="0" rIns="0" tIns="0" bIns="0">
+            <a:spAutoFit/>
+          </a:bodyPr>
+          <a:lstStyle/>
+          <a:p>
+            <a:pPr algn="ctr"/>
+            <a:r>
               <a:rPr sz="1400" b="1" i="0">
                 <a:solidFill>
+                  <a:srgbClr val="FFFFFF"/>
+                </a:solidFill>
+                <a:latin typeface="Calibri"/>
+              </a:rPr>
+              <a:t>B</a:t>
+            </a:r>
+          </a:p>
+        </p:txBody>
+      </p:sp>
+      <p:sp>
+        <p:nvSpPr>
+          <p:cNvPr id="16" name="TextBox 15"/>
+          <p:cNvSpPr txBox="1"/>
+          <p:nvPr/>
+        </p:nvSpPr>
+        <p:spPr>
+          <a:xfrm>
+            <a:off x="7040880" y="3749039"/>
+            <a:ext cx="3840480" cy="868680"/>
+          </a:xfrm>
+          <a:prstGeom prst="rect">
+            <a:avLst/>
+          </a:prstGeom>
+          <a:noFill/>
+        </p:spPr>
+        <p:txBody>
+          <a:bodyPr wrap="square" anchor="ctr" lIns="0" rIns="0" tIns="0" bIns="0">
+            <a:spAutoFit/>
+          </a:bodyPr>
+          <a:lstStyle/>
+          <a:p>
+            <a:pPr algn="l"/>
+            <a:r>
+              <a:rPr sz="1450" b="0" i="0">
+                <a:solidFill>
+                  <a:srgbClr val="1D2433"/>
+                </a:solidFill>
+                <a:latin typeface="Calibri"/>
+              </a:rPr>
+              <a:t>More than 100%</a:t>
+            </a:r>
+          </a:p>
+        </p:txBody>
+      </p:sp>
+      <p:sp>
+        <p:nvSpPr>
+          <p:cNvPr id="17" name="Rounded Rectangle 16"/>
+          <p:cNvSpPr/>
+          <p:nvPr/>
+        </p:nvSpPr>
+        <p:spPr>
+          <a:xfrm>
+            <a:off x="640080" y="4782312"/>
+            <a:ext cx="5349240" cy="868680"/>
+          </a:xfrm>
+          <a:prstGeom prst="roundRect">
+            <a:avLst>
+              <a:gd name="adj" fmla="val 12000"/>
+            </a:avLst>
+          </a:prstGeom>
+          <a:solidFill>
+            <a:srgbClr val="E9F5F0"/>
+          </a:solidFill>
+          <a:ln w="31750">
+            <a:solidFill>
+              <a:srgbClr val="2A9D8F"/>
+            </a:solidFill>
+          </a:ln>
+          <a:effectLst/>
+        </p:spPr>
+        <p:style>
+          <a:lnRef idx="1">
+            <a:schemeClr val="accent1"/>
+          </a:lnRef>
+          <a:fillRef idx="3">
+            <a:schemeClr val="accent1"/>
+          </a:fillRef>
+          <a:effectRef idx="2">
+            <a:schemeClr val="accent1"/>
+          </a:effectRef>
+          <a:fontRef idx="minor">
+            <a:schemeClr val="lt1"/>
+          </a:fontRef>
+        </p:style>
+        <p:txBody>
+          <a:bodyPr rtlCol="0" anchor="ctr"/>
+          <a:lstStyle/>
+          <a:p>
+            <a:pPr algn="ctr"/>
+          </a:p>
+        </p:txBody>
+      </p:sp>
+      <p:sp>
+        <p:nvSpPr>
+          <p:cNvPr id="18" name="Oval 17"/>
+          <p:cNvSpPr/>
+          <p:nvPr/>
+        </p:nvSpPr>
+        <p:spPr>
+          <a:xfrm>
+            <a:off x="914400" y="5010912"/>
+            <a:ext cx="411480" cy="411480"/>
+          </a:xfrm>
+          <a:prstGeom prst="ellipse">
+            <a:avLst/>
+          </a:prstGeom>
+          <a:solidFill>
+            <a:srgbClr val="2A9D8F"/>
+          </a:solidFill>
+          <a:ln>
+            <a:noFill/>
+          </a:ln>
+          <a:effectLst/>
+        </p:spPr>
+        <p:style>
+          <a:lnRef idx="1">
+            <a:schemeClr val="accent1"/>
+          </a:lnRef>
+          <a:fillRef idx="3">
+            <a:schemeClr val="accent1"/>
+          </a:fillRef>
+          <a:effectRef idx="2">
+            <a:schemeClr val="accent1"/>
+          </a:effectRef>
+          <a:fontRef idx="minor">
+            <a:schemeClr val="lt1"/>
+          </a:fontRef>
+        </p:style>
+        <p:txBody>
+          <a:bodyPr rtlCol="0" anchor="ctr"/>
+          <a:lstStyle/>
+          <a:p>
+            <a:pPr algn="ctr"/>
+          </a:p>
+        </p:txBody>
+      </p:sp>
+      <p:sp>
+        <p:nvSpPr>
+          <p:cNvPr id="19" name="TextBox 18"/>
+          <p:cNvSpPr txBox="1"/>
+          <p:nvPr/>
+        </p:nvSpPr>
+        <p:spPr>
+          <a:xfrm>
+            <a:off x="914400" y="5010912"/>
+            <a:ext cx="411480" cy="411480"/>
+          </a:xfrm>
+          <a:prstGeom prst="rect">
+            <a:avLst/>
+          </a:prstGeom>
+          <a:noFill/>
+        </p:spPr>
+        <p:txBody>
+          <a:bodyPr wrap="square" anchor="ctr" lIns="0" rIns="0" tIns="0" bIns="0">
+            <a:spAutoFit/>
+          </a:bodyPr>
+          <a:lstStyle/>
+          <a:p>
+            <a:pPr algn="ctr"/>
+            <a:r>
+              <a:rPr sz="1400" b="1" i="0">
+                <a:solidFill>
+                  <a:srgbClr val="FFFFFF"/>
+                </a:solidFill>
+                <a:latin typeface="Calibri"/>
+              </a:rPr>
+              <a:t>C</a:t>
+            </a:r>
+          </a:p>
+        </p:txBody>
+      </p:sp>
+      <p:sp>
+        <p:nvSpPr>
+          <p:cNvPr id="20" name="TextBox 19"/>
+          <p:cNvSpPr txBox="1"/>
+          <p:nvPr/>
+        </p:nvSpPr>
+        <p:spPr>
+          <a:xfrm>
+            <a:off x="1508760" y="4782312"/>
+            <a:ext cx="3840480" cy="868680"/>
+          </a:xfrm>
+          <a:prstGeom prst="rect">
+            <a:avLst/>
+          </a:prstGeom>
+          <a:noFill/>
+        </p:spPr>
+        <p:txBody>
+          <a:bodyPr wrap="square" anchor="ctr" lIns="0" rIns="0" tIns="0" bIns="0">
+            <a:spAutoFit/>
+          </a:bodyPr>
+          <a:lstStyle/>
+          <a:p>
+            <a:pPr algn="l"/>
+            <a:r>
+              <a:rPr sz="1450" b="1" i="0">
+                <a:solidFill>
+                  <a:srgbClr val="1D2433"/>
+                </a:solidFill>
+                <a:latin typeface="Calibri"/>
+              </a:rPr>
+              <a:t>Less than 100%</a:t>
+            </a:r>
+          </a:p>
+        </p:txBody>
+      </p:sp>
+      <p:sp>
+        <p:nvSpPr>
+          <p:cNvPr id="21" name="Oval 20"/>
+          <p:cNvSpPr/>
+          <p:nvPr/>
+        </p:nvSpPr>
+        <p:spPr>
+          <a:xfrm>
+            <a:off x="5440680" y="5029200"/>
+            <a:ext cx="365760" cy="365760"/>
+          </a:xfrm>
+          <a:prstGeom prst="ellipse">
+            <a:avLst/>
+          </a:prstGeom>
+          <a:solidFill>
+            <a:srgbClr val="2A9D8F"/>
+          </a:solidFill>
+          <a:ln>
+            <a:noFill/>
+          </a:ln>
+          <a:effectLst/>
+        </p:spPr>
+        <p:style>
+          <a:lnRef idx="1">
+            <a:schemeClr val="accent1"/>
+          </a:lnRef>
+          <a:fillRef idx="3">
+            <a:schemeClr val="accent1"/>
+          </a:fillRef>
+          <a:effectRef idx="2">
+            <a:schemeClr val="accent1"/>
+          </a:effectRef>
+          <a:fontRef idx="minor">
+            <a:schemeClr val="lt1"/>
+          </a:fontRef>
+        </p:style>
+        <p:txBody>
+          <a:bodyPr rtlCol="0" anchor="ctr"/>
+          <a:lstStyle/>
+          <a:p>
+            <a:pPr algn="ctr"/>
+          </a:p>
+        </p:txBody>
+      </p:sp>
+      <p:sp>
+        <p:nvSpPr>
+          <p:cNvPr id="22" name="TextBox 21"/>
+          <p:cNvSpPr txBox="1"/>
+          <p:nvPr/>
+        </p:nvSpPr>
+        <p:spPr>
+          <a:xfrm>
+            <a:off x="5440680" y="4983479"/>
+            <a:ext cx="365760" cy="365760"/>
+          </a:xfrm>
+          <a:prstGeom prst="rect">
+            <a:avLst/>
+          </a:prstGeom>
+          <a:noFill/>
+        </p:spPr>
+        <p:txBody>
+          <a:bodyPr wrap="square" anchor="ctr" lIns="0" rIns="0" tIns="0" bIns="0">
+            <a:spAutoFit/>
+          </a:bodyPr>
+          <a:lstStyle/>
+          <a:p>
+            <a:pPr algn="ctr"/>
+            <a:r>
+              <a:rPr sz="1600" b="1" i="0">
+                <a:solidFill>
+                  <a:srgbClr val="FFFFFF"/>
+                </a:solidFill>
+                <a:latin typeface="Calibri"/>
+              </a:rPr>
+              <a:t>✓</a:t>
+            </a:r>
+          </a:p>
+        </p:txBody>
+      </p:sp>
+      <p:sp>
+        <p:nvSpPr>
+          <p:cNvPr id="23" name="Rounded Rectangle 22"/>
+          <p:cNvSpPr/>
+          <p:nvPr/>
+        </p:nvSpPr>
+        <p:spPr>
+          <a:xfrm>
+            <a:off x="6172200" y="4782312"/>
+            <a:ext cx="5349240" cy="868680"/>
+          </a:xfrm>
+          <a:prstGeom prst="roundRect">
+            <a:avLst>
+              <a:gd name="adj" fmla="val 12000"/>
+            </a:avLst>
+          </a:prstGeom>
+          <a:solidFill>
+            <a:srgbClr val="EAF1F4"/>
+          </a:solidFill>
+          <a:ln>
+            <a:noFill/>
+          </a:ln>
+          <a:effectLst/>
+        </p:spPr>
+        <p:style>
+          <a:lnRef idx="1">
+            <a:schemeClr val="accent1"/>
+          </a:lnRef>
+          <a:fillRef idx="3">
+            <a:schemeClr val="accent1"/>
+          </a:fillRef>
+          <a:effectRef idx="2">
+            <a:schemeClr val="accent1"/>
+          </a:effectRef>
+          <a:fontRef idx="minor">
+            <a:schemeClr val="lt1"/>
+          </a:fontRef>
+        </p:style>
+        <p:txBody>
+          <a:bodyPr rtlCol="0" anchor="ctr"/>
+          <a:lstStyle/>
+          <a:p>
+            <a:pPr algn="ctr"/>
+          </a:p>
+        </p:txBody>
+      </p:sp>
+      <p:sp>
+        <p:nvSpPr>
+          <p:cNvPr id="24" name="Oval 23"/>
+          <p:cNvSpPr/>
+          <p:nvPr/>
+        </p:nvSpPr>
+        <p:spPr>
+          <a:xfrm>
+            <a:off x="6446520" y="5010912"/>
+            <a:ext cx="411480" cy="411480"/>
+          </a:xfrm>
+          <a:prstGeom prst="ellipse">
+            <a:avLst/>
+          </a:prstGeom>
+          <a:solidFill>
+            <a:srgbClr val="0A9396"/>
+          </a:solidFill>
+          <a:ln>
+            <a:noFill/>
+          </a:ln>
+          <a:effectLst/>
+        </p:spPr>
+        <p:style>
+          <a:lnRef idx="1">
+            <a:schemeClr val="accent1"/>
+          </a:lnRef>
+          <a:fillRef idx="3">
+            <a:schemeClr val="accent1"/>
+          </a:fillRef>
+          <a:effectRef idx="2">
+            <a:schemeClr val="accent1"/>
+          </a:effectRef>
+          <a:fontRef idx="minor">
+            <a:schemeClr val="lt1"/>
+          </a:fontRef>
+        </p:style>
+        <p:txBody>
+          <a:bodyPr rtlCol="0" anchor="ctr"/>
+          <a:lstStyle/>
+          <a:p>
+            <a:pPr algn="ctr"/>
+          </a:p>
+        </p:txBody>
+      </p:sp>
+      <p:sp>
+        <p:nvSpPr>
+          <p:cNvPr id="25" name="TextBox 24"/>
+          <p:cNvSpPr txBox="1"/>
+          <p:nvPr/>
+        </p:nvSpPr>
+        <p:spPr>
+          <a:xfrm>
+            <a:off x="6446520" y="5010912"/>
+            <a:ext cx="411480" cy="411480"/>
+          </a:xfrm>
+          <a:prstGeom prst="rect">
+            <a:avLst/>
+          </a:prstGeom>
+          <a:noFill/>
+        </p:spPr>
+        <p:txBody>
+          <a:bodyPr wrap="square" anchor="ctr" lIns="0" rIns="0" tIns="0" bIns="0">
+            <a:spAutoFit/>
+          </a:bodyPr>
+          <a:lstStyle/>
+          <a:p>
+            <a:pPr algn="ctr"/>
+            <a:r>
+              <a:rPr sz="1400" b="1" i="0">
+                <a:solidFill>
+                  <a:srgbClr val="FFFFFF"/>
+                </a:solidFill>
+                <a:latin typeface="Calibri"/>
+              </a:rPr>
+              <a:t>D</a:t>
+            </a:r>
+          </a:p>
+        </p:txBody>
+      </p:sp>
+      <p:sp>
+        <p:nvSpPr>
+          <p:cNvPr id="26" name="TextBox 25"/>
+          <p:cNvSpPr txBox="1"/>
+          <p:nvPr/>
+        </p:nvSpPr>
+        <p:spPr>
+          <a:xfrm>
+            <a:off x="7040880" y="4782312"/>
+            <a:ext cx="3840480" cy="868680"/>
+          </a:xfrm>
+          <a:prstGeom prst="rect">
+            <a:avLst/>
+          </a:prstGeom>
+          <a:noFill/>
+        </p:spPr>
+        <p:txBody>
+          <a:bodyPr wrap="square" anchor="ctr" lIns="0" rIns="0" tIns="0" bIns="0">
+            <a:spAutoFit/>
+          </a:bodyPr>
+          <a:lstStyle/>
+          <a:p>
+            <a:pPr algn="l"/>
+            <a:r>
+              <a:rPr sz="1450" b="0" i="0">
+                <a:solidFill>
+                  <a:srgbClr val="1D2433"/>
+                </a:solidFill>
+                <a:latin typeface="Calibri"/>
+              </a:rPr>
+              <a:t>Exactly zero</a:t>
+            </a:r>
+          </a:p>
+        </p:txBody>
+      </p:sp>
+      <p:sp>
+        <p:nvSpPr>
+          <p:cNvPr id="27" name="Rounded Rectangle 26"/>
+          <p:cNvSpPr/>
+          <p:nvPr/>
+        </p:nvSpPr>
+        <p:spPr>
+          <a:xfrm>
+            <a:off x="640080" y="5779008"/>
+            <a:ext cx="10881360" cy="566928"/>
+          </a:xfrm>
+          <a:prstGeom prst="roundRect">
+            <a:avLst>
+              <a:gd name="adj" fmla="val 10000"/>
+            </a:avLst>
+          </a:prstGeom>
+          <a:solidFill>
+            <a:srgbClr val="EEF2F7"/>
+          </a:solidFill>
+          <a:ln>
+            <a:noFill/>
+          </a:ln>
+          <a:effectLst/>
+        </p:spPr>
+        <p:style>
+          <a:lnRef idx="1">
+            <a:schemeClr val="accent1"/>
+          </a:lnRef>
+          <a:fillRef idx="3">
+            <a:schemeClr val="accent1"/>
+          </a:fillRef>
+          <a:effectRef idx="2">
+            <a:schemeClr val="accent1"/>
+          </a:effectRef>
+          <a:fontRef idx="minor">
+            <a:schemeClr val="lt1"/>
+          </a:fontRef>
+        </p:style>
+        <p:txBody>
+          <a:bodyPr rtlCol="0" anchor="ctr"/>
+          <a:lstStyle/>
+          <a:p>
+            <a:pPr algn="ctr"/>
+          </a:p>
+        </p:txBody>
+      </p:sp>
+      <p:sp>
+        <p:nvSpPr>
+          <p:cNvPr id="28" name="TextBox 27"/>
+          <p:cNvSpPr txBox="1"/>
+          <p:nvPr/>
+        </p:nvSpPr>
+        <p:spPr>
+          <a:xfrm>
+            <a:off x="914400" y="5779008"/>
+            <a:ext cx="10332720" cy="566928"/>
+          </a:xfrm>
+          <a:prstGeom prst="rect">
+            <a:avLst/>
+          </a:prstGeom>
+          <a:noFill/>
+        </p:spPr>
+        <p:txBody>
+          <a:bodyPr wrap="square" anchor="ctr" lIns="0" rIns="0" tIns="0" bIns="0">
+            <a:spAutoFit/>
+          </a:bodyPr>
+          <a:lstStyle/>
+          <a:p>
+            <a:pPr algn="l"/>
+            <a:r>
+              <a:rPr sz="1250" b="1" i="0">
+                <a:solidFill>
                   <a:srgbClr val="2A9D8F"/>
                 </a:solidFill>
                 <a:latin typeface="Arial"/>
               </a:rPr>
-              <a:t>WHY</a:t>
-            </a:r>
-          </a:p>
-        </p:txBody>
-      </p:sp>
-      <p:sp>
-        <p:nvSpPr>
-          <p:cNvPr id="13" name="TextBox 12"/>
-          <p:cNvSpPr txBox="1"/>
-          <p:nvPr/>
-        </p:nvSpPr>
-        <p:spPr>
-          <a:xfrm>
-            <a:off x="1005840" y="4297680"/>
-            <a:ext cx="10149840" cy="1280160"/>
-          </a:xfrm>
-          <a:prstGeom prst="rect">
-            <a:avLst/>
-          </a:prstGeom>
-          <a:noFill/>
-        </p:spPr>
-        <p:txBody>
-          <a:bodyPr wrap="square" anchor="t" lIns="0" rIns="0" tIns="0" bIns="0">
-            <a:spAutoFit/>
-          </a:bodyPr>
-          <a:lstStyle/>
-          <a:p>
-            <a:pPr algn="l">
-              <a:lnSpc>
-                <a:spcPct val="110000"/>
-              </a:lnSpc>
-            </a:pPr>
-            <a:r>
-              <a:rPr sz="1600" b="0" i="0">
+              <a:t>Why  </a:t>
+            </a:r>
+            <a:r>
+              <a:rPr sz="1200" b="0" i="0">
                 <a:solidFill>
                   <a:srgbClr val="1D2433"/>
                 </a:solidFill>
@@ -16579,9 +19123,33 @@
           </a:p>
         </p:txBody>
       </p:sp>
-      <p:sp>
-        <p:nvSpPr>
-          <p:cNvPr id="9" name="TextBox 8"/>
+      <p:pic>
+        <p:nvPicPr>
+          <p:cNvPr id="9" name="Picture 8" descr="icon_eye.png"/>
+          <p:cNvPicPr>
+            <a:picLocks noChangeAspect="1"/>
+          </p:cNvPicPr>
+          <p:nvPr/>
+        </p:nvPicPr>
+        <p:blipFill>
+          <a:blip r:embed="rId2"/>
+          <a:stretch>
+            <a:fillRect/>
+          </a:stretch>
+        </p:blipFill>
+        <p:spPr>
+          <a:xfrm>
+            <a:off x="1051560" y="2304288"/>
+            <a:ext cx="320040" cy="320040"/>
+          </a:xfrm>
+          <a:prstGeom prst="rect">
+            <a:avLst/>
+          </a:prstGeom>
+        </p:spPr>
+      </p:pic>
+      <p:sp>
+        <p:nvSpPr>
+          <p:cNvPr id="10" name="TextBox 9"/>
           <p:cNvSpPr txBox="1"/>
           <p:nvPr/>
         </p:nvSpPr>
@@ -16616,7 +19184,7 @@
       </p:sp>
       <p:sp>
         <p:nvSpPr>
-          <p:cNvPr id="10" name="TextBox 9"/>
+          <p:cNvPr id="11" name="TextBox 10"/>
           <p:cNvSpPr txBox="1"/>
           <p:nvPr/>
         </p:nvSpPr>
@@ -16651,7 +19219,7 @@
       </p:sp>
       <p:sp>
         <p:nvSpPr>
-          <p:cNvPr id="11" name="Rounded Rectangle 10"/>
+          <p:cNvPr id="12" name="Rounded Rectangle 11"/>
           <p:cNvSpPr/>
           <p:nvPr/>
         </p:nvSpPr>
@@ -16703,7 +19271,7 @@
       </p:sp>
       <p:sp>
         <p:nvSpPr>
-          <p:cNvPr id="12" name="Rounded Rectangle 11"/>
+          <p:cNvPr id="13" name="Rounded Rectangle 12"/>
           <p:cNvSpPr/>
           <p:nvPr/>
         </p:nvSpPr>
@@ -16747,9 +19315,33 @@
           </a:p>
         </p:txBody>
       </p:sp>
-      <p:sp>
-        <p:nvSpPr>
-          <p:cNvPr id="13" name="TextBox 12"/>
+      <p:pic>
+        <p:nvPicPr>
+          <p:cNvPr id="14" name="Picture 13" descr="icon_wheel.png"/>
+          <p:cNvPicPr>
+            <a:picLocks noChangeAspect="1"/>
+          </p:cNvPicPr>
+          <p:nvPr/>
+        </p:nvPicPr>
+        <p:blipFill>
+          <a:blip r:embed="rId3"/>
+          <a:stretch>
+            <a:fillRect/>
+          </a:stretch>
+        </p:blipFill>
+        <p:spPr>
+          <a:xfrm>
+            <a:off x="6629400" y="2304288"/>
+            <a:ext cx="320040" cy="320040"/>
+          </a:xfrm>
+          <a:prstGeom prst="rect">
+            <a:avLst/>
+          </a:prstGeom>
+        </p:spPr>
+      </p:pic>
+      <p:sp>
+        <p:nvSpPr>
+          <p:cNvPr id="15" name="TextBox 14"/>
           <p:cNvSpPr txBox="1"/>
           <p:nvPr/>
         </p:nvSpPr>
@@ -16784,7 +19376,7 @@
       </p:sp>
       <p:sp>
         <p:nvSpPr>
-          <p:cNvPr id="14" name="TextBox 13"/>
+          <p:cNvPr id="16" name="TextBox 15"/>
           <p:cNvSpPr txBox="1"/>
           <p:nvPr/>
         </p:nvSpPr>
@@ -16819,7 +19411,7 @@
       </p:sp>
       <p:sp>
         <p:nvSpPr>
-          <p:cNvPr id="15" name="Rounded Rectangle 14"/>
+          <p:cNvPr id="17" name="Rounded Rectangle 16"/>
           <p:cNvSpPr/>
           <p:nvPr/>
         </p:nvSpPr>
@@ -16871,7 +19463,7 @@
       </p:sp>
       <p:sp>
         <p:nvSpPr>
-          <p:cNvPr id="16" name="Rounded Rectangle 15"/>
+          <p:cNvPr id="18" name="Rounded Rectangle 17"/>
           <p:cNvSpPr/>
           <p:nvPr/>
         </p:nvSpPr>
@@ -16915,9 +19507,33 @@
           </a:p>
         </p:txBody>
       </p:sp>
-      <p:sp>
-        <p:nvSpPr>
-          <p:cNvPr id="17" name="TextBox 16"/>
+      <p:pic>
+        <p:nvPicPr>
+          <p:cNvPr id="19" name="Picture 18" descr="icon_force.png"/>
+          <p:cNvPicPr>
+            <a:picLocks noChangeAspect="1"/>
+          </p:cNvPicPr>
+          <p:nvPr/>
+        </p:nvPicPr>
+        <p:blipFill>
+          <a:blip r:embed="rId4"/>
+          <a:stretch>
+            <a:fillRect/>
+          </a:stretch>
+        </p:blipFill>
+        <p:spPr>
+          <a:xfrm>
+            <a:off x="1051560" y="4133087"/>
+            <a:ext cx="320040" cy="320040"/>
+          </a:xfrm>
+          <a:prstGeom prst="rect">
+            <a:avLst/>
+          </a:prstGeom>
+        </p:spPr>
+      </p:pic>
+      <p:sp>
+        <p:nvSpPr>
+          <p:cNvPr id="20" name="TextBox 19"/>
           <p:cNvSpPr txBox="1"/>
           <p:nvPr/>
         </p:nvSpPr>
@@ -16952,7 +19568,7 @@
       </p:sp>
       <p:sp>
         <p:nvSpPr>
-          <p:cNvPr id="18" name="TextBox 17"/>
+          <p:cNvPr id="21" name="TextBox 20"/>
           <p:cNvSpPr txBox="1"/>
           <p:nvPr/>
         </p:nvSpPr>
@@ -16987,7 +19603,7 @@
       </p:sp>
       <p:sp>
         <p:nvSpPr>
-          <p:cNvPr id="19" name="Rounded Rectangle 18"/>
+          <p:cNvPr id="22" name="Rounded Rectangle 21"/>
           <p:cNvSpPr/>
           <p:nvPr/>
         </p:nvSpPr>
@@ -17039,7 +19655,7 @@
       </p:sp>
       <p:sp>
         <p:nvSpPr>
-          <p:cNvPr id="20" name="Rounded Rectangle 19"/>
+          <p:cNvPr id="23" name="Rounded Rectangle 22"/>
           <p:cNvSpPr/>
           <p:nvPr/>
         </p:nvSpPr>
@@ -17083,9 +19699,33 @@
           </a:p>
         </p:txBody>
       </p:sp>
-      <p:sp>
-        <p:nvSpPr>
-          <p:cNvPr id="21" name="TextBox 20"/>
+      <p:pic>
+        <p:nvPicPr>
+          <p:cNvPr id="24" name="Picture 23" descr="icon_force.png"/>
+          <p:cNvPicPr>
+            <a:picLocks noChangeAspect="1"/>
+          </p:cNvPicPr>
+          <p:nvPr/>
+        </p:nvPicPr>
+        <p:blipFill>
+          <a:blip r:embed="rId4"/>
+          <a:stretch>
+            <a:fillRect/>
+          </a:stretch>
+        </p:blipFill>
+        <p:spPr>
+          <a:xfrm>
+            <a:off x="6629400" y="4133087"/>
+            <a:ext cx="320040" cy="320040"/>
+          </a:xfrm>
+          <a:prstGeom prst="rect">
+            <a:avLst/>
+          </a:prstGeom>
+        </p:spPr>
+      </p:pic>
+      <p:sp>
+        <p:nvSpPr>
+          <p:cNvPr id="25" name="TextBox 24"/>
           <p:cNvSpPr txBox="1"/>
           <p:nvPr/>
         </p:nvSpPr>
@@ -17120,7 +19760,7 @@
       </p:sp>
       <p:sp>
         <p:nvSpPr>
-          <p:cNvPr id="22" name="TextBox 21"/>
+          <p:cNvPr id="26" name="TextBox 25"/>
           <p:cNvSpPr txBox="1"/>
           <p:nvPr/>
         </p:nvSpPr>
@@ -18861,7 +21501,7 @@
                 </a:solidFill>
                 <a:latin typeface="Calibri"/>
               </a:rPr>
-              <a:t>Q1 — Levers</a:t>
+              <a:t>Q1 - Levers</a:t>
             </a:r>
           </a:p>
         </p:txBody>
@@ -19157,7 +21797,7 @@
         <p:spPr>
           <a:xfrm>
             <a:off x="1508760" y="3749039"/>
-            <a:ext cx="4297680" cy="868680"/>
+            <a:ext cx="3840480" cy="868680"/>
           </a:xfrm>
           <a:prstGeom prst="rect">
             <a:avLst/>
@@ -19317,7 +21957,7 @@
         <p:spPr>
           <a:xfrm>
             <a:off x="7040880" y="3749039"/>
-            <a:ext cx="4297680" cy="868680"/>
+            <a:ext cx="3840480" cy="868680"/>
           </a:xfrm>
           <a:prstGeom prst="rect">
             <a:avLst/>
@@ -19477,7 +22117,7 @@
         <p:spPr>
           <a:xfrm>
             <a:off x="1508760" y="4782312"/>
-            <a:ext cx="4297680" cy="868680"/>
+            <a:ext cx="3840480" cy="868680"/>
           </a:xfrm>
           <a:prstGeom prst="rect">
             <a:avLst/>
@@ -19637,7 +22277,7 @@
         <p:spPr>
           <a:xfrm>
             <a:off x="7040880" y="4782312"/>
-            <a:ext cx="4297680" cy="868680"/>
+            <a:ext cx="3840480" cy="868680"/>
           </a:xfrm>
           <a:prstGeom prst="rect">
             <a:avLst/>
@@ -19704,7 +22344,7 @@
             <a:avLst/>
           </a:prstGeom>
           <a:solidFill>
-            <a:srgbClr val="2A9D8F"/>
+            <a:srgbClr val="0A9396"/>
           </a:solidFill>
           <a:ln>
             <a:noFill/>
@@ -19759,11 +22399,11 @@
             <a:r>
               <a:rPr sz="1300" b="1" i="0">
                 <a:solidFill>
-                  <a:srgbClr val="2A9D8F"/>
+                  <a:srgbClr val="0A9396"/>
                 </a:solidFill>
                 <a:latin typeface="Arial"/>
               </a:rPr>
-              <a:t>ANSWER REVEAL</a:t>
+              <a:t>QUIZ QUESTION</a:t>
             </a:r>
           </a:p>
         </p:txBody>
@@ -19798,7 +22438,7 @@
                 </a:solidFill>
                 <a:latin typeface="Calibri"/>
               </a:rPr>
-              <a:t>Q1 — Answer</a:t>
+              <a:t>Q1 - Levers</a:t>
             </a:r>
           </a:p>
         </p:txBody>
@@ -19887,166 +22527,6 @@
           <a:prstGeom prst="roundRect">
             <a:avLst>
               <a:gd name="adj" fmla="val 4000"/>
-            </a:avLst>
-          </a:prstGeom>
-          <a:solidFill>
-            <a:srgbClr val="E9F5F0"/>
-          </a:solidFill>
-          <a:ln>
-            <a:noFill/>
-          </a:ln>
-          <a:effectLst/>
-        </p:spPr>
-        <p:style>
-          <a:lnRef idx="1">
-            <a:schemeClr val="accent1"/>
-          </a:lnRef>
-          <a:fillRef idx="3">
-            <a:schemeClr val="accent1"/>
-          </a:fillRef>
-          <a:effectRef idx="2">
-            <a:schemeClr val="accent1"/>
-          </a:effectRef>
-          <a:fontRef idx="minor">
-            <a:schemeClr val="lt1"/>
-          </a:fontRef>
-        </p:style>
-        <p:txBody>
-          <a:bodyPr rtlCol="0" anchor="ctr"/>
-          <a:lstStyle/>
-          <a:p>
-            <a:pPr algn="ctr"/>
-          </a:p>
-        </p:txBody>
-      </p:sp>
-      <p:sp>
-        <p:nvSpPr>
-          <p:cNvPr id="8" name="Oval 7"/>
-          <p:cNvSpPr/>
-          <p:nvPr/>
-        </p:nvSpPr>
-        <p:spPr>
-          <a:xfrm>
-            <a:off x="1005840" y="2240280"/>
-            <a:ext cx="731520" cy="731520"/>
-          </a:xfrm>
-          <a:prstGeom prst="ellipse">
-            <a:avLst/>
-          </a:prstGeom>
-          <a:solidFill>
-            <a:srgbClr val="2A9D8F"/>
-          </a:solidFill>
-          <a:ln>
-            <a:noFill/>
-          </a:ln>
-          <a:effectLst/>
-        </p:spPr>
-        <p:style>
-          <a:lnRef idx="1">
-            <a:schemeClr val="accent1"/>
-          </a:lnRef>
-          <a:fillRef idx="3">
-            <a:schemeClr val="accent1"/>
-          </a:fillRef>
-          <a:effectRef idx="2">
-            <a:schemeClr val="accent1"/>
-          </a:effectRef>
-          <a:fontRef idx="minor">
-            <a:schemeClr val="lt1"/>
-          </a:fontRef>
-        </p:style>
-        <p:txBody>
-          <a:bodyPr rtlCol="0" anchor="ctr"/>
-          <a:lstStyle/>
-          <a:p>
-            <a:pPr algn="ctr"/>
-          </a:p>
-        </p:txBody>
-      </p:sp>
-      <p:sp>
-        <p:nvSpPr>
-          <p:cNvPr id="9" name="TextBox 8"/>
-          <p:cNvSpPr txBox="1"/>
-          <p:nvPr/>
-        </p:nvSpPr>
-        <p:spPr>
-          <a:xfrm>
-            <a:off x="1005840" y="2240280"/>
-            <a:ext cx="731520" cy="731520"/>
-          </a:xfrm>
-          <a:prstGeom prst="rect">
-            <a:avLst/>
-          </a:prstGeom>
-          <a:noFill/>
-        </p:spPr>
-        <p:txBody>
-          <a:bodyPr wrap="square" anchor="ctr" lIns="0" rIns="0" tIns="0" bIns="0">
-            <a:spAutoFit/>
-          </a:bodyPr>
-          <a:lstStyle/>
-          <a:p>
-            <a:pPr algn="ctr"/>
-            <a:r>
-              <a:rPr sz="3000" b="1" i="0">
-                <a:solidFill>
-                  <a:srgbClr val="FFFFFF"/>
-                </a:solidFill>
-                <a:latin typeface="Calibri"/>
-              </a:rPr>
-              <a:t>✓</a:t>
-            </a:r>
-          </a:p>
-        </p:txBody>
-      </p:sp>
-      <p:sp>
-        <p:nvSpPr>
-          <p:cNvPr id="10" name="TextBox 9"/>
-          <p:cNvSpPr txBox="1"/>
-          <p:nvPr/>
-        </p:nvSpPr>
-        <p:spPr>
-          <a:xfrm>
-            <a:off x="1920240" y="1828800"/>
-            <a:ext cx="9326880" cy="1554480"/>
-          </a:xfrm>
-          <a:prstGeom prst="rect">
-            <a:avLst/>
-          </a:prstGeom>
-          <a:noFill/>
-        </p:spPr>
-        <p:txBody>
-          <a:bodyPr wrap="square" anchor="ctr" lIns="0" rIns="0" tIns="0" bIns="0">
-            <a:spAutoFit/>
-          </a:bodyPr>
-          <a:lstStyle/>
-          <a:p>
-            <a:pPr algn="l"/>
-            <a:r>
-              <a:rPr sz="2200" b="1" i="0">
-                <a:solidFill>
-                  <a:srgbClr val="1D2433"/>
-                </a:solidFill>
-                <a:latin typeface="Calibri"/>
-              </a:rPr>
-              <a:t>C. The fulcrum</a:t>
-            </a:r>
-          </a:p>
-        </p:txBody>
-      </p:sp>
-      <p:sp>
-        <p:nvSpPr>
-          <p:cNvPr id="11" name="Rounded Rectangle 10"/>
-          <p:cNvSpPr/>
-          <p:nvPr/>
-        </p:nvSpPr>
-        <p:spPr>
-          <a:xfrm>
-            <a:off x="640080" y="3657600"/>
-            <a:ext cx="10881360" cy="2011680"/>
-          </a:xfrm>
-          <a:prstGeom prst="roundRect">
-            <a:avLst>
-              <a:gd name="adj" fmla="val 3000"/>
             </a:avLst>
           </a:prstGeom>
           <a:solidFill>
@@ -20087,68 +22567,840 @@
       </p:sp>
       <p:sp>
         <p:nvSpPr>
+          <p:cNvPr id="8" name="TextBox 7"/>
+          <p:cNvSpPr txBox="1"/>
+          <p:nvPr/>
+        </p:nvSpPr>
+        <p:spPr>
+          <a:xfrm>
+            <a:off x="1005840" y="1828800"/>
+            <a:ext cx="10149840" cy="1554480"/>
+          </a:xfrm>
+          <a:prstGeom prst="rect">
+            <a:avLst/>
+          </a:prstGeom>
+          <a:noFill/>
+        </p:spPr>
+        <p:txBody>
+          <a:bodyPr wrap="square" anchor="ctr" lIns="0" rIns="0" tIns="0" bIns="0">
+            <a:spAutoFit/>
+          </a:bodyPr>
+          <a:lstStyle/>
+          <a:p>
+            <a:pPr algn="l"/>
+            <a:r>
+              <a:rPr sz="1900" b="1" i="0">
+                <a:solidFill>
+                  <a:srgbClr val="1D2433"/>
+                </a:solidFill>
+                <a:latin typeface="Calibri"/>
+              </a:rPr>
+              <a:t>In a first-order lever, what lies between the load and the effort?</a:t>
+            </a:r>
+          </a:p>
+        </p:txBody>
+      </p:sp>
+      <p:sp>
+        <p:nvSpPr>
+          <p:cNvPr id="9" name="Rounded Rectangle 8"/>
+          <p:cNvSpPr/>
+          <p:nvPr/>
+        </p:nvSpPr>
+        <p:spPr>
+          <a:xfrm>
+            <a:off x="640080" y="3749039"/>
+            <a:ext cx="5349240" cy="868680"/>
+          </a:xfrm>
+          <a:prstGeom prst="roundRect">
+            <a:avLst>
+              <a:gd name="adj" fmla="val 12000"/>
+            </a:avLst>
+          </a:prstGeom>
+          <a:solidFill>
+            <a:srgbClr val="EAF1F4"/>
+          </a:solidFill>
+          <a:ln>
+            <a:noFill/>
+          </a:ln>
+          <a:effectLst/>
+        </p:spPr>
+        <p:style>
+          <a:lnRef idx="1">
+            <a:schemeClr val="accent1"/>
+          </a:lnRef>
+          <a:fillRef idx="3">
+            <a:schemeClr val="accent1"/>
+          </a:fillRef>
+          <a:effectRef idx="2">
+            <a:schemeClr val="accent1"/>
+          </a:effectRef>
+          <a:fontRef idx="minor">
+            <a:schemeClr val="lt1"/>
+          </a:fontRef>
+        </p:style>
+        <p:txBody>
+          <a:bodyPr rtlCol="0" anchor="ctr"/>
+          <a:lstStyle/>
+          <a:p>
+            <a:pPr algn="ctr"/>
+          </a:p>
+        </p:txBody>
+      </p:sp>
+      <p:sp>
+        <p:nvSpPr>
+          <p:cNvPr id="10" name="Oval 9"/>
+          <p:cNvSpPr/>
+          <p:nvPr/>
+        </p:nvSpPr>
+        <p:spPr>
+          <a:xfrm>
+            <a:off x="914400" y="3977639"/>
+            <a:ext cx="411480" cy="411480"/>
+          </a:xfrm>
+          <a:prstGeom prst="ellipse">
+            <a:avLst/>
+          </a:prstGeom>
+          <a:solidFill>
+            <a:srgbClr val="0A9396"/>
+          </a:solidFill>
+          <a:ln>
+            <a:noFill/>
+          </a:ln>
+          <a:effectLst/>
+        </p:spPr>
+        <p:style>
+          <a:lnRef idx="1">
+            <a:schemeClr val="accent1"/>
+          </a:lnRef>
+          <a:fillRef idx="3">
+            <a:schemeClr val="accent1"/>
+          </a:fillRef>
+          <a:effectRef idx="2">
+            <a:schemeClr val="accent1"/>
+          </a:effectRef>
+          <a:fontRef idx="minor">
+            <a:schemeClr val="lt1"/>
+          </a:fontRef>
+        </p:style>
+        <p:txBody>
+          <a:bodyPr rtlCol="0" anchor="ctr"/>
+          <a:lstStyle/>
+          <a:p>
+            <a:pPr algn="ctr"/>
+          </a:p>
+        </p:txBody>
+      </p:sp>
+      <p:sp>
+        <p:nvSpPr>
+          <p:cNvPr id="11" name="TextBox 10"/>
+          <p:cNvSpPr txBox="1"/>
+          <p:nvPr/>
+        </p:nvSpPr>
+        <p:spPr>
+          <a:xfrm>
+            <a:off x="914400" y="3977639"/>
+            <a:ext cx="411480" cy="411480"/>
+          </a:xfrm>
+          <a:prstGeom prst="rect">
+            <a:avLst/>
+          </a:prstGeom>
+          <a:noFill/>
+        </p:spPr>
+        <p:txBody>
+          <a:bodyPr wrap="square" anchor="ctr" lIns="0" rIns="0" tIns="0" bIns="0">
+            <a:spAutoFit/>
+          </a:bodyPr>
+          <a:lstStyle/>
+          <a:p>
+            <a:pPr algn="ctr"/>
+            <a:r>
+              <a:rPr sz="1400" b="1" i="0">
+                <a:solidFill>
+                  <a:srgbClr val="FFFFFF"/>
+                </a:solidFill>
+                <a:latin typeface="Calibri"/>
+              </a:rPr>
+              <a:t>A</a:t>
+            </a:r>
+          </a:p>
+        </p:txBody>
+      </p:sp>
+      <p:sp>
+        <p:nvSpPr>
           <p:cNvPr id="12" name="TextBox 11"/>
           <p:cNvSpPr txBox="1"/>
           <p:nvPr/>
         </p:nvSpPr>
         <p:spPr>
           <a:xfrm>
-            <a:off x="1005840" y="3886200"/>
-            <a:ext cx="4572000" cy="365760"/>
-          </a:xfrm>
-          <a:prstGeom prst="rect">
-            <a:avLst/>
-          </a:prstGeom>
-          <a:noFill/>
-        </p:spPr>
-        <p:txBody>
-          <a:bodyPr wrap="square" anchor="t" lIns="0" rIns="0" tIns="0" bIns="0">
+            <a:off x="1508760" y="3749039"/>
+            <a:ext cx="3840480" cy="868680"/>
+          </a:xfrm>
+          <a:prstGeom prst="rect">
+            <a:avLst/>
+          </a:prstGeom>
+          <a:noFill/>
+        </p:spPr>
+        <p:txBody>
+          <a:bodyPr wrap="square" anchor="ctr" lIns="0" rIns="0" tIns="0" bIns="0">
             <a:spAutoFit/>
           </a:bodyPr>
           <a:lstStyle/>
           <a:p>
             <a:pPr algn="l"/>
             <a:r>
+              <a:rPr sz="1450" b="0" i="0">
+                <a:solidFill>
+                  <a:srgbClr val="1D2433"/>
+                </a:solidFill>
+                <a:latin typeface="Calibri"/>
+              </a:rPr>
+              <a:t>The load</a:t>
+            </a:r>
+          </a:p>
+        </p:txBody>
+      </p:sp>
+      <p:sp>
+        <p:nvSpPr>
+          <p:cNvPr id="13" name="Rounded Rectangle 12"/>
+          <p:cNvSpPr/>
+          <p:nvPr/>
+        </p:nvSpPr>
+        <p:spPr>
+          <a:xfrm>
+            <a:off x="6172200" y="3749039"/>
+            <a:ext cx="5349240" cy="868680"/>
+          </a:xfrm>
+          <a:prstGeom prst="roundRect">
+            <a:avLst>
+              <a:gd name="adj" fmla="val 12000"/>
+            </a:avLst>
+          </a:prstGeom>
+          <a:solidFill>
+            <a:srgbClr val="EAF1F4"/>
+          </a:solidFill>
+          <a:ln>
+            <a:noFill/>
+          </a:ln>
+          <a:effectLst/>
+        </p:spPr>
+        <p:style>
+          <a:lnRef idx="1">
+            <a:schemeClr val="accent1"/>
+          </a:lnRef>
+          <a:fillRef idx="3">
+            <a:schemeClr val="accent1"/>
+          </a:fillRef>
+          <a:effectRef idx="2">
+            <a:schemeClr val="accent1"/>
+          </a:effectRef>
+          <a:fontRef idx="minor">
+            <a:schemeClr val="lt1"/>
+          </a:fontRef>
+        </p:style>
+        <p:txBody>
+          <a:bodyPr rtlCol="0" anchor="ctr"/>
+          <a:lstStyle/>
+          <a:p>
+            <a:pPr algn="ctr"/>
+          </a:p>
+        </p:txBody>
+      </p:sp>
+      <p:sp>
+        <p:nvSpPr>
+          <p:cNvPr id="14" name="Oval 13"/>
+          <p:cNvSpPr/>
+          <p:nvPr/>
+        </p:nvSpPr>
+        <p:spPr>
+          <a:xfrm>
+            <a:off x="6446520" y="3977639"/>
+            <a:ext cx="411480" cy="411480"/>
+          </a:xfrm>
+          <a:prstGeom prst="ellipse">
+            <a:avLst/>
+          </a:prstGeom>
+          <a:solidFill>
+            <a:srgbClr val="0A9396"/>
+          </a:solidFill>
+          <a:ln>
+            <a:noFill/>
+          </a:ln>
+          <a:effectLst/>
+        </p:spPr>
+        <p:style>
+          <a:lnRef idx="1">
+            <a:schemeClr val="accent1"/>
+          </a:lnRef>
+          <a:fillRef idx="3">
+            <a:schemeClr val="accent1"/>
+          </a:fillRef>
+          <a:effectRef idx="2">
+            <a:schemeClr val="accent1"/>
+          </a:effectRef>
+          <a:fontRef idx="minor">
+            <a:schemeClr val="lt1"/>
+          </a:fontRef>
+        </p:style>
+        <p:txBody>
+          <a:bodyPr rtlCol="0" anchor="ctr"/>
+          <a:lstStyle/>
+          <a:p>
+            <a:pPr algn="ctr"/>
+          </a:p>
+        </p:txBody>
+      </p:sp>
+      <p:sp>
+        <p:nvSpPr>
+          <p:cNvPr id="15" name="TextBox 14"/>
+          <p:cNvSpPr txBox="1"/>
+          <p:nvPr/>
+        </p:nvSpPr>
+        <p:spPr>
+          <a:xfrm>
+            <a:off x="6446520" y="3977639"/>
+            <a:ext cx="411480" cy="411480"/>
+          </a:xfrm>
+          <a:prstGeom prst="rect">
+            <a:avLst/>
+          </a:prstGeom>
+          <a:noFill/>
+        </p:spPr>
+        <p:txBody>
+          <a:bodyPr wrap="square" anchor="ctr" lIns="0" rIns="0" tIns="0" bIns="0">
+            <a:spAutoFit/>
+          </a:bodyPr>
+          <a:lstStyle/>
+          <a:p>
+            <a:pPr algn="ctr"/>
+            <a:r>
               <a:rPr sz="1400" b="1" i="0">
                 <a:solidFill>
+                  <a:srgbClr val="FFFFFF"/>
+                </a:solidFill>
+                <a:latin typeface="Calibri"/>
+              </a:rPr>
+              <a:t>B</a:t>
+            </a:r>
+          </a:p>
+        </p:txBody>
+      </p:sp>
+      <p:sp>
+        <p:nvSpPr>
+          <p:cNvPr id="16" name="TextBox 15"/>
+          <p:cNvSpPr txBox="1"/>
+          <p:nvPr/>
+        </p:nvSpPr>
+        <p:spPr>
+          <a:xfrm>
+            <a:off x="7040880" y="3749039"/>
+            <a:ext cx="3840480" cy="868680"/>
+          </a:xfrm>
+          <a:prstGeom prst="rect">
+            <a:avLst/>
+          </a:prstGeom>
+          <a:noFill/>
+        </p:spPr>
+        <p:txBody>
+          <a:bodyPr wrap="square" anchor="ctr" lIns="0" rIns="0" tIns="0" bIns="0">
+            <a:spAutoFit/>
+          </a:bodyPr>
+          <a:lstStyle/>
+          <a:p>
+            <a:pPr algn="l"/>
+            <a:r>
+              <a:rPr sz="1450" b="0" i="0">
+                <a:solidFill>
+                  <a:srgbClr val="1D2433"/>
+                </a:solidFill>
+                <a:latin typeface="Calibri"/>
+              </a:rPr>
+              <a:t>The effort</a:t>
+            </a:r>
+          </a:p>
+        </p:txBody>
+      </p:sp>
+      <p:sp>
+        <p:nvSpPr>
+          <p:cNvPr id="17" name="Rounded Rectangle 16"/>
+          <p:cNvSpPr/>
+          <p:nvPr/>
+        </p:nvSpPr>
+        <p:spPr>
+          <a:xfrm>
+            <a:off x="640080" y="4782312"/>
+            <a:ext cx="5349240" cy="868680"/>
+          </a:xfrm>
+          <a:prstGeom prst="roundRect">
+            <a:avLst>
+              <a:gd name="adj" fmla="val 12000"/>
+            </a:avLst>
+          </a:prstGeom>
+          <a:solidFill>
+            <a:srgbClr val="E9F5F0"/>
+          </a:solidFill>
+          <a:ln w="31750">
+            <a:solidFill>
+              <a:srgbClr val="2A9D8F"/>
+            </a:solidFill>
+          </a:ln>
+          <a:effectLst/>
+        </p:spPr>
+        <p:style>
+          <a:lnRef idx="1">
+            <a:schemeClr val="accent1"/>
+          </a:lnRef>
+          <a:fillRef idx="3">
+            <a:schemeClr val="accent1"/>
+          </a:fillRef>
+          <a:effectRef idx="2">
+            <a:schemeClr val="accent1"/>
+          </a:effectRef>
+          <a:fontRef idx="minor">
+            <a:schemeClr val="lt1"/>
+          </a:fontRef>
+        </p:style>
+        <p:txBody>
+          <a:bodyPr rtlCol="0" anchor="ctr"/>
+          <a:lstStyle/>
+          <a:p>
+            <a:pPr algn="ctr"/>
+          </a:p>
+        </p:txBody>
+      </p:sp>
+      <p:sp>
+        <p:nvSpPr>
+          <p:cNvPr id="18" name="Oval 17"/>
+          <p:cNvSpPr/>
+          <p:nvPr/>
+        </p:nvSpPr>
+        <p:spPr>
+          <a:xfrm>
+            <a:off x="914400" y="5010912"/>
+            <a:ext cx="411480" cy="411480"/>
+          </a:xfrm>
+          <a:prstGeom prst="ellipse">
+            <a:avLst/>
+          </a:prstGeom>
+          <a:solidFill>
+            <a:srgbClr val="2A9D8F"/>
+          </a:solidFill>
+          <a:ln>
+            <a:noFill/>
+          </a:ln>
+          <a:effectLst/>
+        </p:spPr>
+        <p:style>
+          <a:lnRef idx="1">
+            <a:schemeClr val="accent1"/>
+          </a:lnRef>
+          <a:fillRef idx="3">
+            <a:schemeClr val="accent1"/>
+          </a:fillRef>
+          <a:effectRef idx="2">
+            <a:schemeClr val="accent1"/>
+          </a:effectRef>
+          <a:fontRef idx="minor">
+            <a:schemeClr val="lt1"/>
+          </a:fontRef>
+        </p:style>
+        <p:txBody>
+          <a:bodyPr rtlCol="0" anchor="ctr"/>
+          <a:lstStyle/>
+          <a:p>
+            <a:pPr algn="ctr"/>
+          </a:p>
+        </p:txBody>
+      </p:sp>
+      <p:sp>
+        <p:nvSpPr>
+          <p:cNvPr id="19" name="TextBox 18"/>
+          <p:cNvSpPr txBox="1"/>
+          <p:nvPr/>
+        </p:nvSpPr>
+        <p:spPr>
+          <a:xfrm>
+            <a:off x="914400" y="5010912"/>
+            <a:ext cx="411480" cy="411480"/>
+          </a:xfrm>
+          <a:prstGeom prst="rect">
+            <a:avLst/>
+          </a:prstGeom>
+          <a:noFill/>
+        </p:spPr>
+        <p:txBody>
+          <a:bodyPr wrap="square" anchor="ctr" lIns="0" rIns="0" tIns="0" bIns="0">
+            <a:spAutoFit/>
+          </a:bodyPr>
+          <a:lstStyle/>
+          <a:p>
+            <a:pPr algn="ctr"/>
+            <a:r>
+              <a:rPr sz="1400" b="1" i="0">
+                <a:solidFill>
+                  <a:srgbClr val="FFFFFF"/>
+                </a:solidFill>
+                <a:latin typeface="Calibri"/>
+              </a:rPr>
+              <a:t>C</a:t>
+            </a:r>
+          </a:p>
+        </p:txBody>
+      </p:sp>
+      <p:sp>
+        <p:nvSpPr>
+          <p:cNvPr id="20" name="TextBox 19"/>
+          <p:cNvSpPr txBox="1"/>
+          <p:nvPr/>
+        </p:nvSpPr>
+        <p:spPr>
+          <a:xfrm>
+            <a:off x="1508760" y="4782312"/>
+            <a:ext cx="3840480" cy="868680"/>
+          </a:xfrm>
+          <a:prstGeom prst="rect">
+            <a:avLst/>
+          </a:prstGeom>
+          <a:noFill/>
+        </p:spPr>
+        <p:txBody>
+          <a:bodyPr wrap="square" anchor="ctr" lIns="0" rIns="0" tIns="0" bIns="0">
+            <a:spAutoFit/>
+          </a:bodyPr>
+          <a:lstStyle/>
+          <a:p>
+            <a:pPr algn="l"/>
+            <a:r>
+              <a:rPr sz="1450" b="1" i="0">
+                <a:solidFill>
+                  <a:srgbClr val="1D2433"/>
+                </a:solidFill>
+                <a:latin typeface="Calibri"/>
+              </a:rPr>
+              <a:t>The fulcrum</a:t>
+            </a:r>
+          </a:p>
+        </p:txBody>
+      </p:sp>
+      <p:sp>
+        <p:nvSpPr>
+          <p:cNvPr id="21" name="Oval 20"/>
+          <p:cNvSpPr/>
+          <p:nvPr/>
+        </p:nvSpPr>
+        <p:spPr>
+          <a:xfrm>
+            <a:off x="5440680" y="5029200"/>
+            <a:ext cx="365760" cy="365760"/>
+          </a:xfrm>
+          <a:prstGeom prst="ellipse">
+            <a:avLst/>
+          </a:prstGeom>
+          <a:solidFill>
+            <a:srgbClr val="2A9D8F"/>
+          </a:solidFill>
+          <a:ln>
+            <a:noFill/>
+          </a:ln>
+          <a:effectLst/>
+        </p:spPr>
+        <p:style>
+          <a:lnRef idx="1">
+            <a:schemeClr val="accent1"/>
+          </a:lnRef>
+          <a:fillRef idx="3">
+            <a:schemeClr val="accent1"/>
+          </a:fillRef>
+          <a:effectRef idx="2">
+            <a:schemeClr val="accent1"/>
+          </a:effectRef>
+          <a:fontRef idx="minor">
+            <a:schemeClr val="lt1"/>
+          </a:fontRef>
+        </p:style>
+        <p:txBody>
+          <a:bodyPr rtlCol="0" anchor="ctr"/>
+          <a:lstStyle/>
+          <a:p>
+            <a:pPr algn="ctr"/>
+          </a:p>
+        </p:txBody>
+      </p:sp>
+      <p:sp>
+        <p:nvSpPr>
+          <p:cNvPr id="22" name="TextBox 21"/>
+          <p:cNvSpPr txBox="1"/>
+          <p:nvPr/>
+        </p:nvSpPr>
+        <p:spPr>
+          <a:xfrm>
+            <a:off x="5440680" y="4983479"/>
+            <a:ext cx="365760" cy="365760"/>
+          </a:xfrm>
+          <a:prstGeom prst="rect">
+            <a:avLst/>
+          </a:prstGeom>
+          <a:noFill/>
+        </p:spPr>
+        <p:txBody>
+          <a:bodyPr wrap="square" anchor="ctr" lIns="0" rIns="0" tIns="0" bIns="0">
+            <a:spAutoFit/>
+          </a:bodyPr>
+          <a:lstStyle/>
+          <a:p>
+            <a:pPr algn="ctr"/>
+            <a:r>
+              <a:rPr sz="1600" b="1" i="0">
+                <a:solidFill>
+                  <a:srgbClr val="FFFFFF"/>
+                </a:solidFill>
+                <a:latin typeface="Calibri"/>
+              </a:rPr>
+              <a:t>✓</a:t>
+            </a:r>
+          </a:p>
+        </p:txBody>
+      </p:sp>
+      <p:sp>
+        <p:nvSpPr>
+          <p:cNvPr id="23" name="Rounded Rectangle 22"/>
+          <p:cNvSpPr/>
+          <p:nvPr/>
+        </p:nvSpPr>
+        <p:spPr>
+          <a:xfrm>
+            <a:off x="6172200" y="4782312"/>
+            <a:ext cx="5349240" cy="868680"/>
+          </a:xfrm>
+          <a:prstGeom prst="roundRect">
+            <a:avLst>
+              <a:gd name="adj" fmla="val 12000"/>
+            </a:avLst>
+          </a:prstGeom>
+          <a:solidFill>
+            <a:srgbClr val="EAF1F4"/>
+          </a:solidFill>
+          <a:ln>
+            <a:noFill/>
+          </a:ln>
+          <a:effectLst/>
+        </p:spPr>
+        <p:style>
+          <a:lnRef idx="1">
+            <a:schemeClr val="accent1"/>
+          </a:lnRef>
+          <a:fillRef idx="3">
+            <a:schemeClr val="accent1"/>
+          </a:fillRef>
+          <a:effectRef idx="2">
+            <a:schemeClr val="accent1"/>
+          </a:effectRef>
+          <a:fontRef idx="minor">
+            <a:schemeClr val="lt1"/>
+          </a:fontRef>
+        </p:style>
+        <p:txBody>
+          <a:bodyPr rtlCol="0" anchor="ctr"/>
+          <a:lstStyle/>
+          <a:p>
+            <a:pPr algn="ctr"/>
+          </a:p>
+        </p:txBody>
+      </p:sp>
+      <p:sp>
+        <p:nvSpPr>
+          <p:cNvPr id="24" name="Oval 23"/>
+          <p:cNvSpPr/>
+          <p:nvPr/>
+        </p:nvSpPr>
+        <p:spPr>
+          <a:xfrm>
+            <a:off x="6446520" y="5010912"/>
+            <a:ext cx="411480" cy="411480"/>
+          </a:xfrm>
+          <a:prstGeom prst="ellipse">
+            <a:avLst/>
+          </a:prstGeom>
+          <a:solidFill>
+            <a:srgbClr val="0A9396"/>
+          </a:solidFill>
+          <a:ln>
+            <a:noFill/>
+          </a:ln>
+          <a:effectLst/>
+        </p:spPr>
+        <p:style>
+          <a:lnRef idx="1">
+            <a:schemeClr val="accent1"/>
+          </a:lnRef>
+          <a:fillRef idx="3">
+            <a:schemeClr val="accent1"/>
+          </a:fillRef>
+          <a:effectRef idx="2">
+            <a:schemeClr val="accent1"/>
+          </a:effectRef>
+          <a:fontRef idx="minor">
+            <a:schemeClr val="lt1"/>
+          </a:fontRef>
+        </p:style>
+        <p:txBody>
+          <a:bodyPr rtlCol="0" anchor="ctr"/>
+          <a:lstStyle/>
+          <a:p>
+            <a:pPr algn="ctr"/>
+          </a:p>
+        </p:txBody>
+      </p:sp>
+      <p:sp>
+        <p:nvSpPr>
+          <p:cNvPr id="25" name="TextBox 24"/>
+          <p:cNvSpPr txBox="1"/>
+          <p:nvPr/>
+        </p:nvSpPr>
+        <p:spPr>
+          <a:xfrm>
+            <a:off x="6446520" y="5010912"/>
+            <a:ext cx="411480" cy="411480"/>
+          </a:xfrm>
+          <a:prstGeom prst="rect">
+            <a:avLst/>
+          </a:prstGeom>
+          <a:noFill/>
+        </p:spPr>
+        <p:txBody>
+          <a:bodyPr wrap="square" anchor="ctr" lIns="0" rIns="0" tIns="0" bIns="0">
+            <a:spAutoFit/>
+          </a:bodyPr>
+          <a:lstStyle/>
+          <a:p>
+            <a:pPr algn="ctr"/>
+            <a:r>
+              <a:rPr sz="1400" b="1" i="0">
+                <a:solidFill>
+                  <a:srgbClr val="FFFFFF"/>
+                </a:solidFill>
+                <a:latin typeface="Calibri"/>
+              </a:rPr>
+              <a:t>D</a:t>
+            </a:r>
+          </a:p>
+        </p:txBody>
+      </p:sp>
+      <p:sp>
+        <p:nvSpPr>
+          <p:cNvPr id="26" name="TextBox 25"/>
+          <p:cNvSpPr txBox="1"/>
+          <p:nvPr/>
+        </p:nvSpPr>
+        <p:spPr>
+          <a:xfrm>
+            <a:off x="7040880" y="4782312"/>
+            <a:ext cx="3840480" cy="868680"/>
+          </a:xfrm>
+          <a:prstGeom prst="rect">
+            <a:avLst/>
+          </a:prstGeom>
+          <a:noFill/>
+        </p:spPr>
+        <p:txBody>
+          <a:bodyPr wrap="square" anchor="ctr" lIns="0" rIns="0" tIns="0" bIns="0">
+            <a:spAutoFit/>
+          </a:bodyPr>
+          <a:lstStyle/>
+          <a:p>
+            <a:pPr algn="l"/>
+            <a:r>
+              <a:rPr sz="1450" b="0" i="0">
+                <a:solidFill>
+                  <a:srgbClr val="1D2433"/>
+                </a:solidFill>
+                <a:latin typeface="Calibri"/>
+              </a:rPr>
+              <a:t>Nothing</a:t>
+            </a:r>
+          </a:p>
+        </p:txBody>
+      </p:sp>
+      <p:sp>
+        <p:nvSpPr>
+          <p:cNvPr id="27" name="Rounded Rectangle 26"/>
+          <p:cNvSpPr/>
+          <p:nvPr/>
+        </p:nvSpPr>
+        <p:spPr>
+          <a:xfrm>
+            <a:off x="640080" y="5779008"/>
+            <a:ext cx="10881360" cy="566928"/>
+          </a:xfrm>
+          <a:prstGeom prst="roundRect">
+            <a:avLst>
+              <a:gd name="adj" fmla="val 10000"/>
+            </a:avLst>
+          </a:prstGeom>
+          <a:solidFill>
+            <a:srgbClr val="EEF2F7"/>
+          </a:solidFill>
+          <a:ln>
+            <a:noFill/>
+          </a:ln>
+          <a:effectLst/>
+        </p:spPr>
+        <p:style>
+          <a:lnRef idx="1">
+            <a:schemeClr val="accent1"/>
+          </a:lnRef>
+          <a:fillRef idx="3">
+            <a:schemeClr val="accent1"/>
+          </a:fillRef>
+          <a:effectRef idx="2">
+            <a:schemeClr val="accent1"/>
+          </a:effectRef>
+          <a:fontRef idx="minor">
+            <a:schemeClr val="lt1"/>
+          </a:fontRef>
+        </p:style>
+        <p:txBody>
+          <a:bodyPr rtlCol="0" anchor="ctr"/>
+          <a:lstStyle/>
+          <a:p>
+            <a:pPr algn="ctr"/>
+          </a:p>
+        </p:txBody>
+      </p:sp>
+      <p:sp>
+        <p:nvSpPr>
+          <p:cNvPr id="28" name="TextBox 27"/>
+          <p:cNvSpPr txBox="1"/>
+          <p:nvPr/>
+        </p:nvSpPr>
+        <p:spPr>
+          <a:xfrm>
+            <a:off x="914400" y="5779008"/>
+            <a:ext cx="10332720" cy="566928"/>
+          </a:xfrm>
+          <a:prstGeom prst="rect">
+            <a:avLst/>
+          </a:prstGeom>
+          <a:noFill/>
+        </p:spPr>
+        <p:txBody>
+          <a:bodyPr wrap="square" anchor="ctr" lIns="0" rIns="0" tIns="0" bIns="0">
+            <a:spAutoFit/>
+          </a:bodyPr>
+          <a:lstStyle/>
+          <a:p>
+            <a:pPr algn="l"/>
+            <a:r>
+              <a:rPr sz="1250" b="1" i="0">
+                <a:solidFill>
                   <a:srgbClr val="2A9D8F"/>
                 </a:solidFill>
                 <a:latin typeface="Arial"/>
               </a:rPr>
-              <a:t>WHY</a:t>
-            </a:r>
-          </a:p>
-        </p:txBody>
-      </p:sp>
-      <p:sp>
-        <p:nvSpPr>
-          <p:cNvPr id="13" name="TextBox 12"/>
-          <p:cNvSpPr txBox="1"/>
-          <p:nvPr/>
-        </p:nvSpPr>
-        <p:spPr>
-          <a:xfrm>
-            <a:off x="1005840" y="4297680"/>
-            <a:ext cx="10149840" cy="1280160"/>
-          </a:xfrm>
-          <a:prstGeom prst="rect">
-            <a:avLst/>
-          </a:prstGeom>
-          <a:noFill/>
-        </p:spPr>
-        <p:txBody>
-          <a:bodyPr wrap="square" anchor="t" lIns="0" rIns="0" tIns="0" bIns="0">
-            <a:spAutoFit/>
-          </a:bodyPr>
-          <a:lstStyle/>
-          <a:p>
-            <a:pPr algn="l">
-              <a:lnSpc>
-                <a:spcPct val="110000"/>
-              </a:lnSpc>
-            </a:pPr>
-            <a:r>
-              <a:rPr sz="1600" b="0" i="0">
+              <a:t>Why  </a:t>
+            </a:r>
+            <a:r>
+              <a:rPr sz="1200" b="0" i="0">
                 <a:solidFill>
                   <a:srgbClr val="1D2433"/>
                 </a:solidFill>
@@ -20294,7 +23546,7 @@
                 </a:solidFill>
                 <a:latin typeface="Calibri"/>
               </a:rPr>
-              <a:t>Q2 — Class 2</a:t>
+              <a:t>Q2 - Class 2</a:t>
             </a:r>
           </a:p>
         </p:txBody>
@@ -20590,7 +23842,7 @@
         <p:spPr>
           <a:xfrm>
             <a:off x="1508760" y="3749039"/>
-            <a:ext cx="4297680" cy="868680"/>
+            <a:ext cx="3840480" cy="868680"/>
           </a:xfrm>
           <a:prstGeom prst="rect">
             <a:avLst/>
@@ -20750,7 +24002,7 @@
         <p:spPr>
           <a:xfrm>
             <a:off x="7040880" y="3749039"/>
-            <a:ext cx="4297680" cy="868680"/>
+            <a:ext cx="3840480" cy="868680"/>
           </a:xfrm>
           <a:prstGeom prst="rect">
             <a:avLst/>
@@ -20910,7 +24162,7 @@
         <p:spPr>
           <a:xfrm>
             <a:off x="1508760" y="4782312"/>
-            <a:ext cx="4297680" cy="868680"/>
+            <a:ext cx="3840480" cy="868680"/>
           </a:xfrm>
           <a:prstGeom prst="rect">
             <a:avLst/>
@@ -21070,7 +24322,7 @@
         <p:spPr>
           <a:xfrm>
             <a:off x="7040880" y="4782312"/>
-            <a:ext cx="4297680" cy="868680"/>
+            <a:ext cx="3840480" cy="868680"/>
           </a:xfrm>
           <a:prstGeom prst="rect">
             <a:avLst/>
@@ -21137,7 +24389,7 @@
             <a:avLst/>
           </a:prstGeom>
           <a:solidFill>
-            <a:srgbClr val="2A9D8F"/>
+            <a:srgbClr val="0A9396"/>
           </a:solidFill>
           <a:ln>
             <a:noFill/>
@@ -21192,11 +24444,11 @@
             <a:r>
               <a:rPr sz="1300" b="1" i="0">
                 <a:solidFill>
-                  <a:srgbClr val="2A9D8F"/>
+                  <a:srgbClr val="0A9396"/>
                 </a:solidFill>
                 <a:latin typeface="Arial"/>
               </a:rPr>
-              <a:t>ANSWER REVEAL</a:t>
+              <a:t>QUIZ QUESTION</a:t>
             </a:r>
           </a:p>
         </p:txBody>
@@ -21231,7 +24483,7 @@
                 </a:solidFill>
                 <a:latin typeface="Calibri"/>
               </a:rPr>
-              <a:t>Q2 — Answer</a:t>
+              <a:t>Q2 - Class 2</a:t>
             </a:r>
           </a:p>
         </p:txBody>
@@ -21320,166 +24572,6 @@
           <a:prstGeom prst="roundRect">
             <a:avLst>
               <a:gd name="adj" fmla="val 4000"/>
-            </a:avLst>
-          </a:prstGeom>
-          <a:solidFill>
-            <a:srgbClr val="E9F5F0"/>
-          </a:solidFill>
-          <a:ln>
-            <a:noFill/>
-          </a:ln>
-          <a:effectLst/>
-        </p:spPr>
-        <p:style>
-          <a:lnRef idx="1">
-            <a:schemeClr val="accent1"/>
-          </a:lnRef>
-          <a:fillRef idx="3">
-            <a:schemeClr val="accent1"/>
-          </a:fillRef>
-          <a:effectRef idx="2">
-            <a:schemeClr val="accent1"/>
-          </a:effectRef>
-          <a:fontRef idx="minor">
-            <a:schemeClr val="lt1"/>
-          </a:fontRef>
-        </p:style>
-        <p:txBody>
-          <a:bodyPr rtlCol="0" anchor="ctr"/>
-          <a:lstStyle/>
-          <a:p>
-            <a:pPr algn="ctr"/>
-          </a:p>
-        </p:txBody>
-      </p:sp>
-      <p:sp>
-        <p:nvSpPr>
-          <p:cNvPr id="8" name="Oval 7"/>
-          <p:cNvSpPr/>
-          <p:nvPr/>
-        </p:nvSpPr>
-        <p:spPr>
-          <a:xfrm>
-            <a:off x="1005840" y="2240280"/>
-            <a:ext cx="731520" cy="731520"/>
-          </a:xfrm>
-          <a:prstGeom prst="ellipse">
-            <a:avLst/>
-          </a:prstGeom>
-          <a:solidFill>
-            <a:srgbClr val="2A9D8F"/>
-          </a:solidFill>
-          <a:ln>
-            <a:noFill/>
-          </a:ln>
-          <a:effectLst/>
-        </p:spPr>
-        <p:style>
-          <a:lnRef idx="1">
-            <a:schemeClr val="accent1"/>
-          </a:lnRef>
-          <a:fillRef idx="3">
-            <a:schemeClr val="accent1"/>
-          </a:fillRef>
-          <a:effectRef idx="2">
-            <a:schemeClr val="accent1"/>
-          </a:effectRef>
-          <a:fontRef idx="minor">
-            <a:schemeClr val="lt1"/>
-          </a:fontRef>
-        </p:style>
-        <p:txBody>
-          <a:bodyPr rtlCol="0" anchor="ctr"/>
-          <a:lstStyle/>
-          <a:p>
-            <a:pPr algn="ctr"/>
-          </a:p>
-        </p:txBody>
-      </p:sp>
-      <p:sp>
-        <p:nvSpPr>
-          <p:cNvPr id="9" name="TextBox 8"/>
-          <p:cNvSpPr txBox="1"/>
-          <p:nvPr/>
-        </p:nvSpPr>
-        <p:spPr>
-          <a:xfrm>
-            <a:off x="1005840" y="2240280"/>
-            <a:ext cx="731520" cy="731520"/>
-          </a:xfrm>
-          <a:prstGeom prst="rect">
-            <a:avLst/>
-          </a:prstGeom>
-          <a:noFill/>
-        </p:spPr>
-        <p:txBody>
-          <a:bodyPr wrap="square" anchor="ctr" lIns="0" rIns="0" tIns="0" bIns="0">
-            <a:spAutoFit/>
-          </a:bodyPr>
-          <a:lstStyle/>
-          <a:p>
-            <a:pPr algn="ctr"/>
-            <a:r>
-              <a:rPr sz="3000" b="1" i="0">
-                <a:solidFill>
-                  <a:srgbClr val="FFFFFF"/>
-                </a:solidFill>
-                <a:latin typeface="Calibri"/>
-              </a:rPr>
-              <a:t>✓</a:t>
-            </a:r>
-          </a:p>
-        </p:txBody>
-      </p:sp>
-      <p:sp>
-        <p:nvSpPr>
-          <p:cNvPr id="10" name="TextBox 9"/>
-          <p:cNvSpPr txBox="1"/>
-          <p:nvPr/>
-        </p:nvSpPr>
-        <p:spPr>
-          <a:xfrm>
-            <a:off x="1920240" y="1828800"/>
-            <a:ext cx="9326880" cy="1554480"/>
-          </a:xfrm>
-          <a:prstGeom prst="rect">
-            <a:avLst/>
-          </a:prstGeom>
-          <a:noFill/>
-        </p:spPr>
-        <p:txBody>
-          <a:bodyPr wrap="square" anchor="ctr" lIns="0" rIns="0" tIns="0" bIns="0">
-            <a:spAutoFit/>
-          </a:bodyPr>
-          <a:lstStyle/>
-          <a:p>
-            <a:pPr algn="l"/>
-            <a:r>
-              <a:rPr sz="2200" b="1" i="0">
-                <a:solidFill>
-                  <a:srgbClr val="1D2433"/>
-                </a:solidFill>
-                <a:latin typeface="Calibri"/>
-              </a:rPr>
-              <a:t>B. A wheelbarrow</a:t>
-            </a:r>
-          </a:p>
-        </p:txBody>
-      </p:sp>
-      <p:sp>
-        <p:nvSpPr>
-          <p:cNvPr id="11" name="Rounded Rectangle 10"/>
-          <p:cNvSpPr/>
-          <p:nvPr/>
-        </p:nvSpPr>
-        <p:spPr>
-          <a:xfrm>
-            <a:off x="640080" y="3657600"/>
-            <a:ext cx="10881360" cy="2011680"/>
-          </a:xfrm>
-          <a:prstGeom prst="roundRect">
-            <a:avLst>
-              <a:gd name="adj" fmla="val 3000"/>
             </a:avLst>
           </a:prstGeom>
           <a:solidFill>
@@ -21520,68 +24612,840 @@
       </p:sp>
       <p:sp>
         <p:nvSpPr>
+          <p:cNvPr id="8" name="TextBox 7"/>
+          <p:cNvSpPr txBox="1"/>
+          <p:nvPr/>
+        </p:nvSpPr>
+        <p:spPr>
+          <a:xfrm>
+            <a:off x="1005840" y="1828800"/>
+            <a:ext cx="10149840" cy="1554480"/>
+          </a:xfrm>
+          <a:prstGeom prst="rect">
+            <a:avLst/>
+          </a:prstGeom>
+          <a:noFill/>
+        </p:spPr>
+        <p:txBody>
+          <a:bodyPr wrap="square" anchor="ctr" lIns="0" rIns="0" tIns="0" bIns="0">
+            <a:spAutoFit/>
+          </a:bodyPr>
+          <a:lstStyle/>
+          <a:p>
+            <a:pPr algn="l"/>
+            <a:r>
+              <a:rPr sz="1900" b="1" i="0">
+                <a:solidFill>
+                  <a:srgbClr val="1D2433"/>
+                </a:solidFill>
+                <a:latin typeface="Calibri"/>
+              </a:rPr>
+              <a:t>Which of these is a second-order lever?</a:t>
+            </a:r>
+          </a:p>
+        </p:txBody>
+      </p:sp>
+      <p:sp>
+        <p:nvSpPr>
+          <p:cNvPr id="9" name="Rounded Rectangle 8"/>
+          <p:cNvSpPr/>
+          <p:nvPr/>
+        </p:nvSpPr>
+        <p:spPr>
+          <a:xfrm>
+            <a:off x="640080" y="3749039"/>
+            <a:ext cx="5349240" cy="868680"/>
+          </a:xfrm>
+          <a:prstGeom prst="roundRect">
+            <a:avLst>
+              <a:gd name="adj" fmla="val 12000"/>
+            </a:avLst>
+          </a:prstGeom>
+          <a:solidFill>
+            <a:srgbClr val="EAF1F4"/>
+          </a:solidFill>
+          <a:ln>
+            <a:noFill/>
+          </a:ln>
+          <a:effectLst/>
+        </p:spPr>
+        <p:style>
+          <a:lnRef idx="1">
+            <a:schemeClr val="accent1"/>
+          </a:lnRef>
+          <a:fillRef idx="3">
+            <a:schemeClr val="accent1"/>
+          </a:fillRef>
+          <a:effectRef idx="2">
+            <a:schemeClr val="accent1"/>
+          </a:effectRef>
+          <a:fontRef idx="minor">
+            <a:schemeClr val="lt1"/>
+          </a:fontRef>
+        </p:style>
+        <p:txBody>
+          <a:bodyPr rtlCol="0" anchor="ctr"/>
+          <a:lstStyle/>
+          <a:p>
+            <a:pPr algn="ctr"/>
+          </a:p>
+        </p:txBody>
+      </p:sp>
+      <p:sp>
+        <p:nvSpPr>
+          <p:cNvPr id="10" name="Oval 9"/>
+          <p:cNvSpPr/>
+          <p:nvPr/>
+        </p:nvSpPr>
+        <p:spPr>
+          <a:xfrm>
+            <a:off x="914400" y="3977639"/>
+            <a:ext cx="411480" cy="411480"/>
+          </a:xfrm>
+          <a:prstGeom prst="ellipse">
+            <a:avLst/>
+          </a:prstGeom>
+          <a:solidFill>
+            <a:srgbClr val="0A9396"/>
+          </a:solidFill>
+          <a:ln>
+            <a:noFill/>
+          </a:ln>
+          <a:effectLst/>
+        </p:spPr>
+        <p:style>
+          <a:lnRef idx="1">
+            <a:schemeClr val="accent1"/>
+          </a:lnRef>
+          <a:fillRef idx="3">
+            <a:schemeClr val="accent1"/>
+          </a:fillRef>
+          <a:effectRef idx="2">
+            <a:schemeClr val="accent1"/>
+          </a:effectRef>
+          <a:fontRef idx="minor">
+            <a:schemeClr val="lt1"/>
+          </a:fontRef>
+        </p:style>
+        <p:txBody>
+          <a:bodyPr rtlCol="0" anchor="ctr"/>
+          <a:lstStyle/>
+          <a:p>
+            <a:pPr algn="ctr"/>
+          </a:p>
+        </p:txBody>
+      </p:sp>
+      <p:sp>
+        <p:nvSpPr>
+          <p:cNvPr id="11" name="TextBox 10"/>
+          <p:cNvSpPr txBox="1"/>
+          <p:nvPr/>
+        </p:nvSpPr>
+        <p:spPr>
+          <a:xfrm>
+            <a:off x="914400" y="3977639"/>
+            <a:ext cx="411480" cy="411480"/>
+          </a:xfrm>
+          <a:prstGeom prst="rect">
+            <a:avLst/>
+          </a:prstGeom>
+          <a:noFill/>
+        </p:spPr>
+        <p:txBody>
+          <a:bodyPr wrap="square" anchor="ctr" lIns="0" rIns="0" tIns="0" bIns="0">
+            <a:spAutoFit/>
+          </a:bodyPr>
+          <a:lstStyle/>
+          <a:p>
+            <a:pPr algn="ctr"/>
+            <a:r>
+              <a:rPr sz="1400" b="1" i="0">
+                <a:solidFill>
+                  <a:srgbClr val="FFFFFF"/>
+                </a:solidFill>
+                <a:latin typeface="Calibri"/>
+              </a:rPr>
+              <a:t>A</a:t>
+            </a:r>
+          </a:p>
+        </p:txBody>
+      </p:sp>
+      <p:sp>
+        <p:nvSpPr>
           <p:cNvPr id="12" name="TextBox 11"/>
           <p:cNvSpPr txBox="1"/>
           <p:nvPr/>
         </p:nvSpPr>
         <p:spPr>
           <a:xfrm>
-            <a:off x="1005840" y="3886200"/>
-            <a:ext cx="4572000" cy="365760"/>
-          </a:xfrm>
-          <a:prstGeom prst="rect">
-            <a:avLst/>
-          </a:prstGeom>
-          <a:noFill/>
-        </p:spPr>
-        <p:txBody>
-          <a:bodyPr wrap="square" anchor="t" lIns="0" rIns="0" tIns="0" bIns="0">
+            <a:off x="1508760" y="3749039"/>
+            <a:ext cx="3840480" cy="868680"/>
+          </a:xfrm>
+          <a:prstGeom prst="rect">
+            <a:avLst/>
+          </a:prstGeom>
+          <a:noFill/>
+        </p:spPr>
+        <p:txBody>
+          <a:bodyPr wrap="square" anchor="ctr" lIns="0" rIns="0" tIns="0" bIns="0">
             <a:spAutoFit/>
           </a:bodyPr>
           <a:lstStyle/>
           <a:p>
             <a:pPr algn="l"/>
             <a:r>
+              <a:rPr sz="1450" b="0" i="0">
+                <a:solidFill>
+                  <a:srgbClr val="1D2433"/>
+                </a:solidFill>
+                <a:latin typeface="Calibri"/>
+              </a:rPr>
+              <a:t>A seesaw</a:t>
+            </a:r>
+          </a:p>
+        </p:txBody>
+      </p:sp>
+      <p:sp>
+        <p:nvSpPr>
+          <p:cNvPr id="13" name="Rounded Rectangle 12"/>
+          <p:cNvSpPr/>
+          <p:nvPr/>
+        </p:nvSpPr>
+        <p:spPr>
+          <a:xfrm>
+            <a:off x="6172200" y="3749039"/>
+            <a:ext cx="5349240" cy="868680"/>
+          </a:xfrm>
+          <a:prstGeom prst="roundRect">
+            <a:avLst>
+              <a:gd name="adj" fmla="val 12000"/>
+            </a:avLst>
+          </a:prstGeom>
+          <a:solidFill>
+            <a:srgbClr val="E9F5F0"/>
+          </a:solidFill>
+          <a:ln w="31750">
+            <a:solidFill>
+              <a:srgbClr val="2A9D8F"/>
+            </a:solidFill>
+          </a:ln>
+          <a:effectLst/>
+        </p:spPr>
+        <p:style>
+          <a:lnRef idx="1">
+            <a:schemeClr val="accent1"/>
+          </a:lnRef>
+          <a:fillRef idx="3">
+            <a:schemeClr val="accent1"/>
+          </a:fillRef>
+          <a:effectRef idx="2">
+            <a:schemeClr val="accent1"/>
+          </a:effectRef>
+          <a:fontRef idx="minor">
+            <a:schemeClr val="lt1"/>
+          </a:fontRef>
+        </p:style>
+        <p:txBody>
+          <a:bodyPr rtlCol="0" anchor="ctr"/>
+          <a:lstStyle/>
+          <a:p>
+            <a:pPr algn="ctr"/>
+          </a:p>
+        </p:txBody>
+      </p:sp>
+      <p:sp>
+        <p:nvSpPr>
+          <p:cNvPr id="14" name="Oval 13"/>
+          <p:cNvSpPr/>
+          <p:nvPr/>
+        </p:nvSpPr>
+        <p:spPr>
+          <a:xfrm>
+            <a:off x="6446520" y="3977639"/>
+            <a:ext cx="411480" cy="411480"/>
+          </a:xfrm>
+          <a:prstGeom prst="ellipse">
+            <a:avLst/>
+          </a:prstGeom>
+          <a:solidFill>
+            <a:srgbClr val="2A9D8F"/>
+          </a:solidFill>
+          <a:ln>
+            <a:noFill/>
+          </a:ln>
+          <a:effectLst/>
+        </p:spPr>
+        <p:style>
+          <a:lnRef idx="1">
+            <a:schemeClr val="accent1"/>
+          </a:lnRef>
+          <a:fillRef idx="3">
+            <a:schemeClr val="accent1"/>
+          </a:fillRef>
+          <a:effectRef idx="2">
+            <a:schemeClr val="accent1"/>
+          </a:effectRef>
+          <a:fontRef idx="minor">
+            <a:schemeClr val="lt1"/>
+          </a:fontRef>
+        </p:style>
+        <p:txBody>
+          <a:bodyPr rtlCol="0" anchor="ctr"/>
+          <a:lstStyle/>
+          <a:p>
+            <a:pPr algn="ctr"/>
+          </a:p>
+        </p:txBody>
+      </p:sp>
+      <p:sp>
+        <p:nvSpPr>
+          <p:cNvPr id="15" name="TextBox 14"/>
+          <p:cNvSpPr txBox="1"/>
+          <p:nvPr/>
+        </p:nvSpPr>
+        <p:spPr>
+          <a:xfrm>
+            <a:off x="6446520" y="3977639"/>
+            <a:ext cx="411480" cy="411480"/>
+          </a:xfrm>
+          <a:prstGeom prst="rect">
+            <a:avLst/>
+          </a:prstGeom>
+          <a:noFill/>
+        </p:spPr>
+        <p:txBody>
+          <a:bodyPr wrap="square" anchor="ctr" lIns="0" rIns="0" tIns="0" bIns="0">
+            <a:spAutoFit/>
+          </a:bodyPr>
+          <a:lstStyle/>
+          <a:p>
+            <a:pPr algn="ctr"/>
+            <a:r>
               <a:rPr sz="1400" b="1" i="0">
                 <a:solidFill>
+                  <a:srgbClr val="FFFFFF"/>
+                </a:solidFill>
+                <a:latin typeface="Calibri"/>
+              </a:rPr>
+              <a:t>B</a:t>
+            </a:r>
+          </a:p>
+        </p:txBody>
+      </p:sp>
+      <p:sp>
+        <p:nvSpPr>
+          <p:cNvPr id="16" name="TextBox 15"/>
+          <p:cNvSpPr txBox="1"/>
+          <p:nvPr/>
+        </p:nvSpPr>
+        <p:spPr>
+          <a:xfrm>
+            <a:off x="7040880" y="3749039"/>
+            <a:ext cx="3840480" cy="868680"/>
+          </a:xfrm>
+          <a:prstGeom prst="rect">
+            <a:avLst/>
+          </a:prstGeom>
+          <a:noFill/>
+        </p:spPr>
+        <p:txBody>
+          <a:bodyPr wrap="square" anchor="ctr" lIns="0" rIns="0" tIns="0" bIns="0">
+            <a:spAutoFit/>
+          </a:bodyPr>
+          <a:lstStyle/>
+          <a:p>
+            <a:pPr algn="l"/>
+            <a:r>
+              <a:rPr sz="1450" b="1" i="0">
+                <a:solidFill>
+                  <a:srgbClr val="1D2433"/>
+                </a:solidFill>
+                <a:latin typeface="Calibri"/>
+              </a:rPr>
+              <a:t>A wheelbarrow</a:t>
+            </a:r>
+          </a:p>
+        </p:txBody>
+      </p:sp>
+      <p:sp>
+        <p:nvSpPr>
+          <p:cNvPr id="17" name="Oval 16"/>
+          <p:cNvSpPr/>
+          <p:nvPr/>
+        </p:nvSpPr>
+        <p:spPr>
+          <a:xfrm>
+            <a:off x="10972800" y="3995927"/>
+            <a:ext cx="365760" cy="365760"/>
+          </a:xfrm>
+          <a:prstGeom prst="ellipse">
+            <a:avLst/>
+          </a:prstGeom>
+          <a:solidFill>
+            <a:srgbClr val="2A9D8F"/>
+          </a:solidFill>
+          <a:ln>
+            <a:noFill/>
+          </a:ln>
+          <a:effectLst/>
+        </p:spPr>
+        <p:style>
+          <a:lnRef idx="1">
+            <a:schemeClr val="accent1"/>
+          </a:lnRef>
+          <a:fillRef idx="3">
+            <a:schemeClr val="accent1"/>
+          </a:fillRef>
+          <a:effectRef idx="2">
+            <a:schemeClr val="accent1"/>
+          </a:effectRef>
+          <a:fontRef idx="minor">
+            <a:schemeClr val="lt1"/>
+          </a:fontRef>
+        </p:style>
+        <p:txBody>
+          <a:bodyPr rtlCol="0" anchor="ctr"/>
+          <a:lstStyle/>
+          <a:p>
+            <a:pPr algn="ctr"/>
+          </a:p>
+        </p:txBody>
+      </p:sp>
+      <p:sp>
+        <p:nvSpPr>
+          <p:cNvPr id="18" name="TextBox 17"/>
+          <p:cNvSpPr txBox="1"/>
+          <p:nvPr/>
+        </p:nvSpPr>
+        <p:spPr>
+          <a:xfrm>
+            <a:off x="10972800" y="3950207"/>
+            <a:ext cx="365760" cy="365760"/>
+          </a:xfrm>
+          <a:prstGeom prst="rect">
+            <a:avLst/>
+          </a:prstGeom>
+          <a:noFill/>
+        </p:spPr>
+        <p:txBody>
+          <a:bodyPr wrap="square" anchor="ctr" lIns="0" rIns="0" tIns="0" bIns="0">
+            <a:spAutoFit/>
+          </a:bodyPr>
+          <a:lstStyle/>
+          <a:p>
+            <a:pPr algn="ctr"/>
+            <a:r>
+              <a:rPr sz="1600" b="1" i="0">
+                <a:solidFill>
+                  <a:srgbClr val="FFFFFF"/>
+                </a:solidFill>
+                <a:latin typeface="Calibri"/>
+              </a:rPr>
+              <a:t>✓</a:t>
+            </a:r>
+          </a:p>
+        </p:txBody>
+      </p:sp>
+      <p:sp>
+        <p:nvSpPr>
+          <p:cNvPr id="19" name="Rounded Rectangle 18"/>
+          <p:cNvSpPr/>
+          <p:nvPr/>
+        </p:nvSpPr>
+        <p:spPr>
+          <a:xfrm>
+            <a:off x="640080" y="4782312"/>
+            <a:ext cx="5349240" cy="868680"/>
+          </a:xfrm>
+          <a:prstGeom prst="roundRect">
+            <a:avLst>
+              <a:gd name="adj" fmla="val 12000"/>
+            </a:avLst>
+          </a:prstGeom>
+          <a:solidFill>
+            <a:srgbClr val="EAF1F4"/>
+          </a:solidFill>
+          <a:ln>
+            <a:noFill/>
+          </a:ln>
+          <a:effectLst/>
+        </p:spPr>
+        <p:style>
+          <a:lnRef idx="1">
+            <a:schemeClr val="accent1"/>
+          </a:lnRef>
+          <a:fillRef idx="3">
+            <a:schemeClr val="accent1"/>
+          </a:fillRef>
+          <a:effectRef idx="2">
+            <a:schemeClr val="accent1"/>
+          </a:effectRef>
+          <a:fontRef idx="minor">
+            <a:schemeClr val="lt1"/>
+          </a:fontRef>
+        </p:style>
+        <p:txBody>
+          <a:bodyPr rtlCol="0" anchor="ctr"/>
+          <a:lstStyle/>
+          <a:p>
+            <a:pPr algn="ctr"/>
+          </a:p>
+        </p:txBody>
+      </p:sp>
+      <p:sp>
+        <p:nvSpPr>
+          <p:cNvPr id="20" name="Oval 19"/>
+          <p:cNvSpPr/>
+          <p:nvPr/>
+        </p:nvSpPr>
+        <p:spPr>
+          <a:xfrm>
+            <a:off x="914400" y="5010912"/>
+            <a:ext cx="411480" cy="411480"/>
+          </a:xfrm>
+          <a:prstGeom prst="ellipse">
+            <a:avLst/>
+          </a:prstGeom>
+          <a:solidFill>
+            <a:srgbClr val="0A9396"/>
+          </a:solidFill>
+          <a:ln>
+            <a:noFill/>
+          </a:ln>
+          <a:effectLst/>
+        </p:spPr>
+        <p:style>
+          <a:lnRef idx="1">
+            <a:schemeClr val="accent1"/>
+          </a:lnRef>
+          <a:fillRef idx="3">
+            <a:schemeClr val="accent1"/>
+          </a:fillRef>
+          <a:effectRef idx="2">
+            <a:schemeClr val="accent1"/>
+          </a:effectRef>
+          <a:fontRef idx="minor">
+            <a:schemeClr val="lt1"/>
+          </a:fontRef>
+        </p:style>
+        <p:txBody>
+          <a:bodyPr rtlCol="0" anchor="ctr"/>
+          <a:lstStyle/>
+          <a:p>
+            <a:pPr algn="ctr"/>
+          </a:p>
+        </p:txBody>
+      </p:sp>
+      <p:sp>
+        <p:nvSpPr>
+          <p:cNvPr id="21" name="TextBox 20"/>
+          <p:cNvSpPr txBox="1"/>
+          <p:nvPr/>
+        </p:nvSpPr>
+        <p:spPr>
+          <a:xfrm>
+            <a:off x="914400" y="5010912"/>
+            <a:ext cx="411480" cy="411480"/>
+          </a:xfrm>
+          <a:prstGeom prst="rect">
+            <a:avLst/>
+          </a:prstGeom>
+          <a:noFill/>
+        </p:spPr>
+        <p:txBody>
+          <a:bodyPr wrap="square" anchor="ctr" lIns="0" rIns="0" tIns="0" bIns="0">
+            <a:spAutoFit/>
+          </a:bodyPr>
+          <a:lstStyle/>
+          <a:p>
+            <a:pPr algn="ctr"/>
+            <a:r>
+              <a:rPr sz="1400" b="1" i="0">
+                <a:solidFill>
+                  <a:srgbClr val="FFFFFF"/>
+                </a:solidFill>
+                <a:latin typeface="Calibri"/>
+              </a:rPr>
+              <a:t>C</a:t>
+            </a:r>
+          </a:p>
+        </p:txBody>
+      </p:sp>
+      <p:sp>
+        <p:nvSpPr>
+          <p:cNvPr id="22" name="TextBox 21"/>
+          <p:cNvSpPr txBox="1"/>
+          <p:nvPr/>
+        </p:nvSpPr>
+        <p:spPr>
+          <a:xfrm>
+            <a:off x="1508760" y="4782312"/>
+            <a:ext cx="3840480" cy="868680"/>
+          </a:xfrm>
+          <a:prstGeom prst="rect">
+            <a:avLst/>
+          </a:prstGeom>
+          <a:noFill/>
+        </p:spPr>
+        <p:txBody>
+          <a:bodyPr wrap="square" anchor="ctr" lIns="0" rIns="0" tIns="0" bIns="0">
+            <a:spAutoFit/>
+          </a:bodyPr>
+          <a:lstStyle/>
+          <a:p>
+            <a:pPr algn="l"/>
+            <a:r>
+              <a:rPr sz="1450" b="0" i="0">
+                <a:solidFill>
+                  <a:srgbClr val="1D2433"/>
+                </a:solidFill>
+                <a:latin typeface="Calibri"/>
+              </a:rPr>
+              <a:t>Sugar tongs</a:t>
+            </a:r>
+          </a:p>
+        </p:txBody>
+      </p:sp>
+      <p:sp>
+        <p:nvSpPr>
+          <p:cNvPr id="23" name="Rounded Rectangle 22"/>
+          <p:cNvSpPr/>
+          <p:nvPr/>
+        </p:nvSpPr>
+        <p:spPr>
+          <a:xfrm>
+            <a:off x="6172200" y="4782312"/>
+            <a:ext cx="5349240" cy="868680"/>
+          </a:xfrm>
+          <a:prstGeom prst="roundRect">
+            <a:avLst>
+              <a:gd name="adj" fmla="val 12000"/>
+            </a:avLst>
+          </a:prstGeom>
+          <a:solidFill>
+            <a:srgbClr val="EAF1F4"/>
+          </a:solidFill>
+          <a:ln>
+            <a:noFill/>
+          </a:ln>
+          <a:effectLst/>
+        </p:spPr>
+        <p:style>
+          <a:lnRef idx="1">
+            <a:schemeClr val="accent1"/>
+          </a:lnRef>
+          <a:fillRef idx="3">
+            <a:schemeClr val="accent1"/>
+          </a:fillRef>
+          <a:effectRef idx="2">
+            <a:schemeClr val="accent1"/>
+          </a:effectRef>
+          <a:fontRef idx="minor">
+            <a:schemeClr val="lt1"/>
+          </a:fontRef>
+        </p:style>
+        <p:txBody>
+          <a:bodyPr rtlCol="0" anchor="ctr"/>
+          <a:lstStyle/>
+          <a:p>
+            <a:pPr algn="ctr"/>
+          </a:p>
+        </p:txBody>
+      </p:sp>
+      <p:sp>
+        <p:nvSpPr>
+          <p:cNvPr id="24" name="Oval 23"/>
+          <p:cNvSpPr/>
+          <p:nvPr/>
+        </p:nvSpPr>
+        <p:spPr>
+          <a:xfrm>
+            <a:off x="6446520" y="5010912"/>
+            <a:ext cx="411480" cy="411480"/>
+          </a:xfrm>
+          <a:prstGeom prst="ellipse">
+            <a:avLst/>
+          </a:prstGeom>
+          <a:solidFill>
+            <a:srgbClr val="0A9396"/>
+          </a:solidFill>
+          <a:ln>
+            <a:noFill/>
+          </a:ln>
+          <a:effectLst/>
+        </p:spPr>
+        <p:style>
+          <a:lnRef idx="1">
+            <a:schemeClr val="accent1"/>
+          </a:lnRef>
+          <a:fillRef idx="3">
+            <a:schemeClr val="accent1"/>
+          </a:fillRef>
+          <a:effectRef idx="2">
+            <a:schemeClr val="accent1"/>
+          </a:effectRef>
+          <a:fontRef idx="minor">
+            <a:schemeClr val="lt1"/>
+          </a:fontRef>
+        </p:style>
+        <p:txBody>
+          <a:bodyPr rtlCol="0" anchor="ctr"/>
+          <a:lstStyle/>
+          <a:p>
+            <a:pPr algn="ctr"/>
+          </a:p>
+        </p:txBody>
+      </p:sp>
+      <p:sp>
+        <p:nvSpPr>
+          <p:cNvPr id="25" name="TextBox 24"/>
+          <p:cNvSpPr txBox="1"/>
+          <p:nvPr/>
+        </p:nvSpPr>
+        <p:spPr>
+          <a:xfrm>
+            <a:off x="6446520" y="5010912"/>
+            <a:ext cx="411480" cy="411480"/>
+          </a:xfrm>
+          <a:prstGeom prst="rect">
+            <a:avLst/>
+          </a:prstGeom>
+          <a:noFill/>
+        </p:spPr>
+        <p:txBody>
+          <a:bodyPr wrap="square" anchor="ctr" lIns="0" rIns="0" tIns="0" bIns="0">
+            <a:spAutoFit/>
+          </a:bodyPr>
+          <a:lstStyle/>
+          <a:p>
+            <a:pPr algn="ctr"/>
+            <a:r>
+              <a:rPr sz="1400" b="1" i="0">
+                <a:solidFill>
+                  <a:srgbClr val="FFFFFF"/>
+                </a:solidFill>
+                <a:latin typeface="Calibri"/>
+              </a:rPr>
+              <a:t>D</a:t>
+            </a:r>
+          </a:p>
+        </p:txBody>
+      </p:sp>
+      <p:sp>
+        <p:nvSpPr>
+          <p:cNvPr id="26" name="TextBox 25"/>
+          <p:cNvSpPr txBox="1"/>
+          <p:nvPr/>
+        </p:nvSpPr>
+        <p:spPr>
+          <a:xfrm>
+            <a:off x="7040880" y="4782312"/>
+            <a:ext cx="3840480" cy="868680"/>
+          </a:xfrm>
+          <a:prstGeom prst="rect">
+            <a:avLst/>
+          </a:prstGeom>
+          <a:noFill/>
+        </p:spPr>
+        <p:txBody>
+          <a:bodyPr wrap="square" anchor="ctr" lIns="0" rIns="0" tIns="0" bIns="0">
+            <a:spAutoFit/>
+          </a:bodyPr>
+          <a:lstStyle/>
+          <a:p>
+            <a:pPr algn="l"/>
+            <a:r>
+              <a:rPr sz="1450" b="0" i="0">
+                <a:solidFill>
+                  <a:srgbClr val="1D2433"/>
+                </a:solidFill>
+                <a:latin typeface="Calibri"/>
+              </a:rPr>
+              <a:t>A fishing rod</a:t>
+            </a:r>
+          </a:p>
+        </p:txBody>
+      </p:sp>
+      <p:sp>
+        <p:nvSpPr>
+          <p:cNvPr id="27" name="Rounded Rectangle 26"/>
+          <p:cNvSpPr/>
+          <p:nvPr/>
+        </p:nvSpPr>
+        <p:spPr>
+          <a:xfrm>
+            <a:off x="640080" y="5779008"/>
+            <a:ext cx="10881360" cy="566928"/>
+          </a:xfrm>
+          <a:prstGeom prst="roundRect">
+            <a:avLst>
+              <a:gd name="adj" fmla="val 10000"/>
+            </a:avLst>
+          </a:prstGeom>
+          <a:solidFill>
+            <a:srgbClr val="EEF2F7"/>
+          </a:solidFill>
+          <a:ln>
+            <a:noFill/>
+          </a:ln>
+          <a:effectLst/>
+        </p:spPr>
+        <p:style>
+          <a:lnRef idx="1">
+            <a:schemeClr val="accent1"/>
+          </a:lnRef>
+          <a:fillRef idx="3">
+            <a:schemeClr val="accent1"/>
+          </a:fillRef>
+          <a:effectRef idx="2">
+            <a:schemeClr val="accent1"/>
+          </a:effectRef>
+          <a:fontRef idx="minor">
+            <a:schemeClr val="lt1"/>
+          </a:fontRef>
+        </p:style>
+        <p:txBody>
+          <a:bodyPr rtlCol="0" anchor="ctr"/>
+          <a:lstStyle/>
+          <a:p>
+            <a:pPr algn="ctr"/>
+          </a:p>
+        </p:txBody>
+      </p:sp>
+      <p:sp>
+        <p:nvSpPr>
+          <p:cNvPr id="28" name="TextBox 27"/>
+          <p:cNvSpPr txBox="1"/>
+          <p:nvPr/>
+        </p:nvSpPr>
+        <p:spPr>
+          <a:xfrm>
+            <a:off x="914400" y="5779008"/>
+            <a:ext cx="10332720" cy="566928"/>
+          </a:xfrm>
+          <a:prstGeom prst="rect">
+            <a:avLst/>
+          </a:prstGeom>
+          <a:noFill/>
+        </p:spPr>
+        <p:txBody>
+          <a:bodyPr wrap="square" anchor="ctr" lIns="0" rIns="0" tIns="0" bIns="0">
+            <a:spAutoFit/>
+          </a:bodyPr>
+          <a:lstStyle/>
+          <a:p>
+            <a:pPr algn="l"/>
+            <a:r>
+              <a:rPr sz="1250" b="1" i="0">
+                <a:solidFill>
                   <a:srgbClr val="2A9D8F"/>
                 </a:solidFill>
                 <a:latin typeface="Arial"/>
               </a:rPr>
-              <a:t>WHY</a:t>
-            </a:r>
-          </a:p>
-        </p:txBody>
-      </p:sp>
-      <p:sp>
-        <p:nvSpPr>
-          <p:cNvPr id="13" name="TextBox 12"/>
-          <p:cNvSpPr txBox="1"/>
-          <p:nvPr/>
-        </p:nvSpPr>
-        <p:spPr>
-          <a:xfrm>
-            <a:off x="1005840" y="4297680"/>
-            <a:ext cx="10149840" cy="1280160"/>
-          </a:xfrm>
-          <a:prstGeom prst="rect">
-            <a:avLst/>
-          </a:prstGeom>
-          <a:noFill/>
-        </p:spPr>
-        <p:txBody>
-          <a:bodyPr wrap="square" anchor="t" lIns="0" rIns="0" tIns="0" bIns="0">
-            <a:spAutoFit/>
-          </a:bodyPr>
-          <a:lstStyle/>
-          <a:p>
-            <a:pPr algn="l">
-              <a:lnSpc>
-                <a:spcPct val="110000"/>
-              </a:lnSpc>
-            </a:pPr>
-            <a:r>
-              <a:rPr sz="1600" b="0" i="0">
+              <a:t>Why  </a:t>
+            </a:r>
+            <a:r>
+              <a:rPr sz="1200" b="0" i="0">
                 <a:solidFill>
                   <a:srgbClr val="1D2433"/>
                 </a:solidFill>
@@ -21727,7 +25591,7 @@
                 </a:solidFill>
                 <a:latin typeface="Calibri"/>
               </a:rPr>
-              <a:t>Q3 — Lever principle</a:t>
+              <a:t>Q3 - Lever principle</a:t>
             </a:r>
           </a:p>
         </p:txBody>
@@ -22023,7 +25887,7 @@
         <p:spPr>
           <a:xfrm>
             <a:off x="1508760" y="3749039"/>
-            <a:ext cx="4297680" cy="868680"/>
+            <a:ext cx="3840480" cy="868680"/>
           </a:xfrm>
           <a:prstGeom prst="rect">
             <a:avLst/>
@@ -22183,7 +26047,7 @@
         <p:spPr>
           <a:xfrm>
             <a:off x="7040880" y="3749039"/>
-            <a:ext cx="4297680" cy="868680"/>
+            <a:ext cx="3840480" cy="868680"/>
           </a:xfrm>
           <a:prstGeom prst="rect">
             <a:avLst/>
@@ -22343,7 +26207,7 @@
         <p:spPr>
           <a:xfrm>
             <a:off x="1508760" y="4782312"/>
-            <a:ext cx="4297680" cy="868680"/>
+            <a:ext cx="3840480" cy="868680"/>
           </a:xfrm>
           <a:prstGeom prst="rect">
             <a:avLst/>
@@ -22503,7 +26367,7 @@
         <p:spPr>
           <a:xfrm>
             <a:off x="7040880" y="4782312"/>
-            <a:ext cx="4297680" cy="868680"/>
+            <a:ext cx="3840480" cy="868680"/>
           </a:xfrm>
           <a:prstGeom prst="rect">
             <a:avLst/>
@@ -22570,7 +26434,7 @@
             <a:avLst/>
           </a:prstGeom>
           <a:solidFill>
-            <a:srgbClr val="2A9D8F"/>
+            <a:srgbClr val="0A9396"/>
           </a:solidFill>
           <a:ln>
             <a:noFill/>
@@ -22625,11 +26489,11 @@
             <a:r>
               <a:rPr sz="1300" b="1" i="0">
                 <a:solidFill>
-                  <a:srgbClr val="2A9D8F"/>
+                  <a:srgbClr val="0A9396"/>
                 </a:solidFill>
                 <a:latin typeface="Arial"/>
               </a:rPr>
-              <a:t>ANSWER REVEAL</a:t>
+              <a:t>QUIZ QUESTION</a:t>
             </a:r>
           </a:p>
         </p:txBody>
@@ -22664,7 +26528,7 @@
                 </a:solidFill>
                 <a:latin typeface="Calibri"/>
               </a:rPr>
-              <a:t>Q3 — Answer</a:t>
+              <a:t>Q3 - Lever principle</a:t>
             </a:r>
           </a:p>
         </p:txBody>
@@ -22753,166 +26617,6 @@
           <a:prstGeom prst="roundRect">
             <a:avLst>
               <a:gd name="adj" fmla="val 4000"/>
-            </a:avLst>
-          </a:prstGeom>
-          <a:solidFill>
-            <a:srgbClr val="E9F5F0"/>
-          </a:solidFill>
-          <a:ln>
-            <a:noFill/>
-          </a:ln>
-          <a:effectLst/>
-        </p:spPr>
-        <p:style>
-          <a:lnRef idx="1">
-            <a:schemeClr val="accent1"/>
-          </a:lnRef>
-          <a:fillRef idx="3">
-            <a:schemeClr val="accent1"/>
-          </a:fillRef>
-          <a:effectRef idx="2">
-            <a:schemeClr val="accent1"/>
-          </a:effectRef>
-          <a:fontRef idx="minor">
-            <a:schemeClr val="lt1"/>
-          </a:fontRef>
-        </p:style>
-        <p:txBody>
-          <a:bodyPr rtlCol="0" anchor="ctr"/>
-          <a:lstStyle/>
-          <a:p>
-            <a:pPr algn="ctr"/>
-          </a:p>
-        </p:txBody>
-      </p:sp>
-      <p:sp>
-        <p:nvSpPr>
-          <p:cNvPr id="8" name="Oval 7"/>
-          <p:cNvSpPr/>
-          <p:nvPr/>
-        </p:nvSpPr>
-        <p:spPr>
-          <a:xfrm>
-            <a:off x="1005840" y="2240280"/>
-            <a:ext cx="731520" cy="731520"/>
-          </a:xfrm>
-          <a:prstGeom prst="ellipse">
-            <a:avLst/>
-          </a:prstGeom>
-          <a:solidFill>
-            <a:srgbClr val="2A9D8F"/>
-          </a:solidFill>
-          <a:ln>
-            <a:noFill/>
-          </a:ln>
-          <a:effectLst/>
-        </p:spPr>
-        <p:style>
-          <a:lnRef idx="1">
-            <a:schemeClr val="accent1"/>
-          </a:lnRef>
-          <a:fillRef idx="3">
-            <a:schemeClr val="accent1"/>
-          </a:fillRef>
-          <a:effectRef idx="2">
-            <a:schemeClr val="accent1"/>
-          </a:effectRef>
-          <a:fontRef idx="minor">
-            <a:schemeClr val="lt1"/>
-          </a:fontRef>
-        </p:style>
-        <p:txBody>
-          <a:bodyPr rtlCol="0" anchor="ctr"/>
-          <a:lstStyle/>
-          <a:p>
-            <a:pPr algn="ctr"/>
-          </a:p>
-        </p:txBody>
-      </p:sp>
-      <p:sp>
-        <p:nvSpPr>
-          <p:cNvPr id="9" name="TextBox 8"/>
-          <p:cNvSpPr txBox="1"/>
-          <p:nvPr/>
-        </p:nvSpPr>
-        <p:spPr>
-          <a:xfrm>
-            <a:off x="1005840" y="2240280"/>
-            <a:ext cx="731520" cy="731520"/>
-          </a:xfrm>
-          <a:prstGeom prst="rect">
-            <a:avLst/>
-          </a:prstGeom>
-          <a:noFill/>
-        </p:spPr>
-        <p:txBody>
-          <a:bodyPr wrap="square" anchor="ctr" lIns="0" rIns="0" tIns="0" bIns="0">
-            <a:spAutoFit/>
-          </a:bodyPr>
-          <a:lstStyle/>
-          <a:p>
-            <a:pPr algn="ctr"/>
-            <a:r>
-              <a:rPr sz="3000" b="1" i="0">
-                <a:solidFill>
-                  <a:srgbClr val="FFFFFF"/>
-                </a:solidFill>
-                <a:latin typeface="Calibri"/>
-              </a:rPr>
-              <a:t>✓</a:t>
-            </a:r>
-          </a:p>
-        </p:txBody>
-      </p:sp>
-      <p:sp>
-        <p:nvSpPr>
-          <p:cNvPr id="10" name="TextBox 9"/>
-          <p:cNvSpPr txBox="1"/>
-          <p:nvPr/>
-        </p:nvSpPr>
-        <p:spPr>
-          <a:xfrm>
-            <a:off x="1920240" y="1828800"/>
-            <a:ext cx="9326880" cy="1554480"/>
-          </a:xfrm>
-          <a:prstGeom prst="rect">
-            <a:avLst/>
-          </a:prstGeom>
-          <a:noFill/>
-        </p:spPr>
-        <p:txBody>
-          <a:bodyPr wrap="square" anchor="ctr" lIns="0" rIns="0" tIns="0" bIns="0">
-            <a:spAutoFit/>
-          </a:bodyPr>
-          <a:lstStyle/>
-          <a:p>
-            <a:pPr algn="l"/>
-            <a:r>
-              <a:rPr sz="2200" b="1" i="0">
-                <a:solidFill>
-                  <a:srgbClr val="1D2433"/>
-                </a:solidFill>
-                <a:latin typeface="Calibri"/>
-              </a:rPr>
-              <a:t>B. 50 N</a:t>
-            </a:r>
-          </a:p>
-        </p:txBody>
-      </p:sp>
-      <p:sp>
-        <p:nvSpPr>
-          <p:cNvPr id="11" name="Rounded Rectangle 10"/>
-          <p:cNvSpPr/>
-          <p:nvPr/>
-        </p:nvSpPr>
-        <p:spPr>
-          <a:xfrm>
-            <a:off x="640080" y="3657600"/>
-            <a:ext cx="10881360" cy="2011680"/>
-          </a:xfrm>
-          <a:prstGeom prst="roundRect">
-            <a:avLst>
-              <a:gd name="adj" fmla="val 3000"/>
             </a:avLst>
           </a:prstGeom>
           <a:solidFill>
@@ -22953,68 +26657,840 @@
       </p:sp>
       <p:sp>
         <p:nvSpPr>
+          <p:cNvPr id="8" name="TextBox 7"/>
+          <p:cNvSpPr txBox="1"/>
+          <p:nvPr/>
+        </p:nvSpPr>
+        <p:spPr>
+          <a:xfrm>
+            <a:off x="1005840" y="1828800"/>
+            <a:ext cx="10149840" cy="1554480"/>
+          </a:xfrm>
+          <a:prstGeom prst="rect">
+            <a:avLst/>
+          </a:prstGeom>
+          <a:noFill/>
+        </p:spPr>
+        <p:txBody>
+          <a:bodyPr wrap="square" anchor="ctr" lIns="0" rIns="0" tIns="0" bIns="0">
+            <a:spAutoFit/>
+          </a:bodyPr>
+          <a:lstStyle/>
+          <a:p>
+            <a:pPr algn="l"/>
+            <a:r>
+              <a:rPr sz="1900" b="1" i="0">
+                <a:solidFill>
+                  <a:srgbClr val="1D2433"/>
+                </a:solidFill>
+                <a:latin typeface="Calibri"/>
+              </a:rPr>
+              <a:t>A load of 100 N is 2 m from the fulcrum. What effort balances it 4 m from the fulcrum?</a:t>
+            </a:r>
+          </a:p>
+        </p:txBody>
+      </p:sp>
+      <p:sp>
+        <p:nvSpPr>
+          <p:cNvPr id="9" name="Rounded Rectangle 8"/>
+          <p:cNvSpPr/>
+          <p:nvPr/>
+        </p:nvSpPr>
+        <p:spPr>
+          <a:xfrm>
+            <a:off x="640080" y="3749039"/>
+            <a:ext cx="5349240" cy="868680"/>
+          </a:xfrm>
+          <a:prstGeom prst="roundRect">
+            <a:avLst>
+              <a:gd name="adj" fmla="val 12000"/>
+            </a:avLst>
+          </a:prstGeom>
+          <a:solidFill>
+            <a:srgbClr val="EAF1F4"/>
+          </a:solidFill>
+          <a:ln>
+            <a:noFill/>
+          </a:ln>
+          <a:effectLst/>
+        </p:spPr>
+        <p:style>
+          <a:lnRef idx="1">
+            <a:schemeClr val="accent1"/>
+          </a:lnRef>
+          <a:fillRef idx="3">
+            <a:schemeClr val="accent1"/>
+          </a:fillRef>
+          <a:effectRef idx="2">
+            <a:schemeClr val="accent1"/>
+          </a:effectRef>
+          <a:fontRef idx="minor">
+            <a:schemeClr val="lt1"/>
+          </a:fontRef>
+        </p:style>
+        <p:txBody>
+          <a:bodyPr rtlCol="0" anchor="ctr"/>
+          <a:lstStyle/>
+          <a:p>
+            <a:pPr algn="ctr"/>
+          </a:p>
+        </p:txBody>
+      </p:sp>
+      <p:sp>
+        <p:nvSpPr>
+          <p:cNvPr id="10" name="Oval 9"/>
+          <p:cNvSpPr/>
+          <p:nvPr/>
+        </p:nvSpPr>
+        <p:spPr>
+          <a:xfrm>
+            <a:off x="914400" y="3977639"/>
+            <a:ext cx="411480" cy="411480"/>
+          </a:xfrm>
+          <a:prstGeom prst="ellipse">
+            <a:avLst/>
+          </a:prstGeom>
+          <a:solidFill>
+            <a:srgbClr val="0A9396"/>
+          </a:solidFill>
+          <a:ln>
+            <a:noFill/>
+          </a:ln>
+          <a:effectLst/>
+        </p:spPr>
+        <p:style>
+          <a:lnRef idx="1">
+            <a:schemeClr val="accent1"/>
+          </a:lnRef>
+          <a:fillRef idx="3">
+            <a:schemeClr val="accent1"/>
+          </a:fillRef>
+          <a:effectRef idx="2">
+            <a:schemeClr val="accent1"/>
+          </a:effectRef>
+          <a:fontRef idx="minor">
+            <a:schemeClr val="lt1"/>
+          </a:fontRef>
+        </p:style>
+        <p:txBody>
+          <a:bodyPr rtlCol="0" anchor="ctr"/>
+          <a:lstStyle/>
+          <a:p>
+            <a:pPr algn="ctr"/>
+          </a:p>
+        </p:txBody>
+      </p:sp>
+      <p:sp>
+        <p:nvSpPr>
+          <p:cNvPr id="11" name="TextBox 10"/>
+          <p:cNvSpPr txBox="1"/>
+          <p:nvPr/>
+        </p:nvSpPr>
+        <p:spPr>
+          <a:xfrm>
+            <a:off x="914400" y="3977639"/>
+            <a:ext cx="411480" cy="411480"/>
+          </a:xfrm>
+          <a:prstGeom prst="rect">
+            <a:avLst/>
+          </a:prstGeom>
+          <a:noFill/>
+        </p:spPr>
+        <p:txBody>
+          <a:bodyPr wrap="square" anchor="ctr" lIns="0" rIns="0" tIns="0" bIns="0">
+            <a:spAutoFit/>
+          </a:bodyPr>
+          <a:lstStyle/>
+          <a:p>
+            <a:pPr algn="ctr"/>
+            <a:r>
+              <a:rPr sz="1400" b="1" i="0">
+                <a:solidFill>
+                  <a:srgbClr val="FFFFFF"/>
+                </a:solidFill>
+                <a:latin typeface="Calibri"/>
+              </a:rPr>
+              <a:t>A</a:t>
+            </a:r>
+          </a:p>
+        </p:txBody>
+      </p:sp>
+      <p:sp>
+        <p:nvSpPr>
           <p:cNvPr id="12" name="TextBox 11"/>
           <p:cNvSpPr txBox="1"/>
           <p:nvPr/>
         </p:nvSpPr>
         <p:spPr>
           <a:xfrm>
-            <a:off x="1005840" y="3886200"/>
-            <a:ext cx="4572000" cy="365760"/>
-          </a:xfrm>
-          <a:prstGeom prst="rect">
-            <a:avLst/>
-          </a:prstGeom>
-          <a:noFill/>
-        </p:spPr>
-        <p:txBody>
-          <a:bodyPr wrap="square" anchor="t" lIns="0" rIns="0" tIns="0" bIns="0">
+            <a:off x="1508760" y="3749039"/>
+            <a:ext cx="3840480" cy="868680"/>
+          </a:xfrm>
+          <a:prstGeom prst="rect">
+            <a:avLst/>
+          </a:prstGeom>
+          <a:noFill/>
+        </p:spPr>
+        <p:txBody>
+          <a:bodyPr wrap="square" anchor="ctr" lIns="0" rIns="0" tIns="0" bIns="0">
             <a:spAutoFit/>
           </a:bodyPr>
           <a:lstStyle/>
           <a:p>
             <a:pPr algn="l"/>
             <a:r>
+              <a:rPr sz="1450" b="0" i="0">
+                <a:solidFill>
+                  <a:srgbClr val="1D2433"/>
+                </a:solidFill>
+                <a:latin typeface="Calibri"/>
+              </a:rPr>
+              <a:t>25 N</a:t>
+            </a:r>
+          </a:p>
+        </p:txBody>
+      </p:sp>
+      <p:sp>
+        <p:nvSpPr>
+          <p:cNvPr id="13" name="Rounded Rectangle 12"/>
+          <p:cNvSpPr/>
+          <p:nvPr/>
+        </p:nvSpPr>
+        <p:spPr>
+          <a:xfrm>
+            <a:off x="6172200" y="3749039"/>
+            <a:ext cx="5349240" cy="868680"/>
+          </a:xfrm>
+          <a:prstGeom prst="roundRect">
+            <a:avLst>
+              <a:gd name="adj" fmla="val 12000"/>
+            </a:avLst>
+          </a:prstGeom>
+          <a:solidFill>
+            <a:srgbClr val="E9F5F0"/>
+          </a:solidFill>
+          <a:ln w="31750">
+            <a:solidFill>
+              <a:srgbClr val="2A9D8F"/>
+            </a:solidFill>
+          </a:ln>
+          <a:effectLst/>
+        </p:spPr>
+        <p:style>
+          <a:lnRef idx="1">
+            <a:schemeClr val="accent1"/>
+          </a:lnRef>
+          <a:fillRef idx="3">
+            <a:schemeClr val="accent1"/>
+          </a:fillRef>
+          <a:effectRef idx="2">
+            <a:schemeClr val="accent1"/>
+          </a:effectRef>
+          <a:fontRef idx="minor">
+            <a:schemeClr val="lt1"/>
+          </a:fontRef>
+        </p:style>
+        <p:txBody>
+          <a:bodyPr rtlCol="0" anchor="ctr"/>
+          <a:lstStyle/>
+          <a:p>
+            <a:pPr algn="ctr"/>
+          </a:p>
+        </p:txBody>
+      </p:sp>
+      <p:sp>
+        <p:nvSpPr>
+          <p:cNvPr id="14" name="Oval 13"/>
+          <p:cNvSpPr/>
+          <p:nvPr/>
+        </p:nvSpPr>
+        <p:spPr>
+          <a:xfrm>
+            <a:off x="6446520" y="3977639"/>
+            <a:ext cx="411480" cy="411480"/>
+          </a:xfrm>
+          <a:prstGeom prst="ellipse">
+            <a:avLst/>
+          </a:prstGeom>
+          <a:solidFill>
+            <a:srgbClr val="2A9D8F"/>
+          </a:solidFill>
+          <a:ln>
+            <a:noFill/>
+          </a:ln>
+          <a:effectLst/>
+        </p:spPr>
+        <p:style>
+          <a:lnRef idx="1">
+            <a:schemeClr val="accent1"/>
+          </a:lnRef>
+          <a:fillRef idx="3">
+            <a:schemeClr val="accent1"/>
+          </a:fillRef>
+          <a:effectRef idx="2">
+            <a:schemeClr val="accent1"/>
+          </a:effectRef>
+          <a:fontRef idx="minor">
+            <a:schemeClr val="lt1"/>
+          </a:fontRef>
+        </p:style>
+        <p:txBody>
+          <a:bodyPr rtlCol="0" anchor="ctr"/>
+          <a:lstStyle/>
+          <a:p>
+            <a:pPr algn="ctr"/>
+          </a:p>
+        </p:txBody>
+      </p:sp>
+      <p:sp>
+        <p:nvSpPr>
+          <p:cNvPr id="15" name="TextBox 14"/>
+          <p:cNvSpPr txBox="1"/>
+          <p:nvPr/>
+        </p:nvSpPr>
+        <p:spPr>
+          <a:xfrm>
+            <a:off x="6446520" y="3977639"/>
+            <a:ext cx="411480" cy="411480"/>
+          </a:xfrm>
+          <a:prstGeom prst="rect">
+            <a:avLst/>
+          </a:prstGeom>
+          <a:noFill/>
+        </p:spPr>
+        <p:txBody>
+          <a:bodyPr wrap="square" anchor="ctr" lIns="0" rIns="0" tIns="0" bIns="0">
+            <a:spAutoFit/>
+          </a:bodyPr>
+          <a:lstStyle/>
+          <a:p>
+            <a:pPr algn="ctr"/>
+            <a:r>
               <a:rPr sz="1400" b="1" i="0">
                 <a:solidFill>
+                  <a:srgbClr val="FFFFFF"/>
+                </a:solidFill>
+                <a:latin typeface="Calibri"/>
+              </a:rPr>
+              <a:t>B</a:t>
+            </a:r>
+          </a:p>
+        </p:txBody>
+      </p:sp>
+      <p:sp>
+        <p:nvSpPr>
+          <p:cNvPr id="16" name="TextBox 15"/>
+          <p:cNvSpPr txBox="1"/>
+          <p:nvPr/>
+        </p:nvSpPr>
+        <p:spPr>
+          <a:xfrm>
+            <a:off x="7040880" y="3749039"/>
+            <a:ext cx="3840480" cy="868680"/>
+          </a:xfrm>
+          <a:prstGeom prst="rect">
+            <a:avLst/>
+          </a:prstGeom>
+          <a:noFill/>
+        </p:spPr>
+        <p:txBody>
+          <a:bodyPr wrap="square" anchor="ctr" lIns="0" rIns="0" tIns="0" bIns="0">
+            <a:spAutoFit/>
+          </a:bodyPr>
+          <a:lstStyle/>
+          <a:p>
+            <a:pPr algn="l"/>
+            <a:r>
+              <a:rPr sz="1450" b="1" i="0">
+                <a:solidFill>
+                  <a:srgbClr val="1D2433"/>
+                </a:solidFill>
+                <a:latin typeface="Calibri"/>
+              </a:rPr>
+              <a:t>50 N</a:t>
+            </a:r>
+          </a:p>
+        </p:txBody>
+      </p:sp>
+      <p:sp>
+        <p:nvSpPr>
+          <p:cNvPr id="17" name="Oval 16"/>
+          <p:cNvSpPr/>
+          <p:nvPr/>
+        </p:nvSpPr>
+        <p:spPr>
+          <a:xfrm>
+            <a:off x="10972800" y="3995927"/>
+            <a:ext cx="365760" cy="365760"/>
+          </a:xfrm>
+          <a:prstGeom prst="ellipse">
+            <a:avLst/>
+          </a:prstGeom>
+          <a:solidFill>
+            <a:srgbClr val="2A9D8F"/>
+          </a:solidFill>
+          <a:ln>
+            <a:noFill/>
+          </a:ln>
+          <a:effectLst/>
+        </p:spPr>
+        <p:style>
+          <a:lnRef idx="1">
+            <a:schemeClr val="accent1"/>
+          </a:lnRef>
+          <a:fillRef idx="3">
+            <a:schemeClr val="accent1"/>
+          </a:fillRef>
+          <a:effectRef idx="2">
+            <a:schemeClr val="accent1"/>
+          </a:effectRef>
+          <a:fontRef idx="minor">
+            <a:schemeClr val="lt1"/>
+          </a:fontRef>
+        </p:style>
+        <p:txBody>
+          <a:bodyPr rtlCol="0" anchor="ctr"/>
+          <a:lstStyle/>
+          <a:p>
+            <a:pPr algn="ctr"/>
+          </a:p>
+        </p:txBody>
+      </p:sp>
+      <p:sp>
+        <p:nvSpPr>
+          <p:cNvPr id="18" name="TextBox 17"/>
+          <p:cNvSpPr txBox="1"/>
+          <p:nvPr/>
+        </p:nvSpPr>
+        <p:spPr>
+          <a:xfrm>
+            <a:off x="10972800" y="3950207"/>
+            <a:ext cx="365760" cy="365760"/>
+          </a:xfrm>
+          <a:prstGeom prst="rect">
+            <a:avLst/>
+          </a:prstGeom>
+          <a:noFill/>
+        </p:spPr>
+        <p:txBody>
+          <a:bodyPr wrap="square" anchor="ctr" lIns="0" rIns="0" tIns="0" bIns="0">
+            <a:spAutoFit/>
+          </a:bodyPr>
+          <a:lstStyle/>
+          <a:p>
+            <a:pPr algn="ctr"/>
+            <a:r>
+              <a:rPr sz="1600" b="1" i="0">
+                <a:solidFill>
+                  <a:srgbClr val="FFFFFF"/>
+                </a:solidFill>
+                <a:latin typeface="Calibri"/>
+              </a:rPr>
+              <a:t>✓</a:t>
+            </a:r>
+          </a:p>
+        </p:txBody>
+      </p:sp>
+      <p:sp>
+        <p:nvSpPr>
+          <p:cNvPr id="19" name="Rounded Rectangle 18"/>
+          <p:cNvSpPr/>
+          <p:nvPr/>
+        </p:nvSpPr>
+        <p:spPr>
+          <a:xfrm>
+            <a:off x="640080" y="4782312"/>
+            <a:ext cx="5349240" cy="868680"/>
+          </a:xfrm>
+          <a:prstGeom prst="roundRect">
+            <a:avLst>
+              <a:gd name="adj" fmla="val 12000"/>
+            </a:avLst>
+          </a:prstGeom>
+          <a:solidFill>
+            <a:srgbClr val="EAF1F4"/>
+          </a:solidFill>
+          <a:ln>
+            <a:noFill/>
+          </a:ln>
+          <a:effectLst/>
+        </p:spPr>
+        <p:style>
+          <a:lnRef idx="1">
+            <a:schemeClr val="accent1"/>
+          </a:lnRef>
+          <a:fillRef idx="3">
+            <a:schemeClr val="accent1"/>
+          </a:fillRef>
+          <a:effectRef idx="2">
+            <a:schemeClr val="accent1"/>
+          </a:effectRef>
+          <a:fontRef idx="minor">
+            <a:schemeClr val="lt1"/>
+          </a:fontRef>
+        </p:style>
+        <p:txBody>
+          <a:bodyPr rtlCol="0" anchor="ctr"/>
+          <a:lstStyle/>
+          <a:p>
+            <a:pPr algn="ctr"/>
+          </a:p>
+        </p:txBody>
+      </p:sp>
+      <p:sp>
+        <p:nvSpPr>
+          <p:cNvPr id="20" name="Oval 19"/>
+          <p:cNvSpPr/>
+          <p:nvPr/>
+        </p:nvSpPr>
+        <p:spPr>
+          <a:xfrm>
+            <a:off x="914400" y="5010912"/>
+            <a:ext cx="411480" cy="411480"/>
+          </a:xfrm>
+          <a:prstGeom prst="ellipse">
+            <a:avLst/>
+          </a:prstGeom>
+          <a:solidFill>
+            <a:srgbClr val="0A9396"/>
+          </a:solidFill>
+          <a:ln>
+            <a:noFill/>
+          </a:ln>
+          <a:effectLst/>
+        </p:spPr>
+        <p:style>
+          <a:lnRef idx="1">
+            <a:schemeClr val="accent1"/>
+          </a:lnRef>
+          <a:fillRef idx="3">
+            <a:schemeClr val="accent1"/>
+          </a:fillRef>
+          <a:effectRef idx="2">
+            <a:schemeClr val="accent1"/>
+          </a:effectRef>
+          <a:fontRef idx="minor">
+            <a:schemeClr val="lt1"/>
+          </a:fontRef>
+        </p:style>
+        <p:txBody>
+          <a:bodyPr rtlCol="0" anchor="ctr"/>
+          <a:lstStyle/>
+          <a:p>
+            <a:pPr algn="ctr"/>
+          </a:p>
+        </p:txBody>
+      </p:sp>
+      <p:sp>
+        <p:nvSpPr>
+          <p:cNvPr id="21" name="TextBox 20"/>
+          <p:cNvSpPr txBox="1"/>
+          <p:nvPr/>
+        </p:nvSpPr>
+        <p:spPr>
+          <a:xfrm>
+            <a:off x="914400" y="5010912"/>
+            <a:ext cx="411480" cy="411480"/>
+          </a:xfrm>
+          <a:prstGeom prst="rect">
+            <a:avLst/>
+          </a:prstGeom>
+          <a:noFill/>
+        </p:spPr>
+        <p:txBody>
+          <a:bodyPr wrap="square" anchor="ctr" lIns="0" rIns="0" tIns="0" bIns="0">
+            <a:spAutoFit/>
+          </a:bodyPr>
+          <a:lstStyle/>
+          <a:p>
+            <a:pPr algn="ctr"/>
+            <a:r>
+              <a:rPr sz="1400" b="1" i="0">
+                <a:solidFill>
+                  <a:srgbClr val="FFFFFF"/>
+                </a:solidFill>
+                <a:latin typeface="Calibri"/>
+              </a:rPr>
+              <a:t>C</a:t>
+            </a:r>
+          </a:p>
+        </p:txBody>
+      </p:sp>
+      <p:sp>
+        <p:nvSpPr>
+          <p:cNvPr id="22" name="TextBox 21"/>
+          <p:cNvSpPr txBox="1"/>
+          <p:nvPr/>
+        </p:nvSpPr>
+        <p:spPr>
+          <a:xfrm>
+            <a:off x="1508760" y="4782312"/>
+            <a:ext cx="3840480" cy="868680"/>
+          </a:xfrm>
+          <a:prstGeom prst="rect">
+            <a:avLst/>
+          </a:prstGeom>
+          <a:noFill/>
+        </p:spPr>
+        <p:txBody>
+          <a:bodyPr wrap="square" anchor="ctr" lIns="0" rIns="0" tIns="0" bIns="0">
+            <a:spAutoFit/>
+          </a:bodyPr>
+          <a:lstStyle/>
+          <a:p>
+            <a:pPr algn="l"/>
+            <a:r>
+              <a:rPr sz="1450" b="0" i="0">
+                <a:solidFill>
+                  <a:srgbClr val="1D2433"/>
+                </a:solidFill>
+                <a:latin typeface="Calibri"/>
+              </a:rPr>
+              <a:t>200 N</a:t>
+            </a:r>
+          </a:p>
+        </p:txBody>
+      </p:sp>
+      <p:sp>
+        <p:nvSpPr>
+          <p:cNvPr id="23" name="Rounded Rectangle 22"/>
+          <p:cNvSpPr/>
+          <p:nvPr/>
+        </p:nvSpPr>
+        <p:spPr>
+          <a:xfrm>
+            <a:off x="6172200" y="4782312"/>
+            <a:ext cx="5349240" cy="868680"/>
+          </a:xfrm>
+          <a:prstGeom prst="roundRect">
+            <a:avLst>
+              <a:gd name="adj" fmla="val 12000"/>
+            </a:avLst>
+          </a:prstGeom>
+          <a:solidFill>
+            <a:srgbClr val="EAF1F4"/>
+          </a:solidFill>
+          <a:ln>
+            <a:noFill/>
+          </a:ln>
+          <a:effectLst/>
+        </p:spPr>
+        <p:style>
+          <a:lnRef idx="1">
+            <a:schemeClr val="accent1"/>
+          </a:lnRef>
+          <a:fillRef idx="3">
+            <a:schemeClr val="accent1"/>
+          </a:fillRef>
+          <a:effectRef idx="2">
+            <a:schemeClr val="accent1"/>
+          </a:effectRef>
+          <a:fontRef idx="minor">
+            <a:schemeClr val="lt1"/>
+          </a:fontRef>
+        </p:style>
+        <p:txBody>
+          <a:bodyPr rtlCol="0" anchor="ctr"/>
+          <a:lstStyle/>
+          <a:p>
+            <a:pPr algn="ctr"/>
+          </a:p>
+        </p:txBody>
+      </p:sp>
+      <p:sp>
+        <p:nvSpPr>
+          <p:cNvPr id="24" name="Oval 23"/>
+          <p:cNvSpPr/>
+          <p:nvPr/>
+        </p:nvSpPr>
+        <p:spPr>
+          <a:xfrm>
+            <a:off x="6446520" y="5010912"/>
+            <a:ext cx="411480" cy="411480"/>
+          </a:xfrm>
+          <a:prstGeom prst="ellipse">
+            <a:avLst/>
+          </a:prstGeom>
+          <a:solidFill>
+            <a:srgbClr val="0A9396"/>
+          </a:solidFill>
+          <a:ln>
+            <a:noFill/>
+          </a:ln>
+          <a:effectLst/>
+        </p:spPr>
+        <p:style>
+          <a:lnRef idx="1">
+            <a:schemeClr val="accent1"/>
+          </a:lnRef>
+          <a:fillRef idx="3">
+            <a:schemeClr val="accent1"/>
+          </a:fillRef>
+          <a:effectRef idx="2">
+            <a:schemeClr val="accent1"/>
+          </a:effectRef>
+          <a:fontRef idx="minor">
+            <a:schemeClr val="lt1"/>
+          </a:fontRef>
+        </p:style>
+        <p:txBody>
+          <a:bodyPr rtlCol="0" anchor="ctr"/>
+          <a:lstStyle/>
+          <a:p>
+            <a:pPr algn="ctr"/>
+          </a:p>
+        </p:txBody>
+      </p:sp>
+      <p:sp>
+        <p:nvSpPr>
+          <p:cNvPr id="25" name="TextBox 24"/>
+          <p:cNvSpPr txBox="1"/>
+          <p:nvPr/>
+        </p:nvSpPr>
+        <p:spPr>
+          <a:xfrm>
+            <a:off x="6446520" y="5010912"/>
+            <a:ext cx="411480" cy="411480"/>
+          </a:xfrm>
+          <a:prstGeom prst="rect">
+            <a:avLst/>
+          </a:prstGeom>
+          <a:noFill/>
+        </p:spPr>
+        <p:txBody>
+          <a:bodyPr wrap="square" anchor="ctr" lIns="0" rIns="0" tIns="0" bIns="0">
+            <a:spAutoFit/>
+          </a:bodyPr>
+          <a:lstStyle/>
+          <a:p>
+            <a:pPr algn="ctr"/>
+            <a:r>
+              <a:rPr sz="1400" b="1" i="0">
+                <a:solidFill>
+                  <a:srgbClr val="FFFFFF"/>
+                </a:solidFill>
+                <a:latin typeface="Calibri"/>
+              </a:rPr>
+              <a:t>D</a:t>
+            </a:r>
+          </a:p>
+        </p:txBody>
+      </p:sp>
+      <p:sp>
+        <p:nvSpPr>
+          <p:cNvPr id="26" name="TextBox 25"/>
+          <p:cNvSpPr txBox="1"/>
+          <p:nvPr/>
+        </p:nvSpPr>
+        <p:spPr>
+          <a:xfrm>
+            <a:off x="7040880" y="4782312"/>
+            <a:ext cx="3840480" cy="868680"/>
+          </a:xfrm>
+          <a:prstGeom prst="rect">
+            <a:avLst/>
+          </a:prstGeom>
+          <a:noFill/>
+        </p:spPr>
+        <p:txBody>
+          <a:bodyPr wrap="square" anchor="ctr" lIns="0" rIns="0" tIns="0" bIns="0">
+            <a:spAutoFit/>
+          </a:bodyPr>
+          <a:lstStyle/>
+          <a:p>
+            <a:pPr algn="l"/>
+            <a:r>
+              <a:rPr sz="1450" b="0" i="0">
+                <a:solidFill>
+                  <a:srgbClr val="1D2433"/>
+                </a:solidFill>
+                <a:latin typeface="Calibri"/>
+              </a:rPr>
+              <a:t>400 N</a:t>
+            </a:r>
+          </a:p>
+        </p:txBody>
+      </p:sp>
+      <p:sp>
+        <p:nvSpPr>
+          <p:cNvPr id="27" name="Rounded Rectangle 26"/>
+          <p:cNvSpPr/>
+          <p:nvPr/>
+        </p:nvSpPr>
+        <p:spPr>
+          <a:xfrm>
+            <a:off x="640080" y="5779008"/>
+            <a:ext cx="10881360" cy="566928"/>
+          </a:xfrm>
+          <a:prstGeom prst="roundRect">
+            <a:avLst>
+              <a:gd name="adj" fmla="val 10000"/>
+            </a:avLst>
+          </a:prstGeom>
+          <a:solidFill>
+            <a:srgbClr val="EEF2F7"/>
+          </a:solidFill>
+          <a:ln>
+            <a:noFill/>
+          </a:ln>
+          <a:effectLst/>
+        </p:spPr>
+        <p:style>
+          <a:lnRef idx="1">
+            <a:schemeClr val="accent1"/>
+          </a:lnRef>
+          <a:fillRef idx="3">
+            <a:schemeClr val="accent1"/>
+          </a:fillRef>
+          <a:effectRef idx="2">
+            <a:schemeClr val="accent1"/>
+          </a:effectRef>
+          <a:fontRef idx="minor">
+            <a:schemeClr val="lt1"/>
+          </a:fontRef>
+        </p:style>
+        <p:txBody>
+          <a:bodyPr rtlCol="0" anchor="ctr"/>
+          <a:lstStyle/>
+          <a:p>
+            <a:pPr algn="ctr"/>
+          </a:p>
+        </p:txBody>
+      </p:sp>
+      <p:sp>
+        <p:nvSpPr>
+          <p:cNvPr id="28" name="TextBox 27"/>
+          <p:cNvSpPr txBox="1"/>
+          <p:nvPr/>
+        </p:nvSpPr>
+        <p:spPr>
+          <a:xfrm>
+            <a:off x="914400" y="5779008"/>
+            <a:ext cx="10332720" cy="566928"/>
+          </a:xfrm>
+          <a:prstGeom prst="rect">
+            <a:avLst/>
+          </a:prstGeom>
+          <a:noFill/>
+        </p:spPr>
+        <p:txBody>
+          <a:bodyPr wrap="square" anchor="ctr" lIns="0" rIns="0" tIns="0" bIns="0">
+            <a:spAutoFit/>
+          </a:bodyPr>
+          <a:lstStyle/>
+          <a:p>
+            <a:pPr algn="l"/>
+            <a:r>
+              <a:rPr sz="1250" b="1" i="0">
+                <a:solidFill>
                   <a:srgbClr val="2A9D8F"/>
                 </a:solidFill>
                 <a:latin typeface="Arial"/>
               </a:rPr>
-              <a:t>WHY</a:t>
-            </a:r>
-          </a:p>
-        </p:txBody>
-      </p:sp>
-      <p:sp>
-        <p:nvSpPr>
-          <p:cNvPr id="13" name="TextBox 12"/>
-          <p:cNvSpPr txBox="1"/>
-          <p:nvPr/>
-        </p:nvSpPr>
-        <p:spPr>
-          <a:xfrm>
-            <a:off x="1005840" y="4297680"/>
-            <a:ext cx="10149840" cy="1280160"/>
-          </a:xfrm>
-          <a:prstGeom prst="rect">
-            <a:avLst/>
-          </a:prstGeom>
-          <a:noFill/>
-        </p:spPr>
-        <p:txBody>
-          <a:bodyPr wrap="square" anchor="t" lIns="0" rIns="0" tIns="0" bIns="0">
-            <a:spAutoFit/>
-          </a:bodyPr>
-          <a:lstStyle/>
-          <a:p>
-            <a:pPr algn="l">
-              <a:lnSpc>
-                <a:spcPct val="110000"/>
-              </a:lnSpc>
-            </a:pPr>
-            <a:r>
-              <a:rPr sz="1600" b="0" i="0">
+              <a:t>Why  </a:t>
+            </a:r>
+            <a:r>
+              <a:rPr sz="1200" b="0" i="0">
                 <a:solidFill>
                   <a:srgbClr val="1D2433"/>
                 </a:solidFill>
@@ -23160,7 +27636,7 @@
                 </a:solidFill>
                 <a:latin typeface="Calibri"/>
               </a:rPr>
-              <a:t>Q4 — Class 3</a:t>
+              <a:t>Q4 - Class 3</a:t>
             </a:r>
           </a:p>
         </p:txBody>
@@ -23456,7 +27932,7 @@
         <p:spPr>
           <a:xfrm>
             <a:off x="1508760" y="3749039"/>
-            <a:ext cx="4297680" cy="868680"/>
+            <a:ext cx="3840480" cy="868680"/>
           </a:xfrm>
           <a:prstGeom prst="rect">
             <a:avLst/>
@@ -23616,7 +28092,7 @@
         <p:spPr>
           <a:xfrm>
             <a:off x="7040880" y="3749039"/>
-            <a:ext cx="4297680" cy="868680"/>
+            <a:ext cx="3840480" cy="868680"/>
           </a:xfrm>
           <a:prstGeom prst="rect">
             <a:avLst/>
@@ -23776,7 +28252,7 @@
         <p:spPr>
           <a:xfrm>
             <a:off x="1508760" y="4782312"/>
-            <a:ext cx="4297680" cy="868680"/>
+            <a:ext cx="3840480" cy="868680"/>
           </a:xfrm>
           <a:prstGeom prst="rect">
             <a:avLst/>
@@ -23936,7 +28412,7 @@
         <p:spPr>
           <a:xfrm>
             <a:off x="7040880" y="4782312"/>
-            <a:ext cx="4297680" cy="868680"/>
+            <a:ext cx="3840480" cy="868680"/>
           </a:xfrm>
           <a:prstGeom prst="rect">
             <a:avLst/>
@@ -24003,7 +28479,7 @@
             <a:avLst/>
           </a:prstGeom>
           <a:solidFill>
-            <a:srgbClr val="2A9D8F"/>
+            <a:srgbClr val="0A9396"/>
           </a:solidFill>
           <a:ln>
             <a:noFill/>
@@ -24058,11 +28534,11 @@
             <a:r>
               <a:rPr sz="1300" b="1" i="0">
                 <a:solidFill>
-                  <a:srgbClr val="2A9D8F"/>
+                  <a:srgbClr val="0A9396"/>
                 </a:solidFill>
                 <a:latin typeface="Arial"/>
               </a:rPr>
-              <a:t>ANSWER REVEAL</a:t>
+              <a:t>QUIZ QUESTION</a:t>
             </a:r>
           </a:p>
         </p:txBody>
@@ -24097,7 +28573,7 @@
                 </a:solidFill>
                 <a:latin typeface="Calibri"/>
               </a:rPr>
-              <a:t>Q4 — Answer</a:t>
+              <a:t>Q4 - Class 3</a:t>
             </a:r>
           </a:p>
         </p:txBody>
@@ -24186,166 +28662,6 @@
           <a:prstGeom prst="roundRect">
             <a:avLst>
               <a:gd name="adj" fmla="val 4000"/>
-            </a:avLst>
-          </a:prstGeom>
-          <a:solidFill>
-            <a:srgbClr val="E9F5F0"/>
-          </a:solidFill>
-          <a:ln>
-            <a:noFill/>
-          </a:ln>
-          <a:effectLst/>
-        </p:spPr>
-        <p:style>
-          <a:lnRef idx="1">
-            <a:schemeClr val="accent1"/>
-          </a:lnRef>
-          <a:fillRef idx="3">
-            <a:schemeClr val="accent1"/>
-          </a:fillRef>
-          <a:effectRef idx="2">
-            <a:schemeClr val="accent1"/>
-          </a:effectRef>
-          <a:fontRef idx="minor">
-            <a:schemeClr val="lt1"/>
-          </a:fontRef>
-        </p:style>
-        <p:txBody>
-          <a:bodyPr rtlCol="0" anchor="ctr"/>
-          <a:lstStyle/>
-          <a:p>
-            <a:pPr algn="ctr"/>
-          </a:p>
-        </p:txBody>
-      </p:sp>
-      <p:sp>
-        <p:nvSpPr>
-          <p:cNvPr id="8" name="Oval 7"/>
-          <p:cNvSpPr/>
-          <p:nvPr/>
-        </p:nvSpPr>
-        <p:spPr>
-          <a:xfrm>
-            <a:off x="1005840" y="2240280"/>
-            <a:ext cx="731520" cy="731520"/>
-          </a:xfrm>
-          <a:prstGeom prst="ellipse">
-            <a:avLst/>
-          </a:prstGeom>
-          <a:solidFill>
-            <a:srgbClr val="2A9D8F"/>
-          </a:solidFill>
-          <a:ln>
-            <a:noFill/>
-          </a:ln>
-          <a:effectLst/>
-        </p:spPr>
-        <p:style>
-          <a:lnRef idx="1">
-            <a:schemeClr val="accent1"/>
-          </a:lnRef>
-          <a:fillRef idx="3">
-            <a:schemeClr val="accent1"/>
-          </a:fillRef>
-          <a:effectRef idx="2">
-            <a:schemeClr val="accent1"/>
-          </a:effectRef>
-          <a:fontRef idx="minor">
-            <a:schemeClr val="lt1"/>
-          </a:fontRef>
-        </p:style>
-        <p:txBody>
-          <a:bodyPr rtlCol="0" anchor="ctr"/>
-          <a:lstStyle/>
-          <a:p>
-            <a:pPr algn="ctr"/>
-          </a:p>
-        </p:txBody>
-      </p:sp>
-      <p:sp>
-        <p:nvSpPr>
-          <p:cNvPr id="9" name="TextBox 8"/>
-          <p:cNvSpPr txBox="1"/>
-          <p:nvPr/>
-        </p:nvSpPr>
-        <p:spPr>
-          <a:xfrm>
-            <a:off x="1005840" y="2240280"/>
-            <a:ext cx="731520" cy="731520"/>
-          </a:xfrm>
-          <a:prstGeom prst="rect">
-            <a:avLst/>
-          </a:prstGeom>
-          <a:noFill/>
-        </p:spPr>
-        <p:txBody>
-          <a:bodyPr wrap="square" anchor="ctr" lIns="0" rIns="0" tIns="0" bIns="0">
-            <a:spAutoFit/>
-          </a:bodyPr>
-          <a:lstStyle/>
-          <a:p>
-            <a:pPr algn="ctr"/>
-            <a:r>
-              <a:rPr sz="3000" b="1" i="0">
-                <a:solidFill>
-                  <a:srgbClr val="FFFFFF"/>
-                </a:solidFill>
-                <a:latin typeface="Calibri"/>
-              </a:rPr>
-              <a:t>✓</a:t>
-            </a:r>
-          </a:p>
-        </p:txBody>
-      </p:sp>
-      <p:sp>
-        <p:nvSpPr>
-          <p:cNvPr id="10" name="TextBox 9"/>
-          <p:cNvSpPr txBox="1"/>
-          <p:nvPr/>
-        </p:nvSpPr>
-        <p:spPr>
-          <a:xfrm>
-            <a:off x="1920240" y="1828800"/>
-            <a:ext cx="9326880" cy="1554480"/>
-          </a:xfrm>
-          <a:prstGeom prst="rect">
-            <a:avLst/>
-          </a:prstGeom>
-          <a:noFill/>
-        </p:spPr>
-        <p:txBody>
-          <a:bodyPr wrap="square" anchor="ctr" lIns="0" rIns="0" tIns="0" bIns="0">
-            <a:spAutoFit/>
-          </a:bodyPr>
-          <a:lstStyle/>
-          <a:p>
-            <a:pPr algn="l"/>
-            <a:r>
-              <a:rPr sz="2200" b="1" i="0">
-                <a:solidFill>
-                  <a:srgbClr val="1D2433"/>
-                </a:solidFill>
-                <a:latin typeface="Calibri"/>
-              </a:rPr>
-              <a:t>B. The effort-arm is shorter than the load-arm</a:t>
-            </a:r>
-          </a:p>
-        </p:txBody>
-      </p:sp>
-      <p:sp>
-        <p:nvSpPr>
-          <p:cNvPr id="11" name="Rounded Rectangle 10"/>
-          <p:cNvSpPr/>
-          <p:nvPr/>
-        </p:nvSpPr>
-        <p:spPr>
-          <a:xfrm>
-            <a:off x="640080" y="3657600"/>
-            <a:ext cx="10881360" cy="2011680"/>
-          </a:xfrm>
-          <a:prstGeom prst="roundRect">
-            <a:avLst>
-              <a:gd name="adj" fmla="val 3000"/>
             </a:avLst>
           </a:prstGeom>
           <a:solidFill>
@@ -24386,68 +28702,840 @@
       </p:sp>
       <p:sp>
         <p:nvSpPr>
+          <p:cNvPr id="8" name="TextBox 7"/>
+          <p:cNvSpPr txBox="1"/>
+          <p:nvPr/>
+        </p:nvSpPr>
+        <p:spPr>
+          <a:xfrm>
+            <a:off x="1005840" y="1828800"/>
+            <a:ext cx="10149840" cy="1554480"/>
+          </a:xfrm>
+          <a:prstGeom prst="rect">
+            <a:avLst/>
+          </a:prstGeom>
+          <a:noFill/>
+        </p:spPr>
+        <p:txBody>
+          <a:bodyPr wrap="square" anchor="ctr" lIns="0" rIns="0" tIns="0" bIns="0">
+            <a:spAutoFit/>
+          </a:bodyPr>
+          <a:lstStyle/>
+          <a:p>
+            <a:pPr algn="l"/>
+            <a:r>
+              <a:rPr sz="1900" b="1" i="0">
+                <a:solidFill>
+                  <a:srgbClr val="1D2433"/>
+                </a:solidFill>
+                <a:latin typeface="Calibri"/>
+              </a:rPr>
+              <a:t>Why do third-order levers have a mechanical advantage less than 1?</a:t>
+            </a:r>
+          </a:p>
+        </p:txBody>
+      </p:sp>
+      <p:sp>
+        <p:nvSpPr>
+          <p:cNvPr id="9" name="Rounded Rectangle 8"/>
+          <p:cNvSpPr/>
+          <p:nvPr/>
+        </p:nvSpPr>
+        <p:spPr>
+          <a:xfrm>
+            <a:off x="640080" y="3749039"/>
+            <a:ext cx="5349240" cy="868680"/>
+          </a:xfrm>
+          <a:prstGeom prst="roundRect">
+            <a:avLst>
+              <a:gd name="adj" fmla="val 12000"/>
+            </a:avLst>
+          </a:prstGeom>
+          <a:solidFill>
+            <a:srgbClr val="EAF1F4"/>
+          </a:solidFill>
+          <a:ln>
+            <a:noFill/>
+          </a:ln>
+          <a:effectLst/>
+        </p:spPr>
+        <p:style>
+          <a:lnRef idx="1">
+            <a:schemeClr val="accent1"/>
+          </a:lnRef>
+          <a:fillRef idx="3">
+            <a:schemeClr val="accent1"/>
+          </a:fillRef>
+          <a:effectRef idx="2">
+            <a:schemeClr val="accent1"/>
+          </a:effectRef>
+          <a:fontRef idx="minor">
+            <a:schemeClr val="lt1"/>
+          </a:fontRef>
+        </p:style>
+        <p:txBody>
+          <a:bodyPr rtlCol="0" anchor="ctr"/>
+          <a:lstStyle/>
+          <a:p>
+            <a:pPr algn="ctr"/>
+          </a:p>
+        </p:txBody>
+      </p:sp>
+      <p:sp>
+        <p:nvSpPr>
+          <p:cNvPr id="10" name="Oval 9"/>
+          <p:cNvSpPr/>
+          <p:nvPr/>
+        </p:nvSpPr>
+        <p:spPr>
+          <a:xfrm>
+            <a:off x="914400" y="3977639"/>
+            <a:ext cx="411480" cy="411480"/>
+          </a:xfrm>
+          <a:prstGeom prst="ellipse">
+            <a:avLst/>
+          </a:prstGeom>
+          <a:solidFill>
+            <a:srgbClr val="0A9396"/>
+          </a:solidFill>
+          <a:ln>
+            <a:noFill/>
+          </a:ln>
+          <a:effectLst/>
+        </p:spPr>
+        <p:style>
+          <a:lnRef idx="1">
+            <a:schemeClr val="accent1"/>
+          </a:lnRef>
+          <a:fillRef idx="3">
+            <a:schemeClr val="accent1"/>
+          </a:fillRef>
+          <a:effectRef idx="2">
+            <a:schemeClr val="accent1"/>
+          </a:effectRef>
+          <a:fontRef idx="minor">
+            <a:schemeClr val="lt1"/>
+          </a:fontRef>
+        </p:style>
+        <p:txBody>
+          <a:bodyPr rtlCol="0" anchor="ctr"/>
+          <a:lstStyle/>
+          <a:p>
+            <a:pPr algn="ctr"/>
+          </a:p>
+        </p:txBody>
+      </p:sp>
+      <p:sp>
+        <p:nvSpPr>
+          <p:cNvPr id="11" name="TextBox 10"/>
+          <p:cNvSpPr txBox="1"/>
+          <p:nvPr/>
+        </p:nvSpPr>
+        <p:spPr>
+          <a:xfrm>
+            <a:off x="914400" y="3977639"/>
+            <a:ext cx="411480" cy="411480"/>
+          </a:xfrm>
+          <a:prstGeom prst="rect">
+            <a:avLst/>
+          </a:prstGeom>
+          <a:noFill/>
+        </p:spPr>
+        <p:txBody>
+          <a:bodyPr wrap="square" anchor="ctr" lIns="0" rIns="0" tIns="0" bIns="0">
+            <a:spAutoFit/>
+          </a:bodyPr>
+          <a:lstStyle/>
+          <a:p>
+            <a:pPr algn="ctr"/>
+            <a:r>
+              <a:rPr sz="1400" b="1" i="0">
+                <a:solidFill>
+                  <a:srgbClr val="FFFFFF"/>
+                </a:solidFill>
+                <a:latin typeface="Calibri"/>
+              </a:rPr>
+              <a:t>A</a:t>
+            </a:r>
+          </a:p>
+        </p:txBody>
+      </p:sp>
+      <p:sp>
+        <p:nvSpPr>
           <p:cNvPr id="12" name="TextBox 11"/>
           <p:cNvSpPr txBox="1"/>
           <p:nvPr/>
         </p:nvSpPr>
         <p:spPr>
           <a:xfrm>
-            <a:off x="1005840" y="3886200"/>
-            <a:ext cx="4572000" cy="365760"/>
-          </a:xfrm>
-          <a:prstGeom prst="rect">
-            <a:avLst/>
-          </a:prstGeom>
-          <a:noFill/>
-        </p:spPr>
-        <p:txBody>
-          <a:bodyPr wrap="square" anchor="t" lIns="0" rIns="0" tIns="0" bIns="0">
+            <a:off x="1508760" y="3749039"/>
+            <a:ext cx="3840480" cy="868680"/>
+          </a:xfrm>
+          <a:prstGeom prst="rect">
+            <a:avLst/>
+          </a:prstGeom>
+          <a:noFill/>
+        </p:spPr>
+        <p:txBody>
+          <a:bodyPr wrap="square" anchor="ctr" lIns="0" rIns="0" tIns="0" bIns="0">
             <a:spAutoFit/>
           </a:bodyPr>
           <a:lstStyle/>
           <a:p>
             <a:pPr algn="l"/>
             <a:r>
+              <a:rPr sz="1450" b="0" i="0">
+                <a:solidFill>
+                  <a:srgbClr val="1D2433"/>
+                </a:solidFill>
+                <a:latin typeface="Calibri"/>
+              </a:rPr>
+              <a:t>The fulcrum is in the middle</a:t>
+            </a:r>
+          </a:p>
+        </p:txBody>
+      </p:sp>
+      <p:sp>
+        <p:nvSpPr>
+          <p:cNvPr id="13" name="Rounded Rectangle 12"/>
+          <p:cNvSpPr/>
+          <p:nvPr/>
+        </p:nvSpPr>
+        <p:spPr>
+          <a:xfrm>
+            <a:off x="6172200" y="3749039"/>
+            <a:ext cx="5349240" cy="868680"/>
+          </a:xfrm>
+          <a:prstGeom prst="roundRect">
+            <a:avLst>
+              <a:gd name="adj" fmla="val 12000"/>
+            </a:avLst>
+          </a:prstGeom>
+          <a:solidFill>
+            <a:srgbClr val="E9F5F0"/>
+          </a:solidFill>
+          <a:ln w="31750">
+            <a:solidFill>
+              <a:srgbClr val="2A9D8F"/>
+            </a:solidFill>
+          </a:ln>
+          <a:effectLst/>
+        </p:spPr>
+        <p:style>
+          <a:lnRef idx="1">
+            <a:schemeClr val="accent1"/>
+          </a:lnRef>
+          <a:fillRef idx="3">
+            <a:schemeClr val="accent1"/>
+          </a:fillRef>
+          <a:effectRef idx="2">
+            <a:schemeClr val="accent1"/>
+          </a:effectRef>
+          <a:fontRef idx="minor">
+            <a:schemeClr val="lt1"/>
+          </a:fontRef>
+        </p:style>
+        <p:txBody>
+          <a:bodyPr rtlCol="0" anchor="ctr"/>
+          <a:lstStyle/>
+          <a:p>
+            <a:pPr algn="ctr"/>
+          </a:p>
+        </p:txBody>
+      </p:sp>
+      <p:sp>
+        <p:nvSpPr>
+          <p:cNvPr id="14" name="Oval 13"/>
+          <p:cNvSpPr/>
+          <p:nvPr/>
+        </p:nvSpPr>
+        <p:spPr>
+          <a:xfrm>
+            <a:off x="6446520" y="3977639"/>
+            <a:ext cx="411480" cy="411480"/>
+          </a:xfrm>
+          <a:prstGeom prst="ellipse">
+            <a:avLst/>
+          </a:prstGeom>
+          <a:solidFill>
+            <a:srgbClr val="2A9D8F"/>
+          </a:solidFill>
+          <a:ln>
+            <a:noFill/>
+          </a:ln>
+          <a:effectLst/>
+        </p:spPr>
+        <p:style>
+          <a:lnRef idx="1">
+            <a:schemeClr val="accent1"/>
+          </a:lnRef>
+          <a:fillRef idx="3">
+            <a:schemeClr val="accent1"/>
+          </a:fillRef>
+          <a:effectRef idx="2">
+            <a:schemeClr val="accent1"/>
+          </a:effectRef>
+          <a:fontRef idx="minor">
+            <a:schemeClr val="lt1"/>
+          </a:fontRef>
+        </p:style>
+        <p:txBody>
+          <a:bodyPr rtlCol="0" anchor="ctr"/>
+          <a:lstStyle/>
+          <a:p>
+            <a:pPr algn="ctr"/>
+          </a:p>
+        </p:txBody>
+      </p:sp>
+      <p:sp>
+        <p:nvSpPr>
+          <p:cNvPr id="15" name="TextBox 14"/>
+          <p:cNvSpPr txBox="1"/>
+          <p:nvPr/>
+        </p:nvSpPr>
+        <p:spPr>
+          <a:xfrm>
+            <a:off x="6446520" y="3977639"/>
+            <a:ext cx="411480" cy="411480"/>
+          </a:xfrm>
+          <a:prstGeom prst="rect">
+            <a:avLst/>
+          </a:prstGeom>
+          <a:noFill/>
+        </p:spPr>
+        <p:txBody>
+          <a:bodyPr wrap="square" anchor="ctr" lIns="0" rIns="0" tIns="0" bIns="0">
+            <a:spAutoFit/>
+          </a:bodyPr>
+          <a:lstStyle/>
+          <a:p>
+            <a:pPr algn="ctr"/>
+            <a:r>
               <a:rPr sz="1400" b="1" i="0">
                 <a:solidFill>
+                  <a:srgbClr val="FFFFFF"/>
+                </a:solidFill>
+                <a:latin typeface="Calibri"/>
+              </a:rPr>
+              <a:t>B</a:t>
+            </a:r>
+          </a:p>
+        </p:txBody>
+      </p:sp>
+      <p:sp>
+        <p:nvSpPr>
+          <p:cNvPr id="16" name="TextBox 15"/>
+          <p:cNvSpPr txBox="1"/>
+          <p:nvPr/>
+        </p:nvSpPr>
+        <p:spPr>
+          <a:xfrm>
+            <a:off x="7040880" y="3749039"/>
+            <a:ext cx="3840480" cy="868680"/>
+          </a:xfrm>
+          <a:prstGeom prst="rect">
+            <a:avLst/>
+          </a:prstGeom>
+          <a:noFill/>
+        </p:spPr>
+        <p:txBody>
+          <a:bodyPr wrap="square" anchor="ctr" lIns="0" rIns="0" tIns="0" bIns="0">
+            <a:spAutoFit/>
+          </a:bodyPr>
+          <a:lstStyle/>
+          <a:p>
+            <a:pPr algn="l"/>
+            <a:r>
+              <a:rPr sz="1450" b="1" i="0">
+                <a:solidFill>
+                  <a:srgbClr val="1D2433"/>
+                </a:solidFill>
+                <a:latin typeface="Calibri"/>
+              </a:rPr>
+              <a:t>The effort-arm is shorter than the load-arm</a:t>
+            </a:r>
+          </a:p>
+        </p:txBody>
+      </p:sp>
+      <p:sp>
+        <p:nvSpPr>
+          <p:cNvPr id="17" name="Oval 16"/>
+          <p:cNvSpPr/>
+          <p:nvPr/>
+        </p:nvSpPr>
+        <p:spPr>
+          <a:xfrm>
+            <a:off x="10972800" y="3995927"/>
+            <a:ext cx="365760" cy="365760"/>
+          </a:xfrm>
+          <a:prstGeom prst="ellipse">
+            <a:avLst/>
+          </a:prstGeom>
+          <a:solidFill>
+            <a:srgbClr val="2A9D8F"/>
+          </a:solidFill>
+          <a:ln>
+            <a:noFill/>
+          </a:ln>
+          <a:effectLst/>
+        </p:spPr>
+        <p:style>
+          <a:lnRef idx="1">
+            <a:schemeClr val="accent1"/>
+          </a:lnRef>
+          <a:fillRef idx="3">
+            <a:schemeClr val="accent1"/>
+          </a:fillRef>
+          <a:effectRef idx="2">
+            <a:schemeClr val="accent1"/>
+          </a:effectRef>
+          <a:fontRef idx="minor">
+            <a:schemeClr val="lt1"/>
+          </a:fontRef>
+        </p:style>
+        <p:txBody>
+          <a:bodyPr rtlCol="0" anchor="ctr"/>
+          <a:lstStyle/>
+          <a:p>
+            <a:pPr algn="ctr"/>
+          </a:p>
+        </p:txBody>
+      </p:sp>
+      <p:sp>
+        <p:nvSpPr>
+          <p:cNvPr id="18" name="TextBox 17"/>
+          <p:cNvSpPr txBox="1"/>
+          <p:nvPr/>
+        </p:nvSpPr>
+        <p:spPr>
+          <a:xfrm>
+            <a:off x="10972800" y="3950207"/>
+            <a:ext cx="365760" cy="365760"/>
+          </a:xfrm>
+          <a:prstGeom prst="rect">
+            <a:avLst/>
+          </a:prstGeom>
+          <a:noFill/>
+        </p:spPr>
+        <p:txBody>
+          <a:bodyPr wrap="square" anchor="ctr" lIns="0" rIns="0" tIns="0" bIns="0">
+            <a:spAutoFit/>
+          </a:bodyPr>
+          <a:lstStyle/>
+          <a:p>
+            <a:pPr algn="ctr"/>
+            <a:r>
+              <a:rPr sz="1600" b="1" i="0">
+                <a:solidFill>
+                  <a:srgbClr val="FFFFFF"/>
+                </a:solidFill>
+                <a:latin typeface="Calibri"/>
+              </a:rPr>
+              <a:t>✓</a:t>
+            </a:r>
+          </a:p>
+        </p:txBody>
+      </p:sp>
+      <p:sp>
+        <p:nvSpPr>
+          <p:cNvPr id="19" name="Rounded Rectangle 18"/>
+          <p:cNvSpPr/>
+          <p:nvPr/>
+        </p:nvSpPr>
+        <p:spPr>
+          <a:xfrm>
+            <a:off x="640080" y="4782312"/>
+            <a:ext cx="5349240" cy="868680"/>
+          </a:xfrm>
+          <a:prstGeom prst="roundRect">
+            <a:avLst>
+              <a:gd name="adj" fmla="val 12000"/>
+            </a:avLst>
+          </a:prstGeom>
+          <a:solidFill>
+            <a:srgbClr val="EAF1F4"/>
+          </a:solidFill>
+          <a:ln>
+            <a:noFill/>
+          </a:ln>
+          <a:effectLst/>
+        </p:spPr>
+        <p:style>
+          <a:lnRef idx="1">
+            <a:schemeClr val="accent1"/>
+          </a:lnRef>
+          <a:fillRef idx="3">
+            <a:schemeClr val="accent1"/>
+          </a:fillRef>
+          <a:effectRef idx="2">
+            <a:schemeClr val="accent1"/>
+          </a:effectRef>
+          <a:fontRef idx="minor">
+            <a:schemeClr val="lt1"/>
+          </a:fontRef>
+        </p:style>
+        <p:txBody>
+          <a:bodyPr rtlCol="0" anchor="ctr"/>
+          <a:lstStyle/>
+          <a:p>
+            <a:pPr algn="ctr"/>
+          </a:p>
+        </p:txBody>
+      </p:sp>
+      <p:sp>
+        <p:nvSpPr>
+          <p:cNvPr id="20" name="Oval 19"/>
+          <p:cNvSpPr/>
+          <p:nvPr/>
+        </p:nvSpPr>
+        <p:spPr>
+          <a:xfrm>
+            <a:off x="914400" y="5010912"/>
+            <a:ext cx="411480" cy="411480"/>
+          </a:xfrm>
+          <a:prstGeom prst="ellipse">
+            <a:avLst/>
+          </a:prstGeom>
+          <a:solidFill>
+            <a:srgbClr val="0A9396"/>
+          </a:solidFill>
+          <a:ln>
+            <a:noFill/>
+          </a:ln>
+          <a:effectLst/>
+        </p:spPr>
+        <p:style>
+          <a:lnRef idx="1">
+            <a:schemeClr val="accent1"/>
+          </a:lnRef>
+          <a:fillRef idx="3">
+            <a:schemeClr val="accent1"/>
+          </a:fillRef>
+          <a:effectRef idx="2">
+            <a:schemeClr val="accent1"/>
+          </a:effectRef>
+          <a:fontRef idx="minor">
+            <a:schemeClr val="lt1"/>
+          </a:fontRef>
+        </p:style>
+        <p:txBody>
+          <a:bodyPr rtlCol="0" anchor="ctr"/>
+          <a:lstStyle/>
+          <a:p>
+            <a:pPr algn="ctr"/>
+          </a:p>
+        </p:txBody>
+      </p:sp>
+      <p:sp>
+        <p:nvSpPr>
+          <p:cNvPr id="21" name="TextBox 20"/>
+          <p:cNvSpPr txBox="1"/>
+          <p:nvPr/>
+        </p:nvSpPr>
+        <p:spPr>
+          <a:xfrm>
+            <a:off x="914400" y="5010912"/>
+            <a:ext cx="411480" cy="411480"/>
+          </a:xfrm>
+          <a:prstGeom prst="rect">
+            <a:avLst/>
+          </a:prstGeom>
+          <a:noFill/>
+        </p:spPr>
+        <p:txBody>
+          <a:bodyPr wrap="square" anchor="ctr" lIns="0" rIns="0" tIns="0" bIns="0">
+            <a:spAutoFit/>
+          </a:bodyPr>
+          <a:lstStyle/>
+          <a:p>
+            <a:pPr algn="ctr"/>
+            <a:r>
+              <a:rPr sz="1400" b="1" i="0">
+                <a:solidFill>
+                  <a:srgbClr val="FFFFFF"/>
+                </a:solidFill>
+                <a:latin typeface="Calibri"/>
+              </a:rPr>
+              <a:t>C</a:t>
+            </a:r>
+          </a:p>
+        </p:txBody>
+      </p:sp>
+      <p:sp>
+        <p:nvSpPr>
+          <p:cNvPr id="22" name="TextBox 21"/>
+          <p:cNvSpPr txBox="1"/>
+          <p:nvPr/>
+        </p:nvSpPr>
+        <p:spPr>
+          <a:xfrm>
+            <a:off x="1508760" y="4782312"/>
+            <a:ext cx="3840480" cy="868680"/>
+          </a:xfrm>
+          <a:prstGeom prst="rect">
+            <a:avLst/>
+          </a:prstGeom>
+          <a:noFill/>
+        </p:spPr>
+        <p:txBody>
+          <a:bodyPr wrap="square" anchor="ctr" lIns="0" rIns="0" tIns="0" bIns="0">
+            <a:spAutoFit/>
+          </a:bodyPr>
+          <a:lstStyle/>
+          <a:p>
+            <a:pPr algn="l"/>
+            <a:r>
+              <a:rPr sz="1450" b="0" i="0">
+                <a:solidFill>
+                  <a:srgbClr val="1D2433"/>
+                </a:solidFill>
+                <a:latin typeface="Calibri"/>
+              </a:rPr>
+              <a:t>They have no fulcrum</a:t>
+            </a:r>
+          </a:p>
+        </p:txBody>
+      </p:sp>
+      <p:sp>
+        <p:nvSpPr>
+          <p:cNvPr id="23" name="Rounded Rectangle 22"/>
+          <p:cNvSpPr/>
+          <p:nvPr/>
+        </p:nvSpPr>
+        <p:spPr>
+          <a:xfrm>
+            <a:off x="6172200" y="4782312"/>
+            <a:ext cx="5349240" cy="868680"/>
+          </a:xfrm>
+          <a:prstGeom prst="roundRect">
+            <a:avLst>
+              <a:gd name="adj" fmla="val 12000"/>
+            </a:avLst>
+          </a:prstGeom>
+          <a:solidFill>
+            <a:srgbClr val="EAF1F4"/>
+          </a:solidFill>
+          <a:ln>
+            <a:noFill/>
+          </a:ln>
+          <a:effectLst/>
+        </p:spPr>
+        <p:style>
+          <a:lnRef idx="1">
+            <a:schemeClr val="accent1"/>
+          </a:lnRef>
+          <a:fillRef idx="3">
+            <a:schemeClr val="accent1"/>
+          </a:fillRef>
+          <a:effectRef idx="2">
+            <a:schemeClr val="accent1"/>
+          </a:effectRef>
+          <a:fontRef idx="minor">
+            <a:schemeClr val="lt1"/>
+          </a:fontRef>
+        </p:style>
+        <p:txBody>
+          <a:bodyPr rtlCol="0" anchor="ctr"/>
+          <a:lstStyle/>
+          <a:p>
+            <a:pPr algn="ctr"/>
+          </a:p>
+        </p:txBody>
+      </p:sp>
+      <p:sp>
+        <p:nvSpPr>
+          <p:cNvPr id="24" name="Oval 23"/>
+          <p:cNvSpPr/>
+          <p:nvPr/>
+        </p:nvSpPr>
+        <p:spPr>
+          <a:xfrm>
+            <a:off x="6446520" y="5010912"/>
+            <a:ext cx="411480" cy="411480"/>
+          </a:xfrm>
+          <a:prstGeom prst="ellipse">
+            <a:avLst/>
+          </a:prstGeom>
+          <a:solidFill>
+            <a:srgbClr val="0A9396"/>
+          </a:solidFill>
+          <a:ln>
+            <a:noFill/>
+          </a:ln>
+          <a:effectLst/>
+        </p:spPr>
+        <p:style>
+          <a:lnRef idx="1">
+            <a:schemeClr val="accent1"/>
+          </a:lnRef>
+          <a:fillRef idx="3">
+            <a:schemeClr val="accent1"/>
+          </a:fillRef>
+          <a:effectRef idx="2">
+            <a:schemeClr val="accent1"/>
+          </a:effectRef>
+          <a:fontRef idx="minor">
+            <a:schemeClr val="lt1"/>
+          </a:fontRef>
+        </p:style>
+        <p:txBody>
+          <a:bodyPr rtlCol="0" anchor="ctr"/>
+          <a:lstStyle/>
+          <a:p>
+            <a:pPr algn="ctr"/>
+          </a:p>
+        </p:txBody>
+      </p:sp>
+      <p:sp>
+        <p:nvSpPr>
+          <p:cNvPr id="25" name="TextBox 24"/>
+          <p:cNvSpPr txBox="1"/>
+          <p:nvPr/>
+        </p:nvSpPr>
+        <p:spPr>
+          <a:xfrm>
+            <a:off x="6446520" y="5010912"/>
+            <a:ext cx="411480" cy="411480"/>
+          </a:xfrm>
+          <a:prstGeom prst="rect">
+            <a:avLst/>
+          </a:prstGeom>
+          <a:noFill/>
+        </p:spPr>
+        <p:txBody>
+          <a:bodyPr wrap="square" anchor="ctr" lIns="0" rIns="0" tIns="0" bIns="0">
+            <a:spAutoFit/>
+          </a:bodyPr>
+          <a:lstStyle/>
+          <a:p>
+            <a:pPr algn="ctr"/>
+            <a:r>
+              <a:rPr sz="1400" b="1" i="0">
+                <a:solidFill>
+                  <a:srgbClr val="FFFFFF"/>
+                </a:solidFill>
+                <a:latin typeface="Calibri"/>
+              </a:rPr>
+              <a:t>D</a:t>
+            </a:r>
+          </a:p>
+        </p:txBody>
+      </p:sp>
+      <p:sp>
+        <p:nvSpPr>
+          <p:cNvPr id="26" name="TextBox 25"/>
+          <p:cNvSpPr txBox="1"/>
+          <p:nvPr/>
+        </p:nvSpPr>
+        <p:spPr>
+          <a:xfrm>
+            <a:off x="7040880" y="4782312"/>
+            <a:ext cx="3840480" cy="868680"/>
+          </a:xfrm>
+          <a:prstGeom prst="rect">
+            <a:avLst/>
+          </a:prstGeom>
+          <a:noFill/>
+        </p:spPr>
+        <p:txBody>
+          <a:bodyPr wrap="square" anchor="ctr" lIns="0" rIns="0" tIns="0" bIns="0">
+            <a:spAutoFit/>
+          </a:bodyPr>
+          <a:lstStyle/>
+          <a:p>
+            <a:pPr algn="l"/>
+            <a:r>
+              <a:rPr sz="1450" b="0" i="0">
+                <a:solidFill>
+                  <a:srgbClr val="1D2433"/>
+                </a:solidFill>
+                <a:latin typeface="Calibri"/>
+              </a:rPr>
+              <a:t>The load is always zero</a:t>
+            </a:r>
+          </a:p>
+        </p:txBody>
+      </p:sp>
+      <p:sp>
+        <p:nvSpPr>
+          <p:cNvPr id="27" name="Rounded Rectangle 26"/>
+          <p:cNvSpPr/>
+          <p:nvPr/>
+        </p:nvSpPr>
+        <p:spPr>
+          <a:xfrm>
+            <a:off x="640080" y="5779008"/>
+            <a:ext cx="10881360" cy="566928"/>
+          </a:xfrm>
+          <a:prstGeom prst="roundRect">
+            <a:avLst>
+              <a:gd name="adj" fmla="val 10000"/>
+            </a:avLst>
+          </a:prstGeom>
+          <a:solidFill>
+            <a:srgbClr val="EEF2F7"/>
+          </a:solidFill>
+          <a:ln>
+            <a:noFill/>
+          </a:ln>
+          <a:effectLst/>
+        </p:spPr>
+        <p:style>
+          <a:lnRef idx="1">
+            <a:schemeClr val="accent1"/>
+          </a:lnRef>
+          <a:fillRef idx="3">
+            <a:schemeClr val="accent1"/>
+          </a:fillRef>
+          <a:effectRef idx="2">
+            <a:schemeClr val="accent1"/>
+          </a:effectRef>
+          <a:fontRef idx="minor">
+            <a:schemeClr val="lt1"/>
+          </a:fontRef>
+        </p:style>
+        <p:txBody>
+          <a:bodyPr rtlCol="0" anchor="ctr"/>
+          <a:lstStyle/>
+          <a:p>
+            <a:pPr algn="ctr"/>
+          </a:p>
+        </p:txBody>
+      </p:sp>
+      <p:sp>
+        <p:nvSpPr>
+          <p:cNvPr id="28" name="TextBox 27"/>
+          <p:cNvSpPr txBox="1"/>
+          <p:nvPr/>
+        </p:nvSpPr>
+        <p:spPr>
+          <a:xfrm>
+            <a:off x="914400" y="5779008"/>
+            <a:ext cx="10332720" cy="566928"/>
+          </a:xfrm>
+          <a:prstGeom prst="rect">
+            <a:avLst/>
+          </a:prstGeom>
+          <a:noFill/>
+        </p:spPr>
+        <p:txBody>
+          <a:bodyPr wrap="square" anchor="ctr" lIns="0" rIns="0" tIns="0" bIns="0">
+            <a:spAutoFit/>
+          </a:bodyPr>
+          <a:lstStyle/>
+          <a:p>
+            <a:pPr algn="l"/>
+            <a:r>
+              <a:rPr sz="1250" b="1" i="0">
+                <a:solidFill>
                   <a:srgbClr val="2A9D8F"/>
                 </a:solidFill>
                 <a:latin typeface="Arial"/>
               </a:rPr>
-              <a:t>WHY</a:t>
-            </a:r>
-          </a:p>
-        </p:txBody>
-      </p:sp>
-      <p:sp>
-        <p:nvSpPr>
-          <p:cNvPr id="13" name="TextBox 12"/>
-          <p:cNvSpPr txBox="1"/>
-          <p:nvPr/>
-        </p:nvSpPr>
-        <p:spPr>
-          <a:xfrm>
-            <a:off x="1005840" y="4297680"/>
-            <a:ext cx="10149840" cy="1280160"/>
-          </a:xfrm>
-          <a:prstGeom prst="rect">
-            <a:avLst/>
-          </a:prstGeom>
-          <a:noFill/>
-        </p:spPr>
-        <p:txBody>
-          <a:bodyPr wrap="square" anchor="t" lIns="0" rIns="0" tIns="0" bIns="0">
-            <a:spAutoFit/>
-          </a:bodyPr>
-          <a:lstStyle/>
-          <a:p>
-            <a:pPr algn="l">
-              <a:lnSpc>
-                <a:spcPct val="110000"/>
-              </a:lnSpc>
-            </a:pPr>
-            <a:r>
-              <a:rPr sz="1600" b="0" i="0">
+              <a:t>Why  </a:t>
+            </a:r>
+            <a:r>
+              <a:rPr sz="1200" b="0" i="0">
                 <a:solidFill>
                   <a:srgbClr val="1D2433"/>
                 </a:solidFill>
@@ -25480,9 +30568,33 @@
           </a:p>
         </p:txBody>
       </p:sp>
-      <p:sp>
-        <p:nvSpPr>
-          <p:cNvPr id="9" name="TextBox 8"/>
+      <p:pic>
+        <p:nvPicPr>
+          <p:cNvPr id="9" name="Picture 8" descr="icon_bolt.png"/>
+          <p:cNvPicPr>
+            <a:picLocks noChangeAspect="1"/>
+          </p:cNvPicPr>
+          <p:nvPr/>
+        </p:nvPicPr>
+        <p:blipFill>
+          <a:blip r:embed="rId2"/>
+          <a:stretch>
+            <a:fillRect/>
+          </a:stretch>
+        </p:blipFill>
+        <p:spPr>
+          <a:xfrm>
+            <a:off x="1051560" y="2304288"/>
+            <a:ext cx="320040" cy="320040"/>
+          </a:xfrm>
+          <a:prstGeom prst="rect">
+            <a:avLst/>
+          </a:prstGeom>
+        </p:spPr>
+      </p:pic>
+      <p:sp>
+        <p:nvSpPr>
+          <p:cNvPr id="10" name="TextBox 9"/>
           <p:cNvSpPr txBox="1"/>
           <p:nvPr/>
         </p:nvSpPr>
@@ -25517,7 +30629,7 @@
       </p:sp>
       <p:sp>
         <p:nvSpPr>
-          <p:cNvPr id="10" name="TextBox 9"/>
+          <p:cNvPr id="11" name="TextBox 10"/>
           <p:cNvSpPr txBox="1"/>
           <p:nvPr/>
         </p:nvSpPr>
@@ -25552,7 +30664,7 @@
       </p:sp>
       <p:sp>
         <p:nvSpPr>
-          <p:cNvPr id="11" name="Rounded Rectangle 10"/>
+          <p:cNvPr id="12" name="Rounded Rectangle 11"/>
           <p:cNvSpPr/>
           <p:nvPr/>
         </p:nvSpPr>
@@ -25604,7 +30716,7 @@
       </p:sp>
       <p:sp>
         <p:nvSpPr>
-          <p:cNvPr id="12" name="Rounded Rectangle 11"/>
+          <p:cNvPr id="13" name="Rounded Rectangle 12"/>
           <p:cNvSpPr/>
           <p:nvPr/>
         </p:nvSpPr>
@@ -25648,9 +30760,33 @@
           </a:p>
         </p:txBody>
       </p:sp>
-      <p:sp>
-        <p:nvSpPr>
-          <p:cNvPr id="13" name="TextBox 12"/>
+      <p:pic>
+        <p:nvPicPr>
+          <p:cNvPr id="14" name="Picture 13" descr="icon_ruler.png"/>
+          <p:cNvPicPr>
+            <a:picLocks noChangeAspect="1"/>
+          </p:cNvPicPr>
+          <p:nvPr/>
+        </p:nvPicPr>
+        <p:blipFill>
+          <a:blip r:embed="rId3"/>
+          <a:stretch>
+            <a:fillRect/>
+          </a:stretch>
+        </p:blipFill>
+        <p:spPr>
+          <a:xfrm>
+            <a:off x="6629400" y="2304288"/>
+            <a:ext cx="320040" cy="320040"/>
+          </a:xfrm>
+          <a:prstGeom prst="rect">
+            <a:avLst/>
+          </a:prstGeom>
+        </p:spPr>
+      </p:pic>
+      <p:sp>
+        <p:nvSpPr>
+          <p:cNvPr id="15" name="TextBox 14"/>
           <p:cNvSpPr txBox="1"/>
           <p:nvPr/>
         </p:nvSpPr>
@@ -25685,7 +30821,7 @@
       </p:sp>
       <p:sp>
         <p:nvSpPr>
-          <p:cNvPr id="14" name="TextBox 13"/>
+          <p:cNvPr id="16" name="TextBox 15"/>
           <p:cNvSpPr txBox="1"/>
           <p:nvPr/>
         </p:nvSpPr>
@@ -25720,7 +30856,7 @@
       </p:sp>
       <p:sp>
         <p:nvSpPr>
-          <p:cNvPr id="15" name="Rounded Rectangle 14"/>
+          <p:cNvPr id="17" name="Rounded Rectangle 16"/>
           <p:cNvSpPr/>
           <p:nvPr/>
         </p:nvSpPr>
@@ -25772,7 +30908,7 @@
       </p:sp>
       <p:sp>
         <p:nvSpPr>
-          <p:cNvPr id="16" name="Rounded Rectangle 15"/>
+          <p:cNvPr id="18" name="Rounded Rectangle 17"/>
           <p:cNvSpPr/>
           <p:nvPr/>
         </p:nvSpPr>
@@ -25816,9 +30952,33 @@
           </a:p>
         </p:txBody>
       </p:sp>
-      <p:sp>
-        <p:nvSpPr>
-          <p:cNvPr id="17" name="TextBox 16"/>
+      <p:pic>
+        <p:nvPicPr>
+          <p:cNvPr id="19" name="Picture 18" descr="icon_bolt.png"/>
+          <p:cNvPicPr>
+            <a:picLocks noChangeAspect="1"/>
+          </p:cNvPicPr>
+          <p:nvPr/>
+        </p:nvPicPr>
+        <p:blipFill>
+          <a:blip r:embed="rId2"/>
+          <a:stretch>
+            <a:fillRect/>
+          </a:stretch>
+        </p:blipFill>
+        <p:spPr>
+          <a:xfrm>
+            <a:off x="1051560" y="4133087"/>
+            <a:ext cx="320040" cy="320040"/>
+          </a:xfrm>
+          <a:prstGeom prst="rect">
+            <a:avLst/>
+          </a:prstGeom>
+        </p:spPr>
+      </p:pic>
+      <p:sp>
+        <p:nvSpPr>
+          <p:cNvPr id="20" name="TextBox 19"/>
           <p:cNvSpPr txBox="1"/>
           <p:nvPr/>
         </p:nvSpPr>
@@ -25853,7 +31013,7 @@
       </p:sp>
       <p:sp>
         <p:nvSpPr>
-          <p:cNvPr id="18" name="TextBox 17"/>
+          <p:cNvPr id="21" name="TextBox 20"/>
           <p:cNvSpPr txBox="1"/>
           <p:nvPr/>
         </p:nvSpPr>
@@ -25888,7 +31048,7 @@
       </p:sp>
       <p:sp>
         <p:nvSpPr>
-          <p:cNvPr id="19" name="Rounded Rectangle 18"/>
+          <p:cNvPr id="22" name="Rounded Rectangle 21"/>
           <p:cNvSpPr/>
           <p:nvPr/>
         </p:nvSpPr>
@@ -25940,7 +31100,7 @@
       </p:sp>
       <p:sp>
         <p:nvSpPr>
-          <p:cNvPr id="20" name="Rounded Rectangle 19"/>
+          <p:cNvPr id="23" name="Rounded Rectangle 22"/>
           <p:cNvSpPr/>
           <p:nvPr/>
         </p:nvSpPr>
@@ -25984,9 +31144,33 @@
           </a:p>
         </p:txBody>
       </p:sp>
-      <p:sp>
-        <p:nvSpPr>
-          <p:cNvPr id="21" name="TextBox 20"/>
+      <p:pic>
+        <p:nvPicPr>
+          <p:cNvPr id="24" name="Picture 23" descr="icon_bolt.png"/>
+          <p:cNvPicPr>
+            <a:picLocks noChangeAspect="1"/>
+          </p:cNvPicPr>
+          <p:nvPr/>
+        </p:nvPicPr>
+        <p:blipFill>
+          <a:blip r:embed="rId2"/>
+          <a:stretch>
+            <a:fillRect/>
+          </a:stretch>
+        </p:blipFill>
+        <p:spPr>
+          <a:xfrm>
+            <a:off x="6629400" y="4133087"/>
+            <a:ext cx="320040" cy="320040"/>
+          </a:xfrm>
+          <a:prstGeom prst="rect">
+            <a:avLst/>
+          </a:prstGeom>
+        </p:spPr>
+      </p:pic>
+      <p:sp>
+        <p:nvSpPr>
+          <p:cNvPr id="25" name="TextBox 24"/>
           <p:cNvSpPr txBox="1"/>
           <p:nvPr/>
         </p:nvSpPr>
@@ -26021,7 +31205,7 @@
       </p:sp>
       <p:sp>
         <p:nvSpPr>
-          <p:cNvPr id="22" name="TextBox 21"/>
+          <p:cNvPr id="26" name="TextBox 25"/>
           <p:cNvSpPr txBox="1"/>
           <p:nvPr/>
         </p:nvSpPr>
@@ -26853,9 +32037,33 @@
           </a:p>
         </p:txBody>
       </p:sp>
-      <p:sp>
-        <p:nvSpPr>
-          <p:cNvPr id="9" name="TextBox 8"/>
+      <p:pic>
+        <p:nvPicPr>
+          <p:cNvPr id="9" name="Picture 8" descr="icon_force.png"/>
+          <p:cNvPicPr>
+            <a:picLocks noChangeAspect="1"/>
+          </p:cNvPicPr>
+          <p:nvPr/>
+        </p:nvPicPr>
+        <p:blipFill>
+          <a:blip r:embed="rId2"/>
+          <a:stretch>
+            <a:fillRect/>
+          </a:stretch>
+        </p:blipFill>
+        <p:spPr>
+          <a:xfrm>
+            <a:off x="1051560" y="2304288"/>
+            <a:ext cx="320040" cy="320040"/>
+          </a:xfrm>
+          <a:prstGeom prst="rect">
+            <a:avLst/>
+          </a:prstGeom>
+        </p:spPr>
+      </p:pic>
+      <p:sp>
+        <p:nvSpPr>
+          <p:cNvPr id="10" name="TextBox 9"/>
           <p:cNvSpPr txBox="1"/>
           <p:nvPr/>
         </p:nvSpPr>
@@ -26890,7 +32098,7 @@
       </p:sp>
       <p:sp>
         <p:nvSpPr>
-          <p:cNvPr id="10" name="TextBox 9"/>
+          <p:cNvPr id="11" name="TextBox 10"/>
           <p:cNvSpPr txBox="1"/>
           <p:nvPr/>
         </p:nvSpPr>
@@ -26925,7 +32133,7 @@
       </p:sp>
       <p:sp>
         <p:nvSpPr>
-          <p:cNvPr id="11" name="Rounded Rectangle 10"/>
+          <p:cNvPr id="12" name="Rounded Rectangle 11"/>
           <p:cNvSpPr/>
           <p:nvPr/>
         </p:nvSpPr>
@@ -26977,7 +32185,7 @@
       </p:sp>
       <p:sp>
         <p:nvSpPr>
-          <p:cNvPr id="12" name="Rounded Rectangle 11"/>
+          <p:cNvPr id="13" name="Rounded Rectangle 12"/>
           <p:cNvSpPr/>
           <p:nvPr/>
         </p:nvSpPr>
@@ -27021,9 +32229,33 @@
           </a:p>
         </p:txBody>
       </p:sp>
-      <p:sp>
-        <p:nvSpPr>
-          <p:cNvPr id="13" name="TextBox 12"/>
+      <p:pic>
+        <p:nvPicPr>
+          <p:cNvPr id="14" name="Picture 13" descr="icon_compass.png"/>
+          <p:cNvPicPr>
+            <a:picLocks noChangeAspect="1"/>
+          </p:cNvPicPr>
+          <p:nvPr/>
+        </p:nvPicPr>
+        <p:blipFill>
+          <a:blip r:embed="rId3"/>
+          <a:stretch>
+            <a:fillRect/>
+          </a:stretch>
+        </p:blipFill>
+        <p:spPr>
+          <a:xfrm>
+            <a:off x="6629400" y="2304288"/>
+            <a:ext cx="320040" cy="320040"/>
+          </a:xfrm>
+          <a:prstGeom prst="rect">
+            <a:avLst/>
+          </a:prstGeom>
+        </p:spPr>
+      </p:pic>
+      <p:sp>
+        <p:nvSpPr>
+          <p:cNvPr id="15" name="TextBox 14"/>
           <p:cNvSpPr txBox="1"/>
           <p:nvPr/>
         </p:nvSpPr>
@@ -27058,7 +32290,7 @@
       </p:sp>
       <p:sp>
         <p:nvSpPr>
-          <p:cNvPr id="14" name="TextBox 13"/>
+          <p:cNvPr id="16" name="TextBox 15"/>
           <p:cNvSpPr txBox="1"/>
           <p:nvPr/>
         </p:nvSpPr>
@@ -27093,7 +32325,7 @@
       </p:sp>
       <p:sp>
         <p:nvSpPr>
-          <p:cNvPr id="15" name="Rounded Rectangle 14"/>
+          <p:cNvPr id="17" name="Rounded Rectangle 16"/>
           <p:cNvSpPr/>
           <p:nvPr/>
         </p:nvSpPr>
@@ -27145,7 +32377,7 @@
       </p:sp>
       <p:sp>
         <p:nvSpPr>
-          <p:cNvPr id="16" name="Rounded Rectangle 15"/>
+          <p:cNvPr id="18" name="Rounded Rectangle 17"/>
           <p:cNvSpPr/>
           <p:nvPr/>
         </p:nvSpPr>
@@ -27189,9 +32421,33 @@
           </a:p>
         </p:txBody>
       </p:sp>
-      <p:sp>
-        <p:nvSpPr>
-          <p:cNvPr id="17" name="TextBox 16"/>
+      <p:pic>
+        <p:nvPicPr>
+          <p:cNvPr id="19" name="Picture 18" descr="icon_gauge.png"/>
+          <p:cNvPicPr>
+            <a:picLocks noChangeAspect="1"/>
+          </p:cNvPicPr>
+          <p:nvPr/>
+        </p:nvPicPr>
+        <p:blipFill>
+          <a:blip r:embed="rId4"/>
+          <a:stretch>
+            <a:fillRect/>
+          </a:stretch>
+        </p:blipFill>
+        <p:spPr>
+          <a:xfrm>
+            <a:off x="1051560" y="4133087"/>
+            <a:ext cx="320040" cy="320040"/>
+          </a:xfrm>
+          <a:prstGeom prst="rect">
+            <a:avLst/>
+          </a:prstGeom>
+        </p:spPr>
+      </p:pic>
+      <p:sp>
+        <p:nvSpPr>
+          <p:cNvPr id="20" name="TextBox 19"/>
           <p:cNvSpPr txBox="1"/>
           <p:nvPr/>
         </p:nvSpPr>
@@ -27226,7 +32482,7 @@
       </p:sp>
       <p:sp>
         <p:nvSpPr>
-          <p:cNvPr id="18" name="TextBox 17"/>
+          <p:cNvPr id="21" name="TextBox 20"/>
           <p:cNvSpPr txBox="1"/>
           <p:nvPr/>
         </p:nvSpPr>
@@ -27261,7 +32517,7 @@
       </p:sp>
       <p:sp>
         <p:nvSpPr>
-          <p:cNvPr id="19" name="Rounded Rectangle 18"/>
+          <p:cNvPr id="22" name="Rounded Rectangle 21"/>
           <p:cNvSpPr/>
           <p:nvPr/>
         </p:nvSpPr>
@@ -27313,7 +32569,7 @@
       </p:sp>
       <p:sp>
         <p:nvSpPr>
-          <p:cNvPr id="20" name="Rounded Rectangle 19"/>
+          <p:cNvPr id="23" name="Rounded Rectangle 22"/>
           <p:cNvSpPr/>
           <p:nvPr/>
         </p:nvSpPr>
@@ -27357,9 +32613,33 @@
           </a:p>
         </p:txBody>
       </p:sp>
-      <p:sp>
-        <p:nvSpPr>
-          <p:cNvPr id="21" name="TextBox 20"/>
+      <p:pic>
+        <p:nvPicPr>
+          <p:cNvPr id="24" name="Picture 23" descr="icon_star.png"/>
+          <p:cNvPicPr>
+            <a:picLocks noChangeAspect="1"/>
+          </p:cNvPicPr>
+          <p:nvPr/>
+        </p:nvPicPr>
+        <p:blipFill>
+          <a:blip r:embed="rId5"/>
+          <a:stretch>
+            <a:fillRect/>
+          </a:stretch>
+        </p:blipFill>
+        <p:spPr>
+          <a:xfrm>
+            <a:off x="6629400" y="4133087"/>
+            <a:ext cx="320040" cy="320040"/>
+          </a:xfrm>
+          <a:prstGeom prst="rect">
+            <a:avLst/>
+          </a:prstGeom>
+        </p:spPr>
+      </p:pic>
+      <p:sp>
+        <p:nvSpPr>
+          <p:cNvPr id="25" name="TextBox 24"/>
           <p:cNvSpPr txBox="1"/>
           <p:nvPr/>
         </p:nvSpPr>
@@ -27394,7 +32674,7 @@
       </p:sp>
       <p:sp>
         <p:nvSpPr>
-          <p:cNvPr id="22" name="TextBox 21"/>
+          <p:cNvPr id="26" name="TextBox 25"/>
           <p:cNvSpPr txBox="1"/>
           <p:nvPr/>
         </p:nvSpPr>
